--- a/posts/mapspmx/animatedmap.pptx
+++ b/posts/mapspmx/animatedmap.pptx
@@ -8,14 +8,14 @@
     <p:sldId id="257" r:id="rId2"/>
     <p:sldId id="258" r:id="rId3"/>
   </p:sldIdLst>
-  <p:sldSz cx="7562850" cy="5330825"/>
+  <p:sldSz cx="4572000" cy="4572000"/>
   <p:notesSz cx="6858000" cy="9144000"/>
   <p:defaultTextStyle>
     <a:defPPr>
       <a:defRPr lang="en-US"/>
     </a:defPPr>
-    <a:lvl1pPr marL="0" algn="l" defTabSz="526227" rtl="0" eaLnBrk="1" latinLnBrk="0" hangingPunct="1">
-      <a:defRPr sz="1100" kern="1200">
+    <a:lvl1pPr marL="0" algn="l" defTabSz="447785" rtl="0" eaLnBrk="1" latinLnBrk="0" hangingPunct="1">
+      <a:defRPr sz="936" kern="1200">
         <a:solidFill>
           <a:schemeClr val="tx1"/>
         </a:solidFill>
@@ -24,8 +24,8 @@
         <a:cs typeface="+mn-cs"/>
       </a:defRPr>
     </a:lvl1pPr>
-    <a:lvl2pPr marL="263113" algn="l" defTabSz="526227" rtl="0" eaLnBrk="1" latinLnBrk="0" hangingPunct="1">
-      <a:defRPr sz="1100" kern="1200">
+    <a:lvl2pPr marL="223892" algn="l" defTabSz="447785" rtl="0" eaLnBrk="1" latinLnBrk="0" hangingPunct="1">
+      <a:defRPr sz="936" kern="1200">
         <a:solidFill>
           <a:schemeClr val="tx1"/>
         </a:solidFill>
@@ -34,8 +34,8 @@
         <a:cs typeface="+mn-cs"/>
       </a:defRPr>
     </a:lvl2pPr>
-    <a:lvl3pPr marL="526227" algn="l" defTabSz="526227" rtl="0" eaLnBrk="1" latinLnBrk="0" hangingPunct="1">
-      <a:defRPr sz="1100" kern="1200">
+    <a:lvl3pPr marL="447785" algn="l" defTabSz="447785" rtl="0" eaLnBrk="1" latinLnBrk="0" hangingPunct="1">
+      <a:defRPr sz="936" kern="1200">
         <a:solidFill>
           <a:schemeClr val="tx1"/>
         </a:solidFill>
@@ -44,8 +44,8 @@
         <a:cs typeface="+mn-cs"/>
       </a:defRPr>
     </a:lvl3pPr>
-    <a:lvl4pPr marL="789341" algn="l" defTabSz="526227" rtl="0" eaLnBrk="1" latinLnBrk="0" hangingPunct="1">
-      <a:defRPr sz="1100" kern="1200">
+    <a:lvl4pPr marL="671679" algn="l" defTabSz="447785" rtl="0" eaLnBrk="1" latinLnBrk="0" hangingPunct="1">
+      <a:defRPr sz="936" kern="1200">
         <a:solidFill>
           <a:schemeClr val="tx1"/>
         </a:solidFill>
@@ -54,8 +54,8 @@
         <a:cs typeface="+mn-cs"/>
       </a:defRPr>
     </a:lvl4pPr>
-    <a:lvl5pPr marL="1052454" algn="l" defTabSz="526227" rtl="0" eaLnBrk="1" latinLnBrk="0" hangingPunct="1">
-      <a:defRPr sz="1100" kern="1200">
+    <a:lvl5pPr marL="895571" algn="l" defTabSz="447785" rtl="0" eaLnBrk="1" latinLnBrk="0" hangingPunct="1">
+      <a:defRPr sz="936" kern="1200">
         <a:solidFill>
           <a:schemeClr val="tx1"/>
         </a:solidFill>
@@ -64,8 +64,8 @@
         <a:cs typeface="+mn-cs"/>
       </a:defRPr>
     </a:lvl5pPr>
-    <a:lvl6pPr marL="1315568" algn="l" defTabSz="526227" rtl="0" eaLnBrk="1" latinLnBrk="0" hangingPunct="1">
-      <a:defRPr sz="1100" kern="1200">
+    <a:lvl6pPr marL="1119464" algn="l" defTabSz="447785" rtl="0" eaLnBrk="1" latinLnBrk="0" hangingPunct="1">
+      <a:defRPr sz="936" kern="1200">
         <a:solidFill>
           <a:schemeClr val="tx1"/>
         </a:solidFill>
@@ -74,8 +74,8 @@
         <a:cs typeface="+mn-cs"/>
       </a:defRPr>
     </a:lvl6pPr>
-    <a:lvl7pPr marL="1578681" algn="l" defTabSz="526227" rtl="0" eaLnBrk="1" latinLnBrk="0" hangingPunct="1">
-      <a:defRPr sz="1100" kern="1200">
+    <a:lvl7pPr marL="1343357" algn="l" defTabSz="447785" rtl="0" eaLnBrk="1" latinLnBrk="0" hangingPunct="1">
+      <a:defRPr sz="936" kern="1200">
         <a:solidFill>
           <a:schemeClr val="tx1"/>
         </a:solidFill>
@@ -84,8 +84,8 @@
         <a:cs typeface="+mn-cs"/>
       </a:defRPr>
     </a:lvl7pPr>
-    <a:lvl8pPr marL="1841794" algn="l" defTabSz="526227" rtl="0" eaLnBrk="1" latinLnBrk="0" hangingPunct="1">
-      <a:defRPr sz="1100" kern="1200">
+    <a:lvl8pPr marL="1567249" algn="l" defTabSz="447785" rtl="0" eaLnBrk="1" latinLnBrk="0" hangingPunct="1">
+      <a:defRPr sz="936" kern="1200">
         <a:solidFill>
           <a:schemeClr val="tx1"/>
         </a:solidFill>
@@ -94,8 +94,8 @@
         <a:cs typeface="+mn-cs"/>
       </a:defRPr>
     </a:lvl8pPr>
-    <a:lvl9pPr marL="2104908" algn="l" defTabSz="526227" rtl="0" eaLnBrk="1" latinLnBrk="0" hangingPunct="1">
-      <a:defRPr sz="1100" kern="1200">
+    <a:lvl9pPr marL="1791142" algn="l" defTabSz="447785" rtl="0" eaLnBrk="1" latinLnBrk="0" hangingPunct="1">
+      <a:defRPr sz="936" kern="1200">
         <a:solidFill>
           <a:schemeClr val="tx1"/>
         </a:solidFill>
@@ -108,12 +108,12 @@
   <p:extLst>
     <p:ext uri="{EFAFB233-063F-42B5-8137-9DF3F51BA10A}">
       <p15:sldGuideLst xmlns:p15="http://schemas.microsoft.com/office/powerpoint/2012/main">
-        <p15:guide id="1" orient="horz" pos="1679">
+        <p15:guide id="1" orient="horz" pos="1440" userDrawn="1">
           <p15:clr>
             <a:srgbClr val="A4A3A4"/>
           </p15:clr>
         </p15:guide>
-        <p15:guide id="2" pos="2382">
+        <p15:guide id="2" pos="1440" userDrawn="1">
           <p15:clr>
             <a:srgbClr val="A4A3A4"/>
           </p15:clr>
@@ -127,9 +127,871 @@
 <file path=ppt/revisionInfo.xml><?xml version="1.0" encoding="utf-8"?>
 <p1510:revInfo xmlns:a="http://schemas.openxmlformats.org/drawingml/2006/main" xmlns:r="http://schemas.openxmlformats.org/officeDocument/2006/relationships" xmlns:p1510="http://schemas.microsoft.com/office/powerpoint/2015/10/main">
   <p1510:revLst>
-    <p1510:client id="{184C9720-B4EF-4604-BCEF-E212F37B03EA}" v="24" dt="2025-12-11T21:51:50.829"/>
+    <p1510:client id="{09739572-4A96-4E0B-B3F5-BDB4F7D1474F}" v="22" dt="2025-12-12T03:33:49.234"/>
   </p1510:revLst>
 </p1510:revInfo>
+</file>
+
+<file path=ppt/changesInfos/changesInfo1.xml><?xml version="1.0" encoding="utf-8"?>
+<pc:chgInfo xmlns:a="http://schemas.openxmlformats.org/drawingml/2006/main" xmlns:r="http://schemas.openxmlformats.org/officeDocument/2006/relationships" xmlns:ac="http://schemas.microsoft.com/office/drawing/2013/main/command" xmlns:pc="http://schemas.microsoft.com/office/powerpoint/2013/main/command">
+  <pc:docChgLst>
+    <pc:chgData name="Mouksassi, Samer" userId="5ddd9d3e-a68e-4323-87ac-2ed99798725a" providerId="ADAL" clId="{5B0F5E7A-1D9D-4A1F-A756-4B75D45140AB}"/>
+    <pc:docChg chg="custSel modSld modMainMaster">
+      <pc:chgData name="Mouksassi, Samer" userId="5ddd9d3e-a68e-4323-87ac-2ed99798725a" providerId="ADAL" clId="{5B0F5E7A-1D9D-4A1F-A756-4B75D45140AB}" dt="2025-12-12T03:33:05.146" v="174"/>
+      <pc:docMkLst>
+        <pc:docMk/>
+      </pc:docMkLst>
+      <pc:sldChg chg="modSp mod">
+        <pc:chgData name="Mouksassi, Samer" userId="5ddd9d3e-a68e-4323-87ac-2ed99798725a" providerId="ADAL" clId="{5B0F5E7A-1D9D-4A1F-A756-4B75D45140AB}" dt="2025-12-12T03:33:05.146" v="174"/>
+        <pc:sldMkLst>
+          <pc:docMk/>
+          <pc:sldMk cId="3358753484" sldId="257"/>
+        </pc:sldMkLst>
+        <pc:spChg chg="mod">
+          <ac:chgData name="Mouksassi, Samer" userId="5ddd9d3e-a68e-4323-87ac-2ed99798725a" providerId="ADAL" clId="{5B0F5E7A-1D9D-4A1F-A756-4B75D45140AB}" dt="2025-12-12T03:33:05.146" v="174"/>
+          <ac:spMkLst>
+            <pc:docMk/>
+            <pc:sldMk cId="3358753484" sldId="257"/>
+            <ac:spMk id="18" creationId="{E696DFD5-6FFB-AD19-F20D-70C01B388CDB}"/>
+          </ac:spMkLst>
+        </pc:spChg>
+        <pc:spChg chg="mod">
+          <ac:chgData name="Mouksassi, Samer" userId="5ddd9d3e-a68e-4323-87ac-2ed99798725a" providerId="ADAL" clId="{5B0F5E7A-1D9D-4A1F-A756-4B75D45140AB}" dt="2025-12-12T03:33:05.146" v="174"/>
+          <ac:spMkLst>
+            <pc:docMk/>
+            <pc:sldMk cId="3358753484" sldId="257"/>
+            <ac:spMk id="34" creationId="{55E96290-B8DB-5565-8E0B-46807692279E}"/>
+          </ac:spMkLst>
+        </pc:spChg>
+        <pc:spChg chg="mod">
+          <ac:chgData name="Mouksassi, Samer" userId="5ddd9d3e-a68e-4323-87ac-2ed99798725a" providerId="ADAL" clId="{5B0F5E7A-1D9D-4A1F-A756-4B75D45140AB}" dt="2025-12-12T03:33:05.146" v="174"/>
+          <ac:spMkLst>
+            <pc:docMk/>
+            <pc:sldMk cId="3358753484" sldId="257"/>
+            <ac:spMk id="44" creationId="{53C250E6-541F-23DF-5F35-6BE0462DE323}"/>
+          </ac:spMkLst>
+        </pc:spChg>
+        <pc:spChg chg="mod">
+          <ac:chgData name="Mouksassi, Samer" userId="5ddd9d3e-a68e-4323-87ac-2ed99798725a" providerId="ADAL" clId="{5B0F5E7A-1D9D-4A1F-A756-4B75D45140AB}" dt="2025-12-12T03:33:05.146" v="174"/>
+          <ac:spMkLst>
+            <pc:docMk/>
+            <pc:sldMk cId="3358753484" sldId="257"/>
+            <ac:spMk id="67" creationId="{BC9483D8-2899-1B9F-4B39-16619E768602}"/>
+          </ac:spMkLst>
+        </pc:spChg>
+        <pc:spChg chg="mod">
+          <ac:chgData name="Mouksassi, Samer" userId="5ddd9d3e-a68e-4323-87ac-2ed99798725a" providerId="ADAL" clId="{5B0F5E7A-1D9D-4A1F-A756-4B75D45140AB}" dt="2025-12-12T03:31:29.044" v="172" actId="207"/>
+          <ac:spMkLst>
+            <pc:docMk/>
+            <pc:sldMk cId="3358753484" sldId="257"/>
+            <ac:spMk id="70" creationId="{CAD72DC8-BFAE-0F7F-74B2-321BD0548B54}"/>
+          </ac:spMkLst>
+        </pc:spChg>
+        <pc:spChg chg="mod">
+          <ac:chgData name="Mouksassi, Samer" userId="5ddd9d3e-a68e-4323-87ac-2ed99798725a" providerId="ADAL" clId="{5B0F5E7A-1D9D-4A1F-A756-4B75D45140AB}" dt="2025-12-12T03:31:29.044" v="172" actId="207"/>
+          <ac:spMkLst>
+            <pc:docMk/>
+            <pc:sldMk cId="3358753484" sldId="257"/>
+            <ac:spMk id="71" creationId="{C728E614-C774-DC46-349F-B9F19E6D0D04}"/>
+          </ac:spMkLst>
+        </pc:spChg>
+        <pc:spChg chg="mod">
+          <ac:chgData name="Mouksassi, Samer" userId="5ddd9d3e-a68e-4323-87ac-2ed99798725a" providerId="ADAL" clId="{5B0F5E7A-1D9D-4A1F-A756-4B75D45140AB}" dt="2025-12-12T03:31:29.044" v="172" actId="207"/>
+          <ac:spMkLst>
+            <pc:docMk/>
+            <pc:sldMk cId="3358753484" sldId="257"/>
+            <ac:spMk id="72" creationId="{B2667409-5E03-6F6C-09CC-34A460226A8F}"/>
+          </ac:spMkLst>
+        </pc:spChg>
+        <pc:spChg chg="mod">
+          <ac:chgData name="Mouksassi, Samer" userId="5ddd9d3e-a68e-4323-87ac-2ed99798725a" providerId="ADAL" clId="{5B0F5E7A-1D9D-4A1F-A756-4B75D45140AB}" dt="2025-12-12T03:33:05.146" v="174"/>
+          <ac:spMkLst>
+            <pc:docMk/>
+            <pc:sldMk cId="3358753484" sldId="257"/>
+            <ac:spMk id="73" creationId="{6EA504EC-77E0-6A25-C941-164F2988E36C}"/>
+          </ac:spMkLst>
+        </pc:spChg>
+        <pc:spChg chg="mod">
+          <ac:chgData name="Mouksassi, Samer" userId="5ddd9d3e-a68e-4323-87ac-2ed99798725a" providerId="ADAL" clId="{5B0F5E7A-1D9D-4A1F-A756-4B75D45140AB}" dt="2025-12-12T03:31:29.044" v="172" actId="207"/>
+          <ac:spMkLst>
+            <pc:docMk/>
+            <pc:sldMk cId="3358753484" sldId="257"/>
+            <ac:spMk id="74" creationId="{F8D89D6D-4EE3-10BD-7D1D-38561DD9686E}"/>
+          </ac:spMkLst>
+        </pc:spChg>
+        <pc:spChg chg="mod">
+          <ac:chgData name="Mouksassi, Samer" userId="5ddd9d3e-a68e-4323-87ac-2ed99798725a" providerId="ADAL" clId="{5B0F5E7A-1D9D-4A1F-A756-4B75D45140AB}" dt="2025-12-12T03:31:29.044" v="172" actId="207"/>
+          <ac:spMkLst>
+            <pc:docMk/>
+            <pc:sldMk cId="3358753484" sldId="257"/>
+            <ac:spMk id="75" creationId="{1E9869BE-FF21-52AE-5B33-4457EB137FEE}"/>
+          </ac:spMkLst>
+        </pc:spChg>
+        <pc:spChg chg="mod">
+          <ac:chgData name="Mouksassi, Samer" userId="5ddd9d3e-a68e-4323-87ac-2ed99798725a" providerId="ADAL" clId="{5B0F5E7A-1D9D-4A1F-A756-4B75D45140AB}" dt="2025-12-12T03:31:29.044" v="172" actId="207"/>
+          <ac:spMkLst>
+            <pc:docMk/>
+            <pc:sldMk cId="3358753484" sldId="257"/>
+            <ac:spMk id="76" creationId="{5994F6C2-3049-5C49-AD7B-AE6B3968743C}"/>
+          </ac:spMkLst>
+        </pc:spChg>
+        <pc:spChg chg="mod">
+          <ac:chgData name="Mouksassi, Samer" userId="5ddd9d3e-a68e-4323-87ac-2ed99798725a" providerId="ADAL" clId="{5B0F5E7A-1D9D-4A1F-A756-4B75D45140AB}" dt="2025-12-12T03:31:29.044" v="172" actId="207"/>
+          <ac:spMkLst>
+            <pc:docMk/>
+            <pc:sldMk cId="3358753484" sldId="257"/>
+            <ac:spMk id="78" creationId="{DB9DA7A3-D071-0DF8-4312-13D453E731ED}"/>
+          </ac:spMkLst>
+        </pc:spChg>
+        <pc:spChg chg="mod">
+          <ac:chgData name="Mouksassi, Samer" userId="5ddd9d3e-a68e-4323-87ac-2ed99798725a" providerId="ADAL" clId="{5B0F5E7A-1D9D-4A1F-A756-4B75D45140AB}" dt="2025-12-12T03:31:29.044" v="172" actId="207"/>
+          <ac:spMkLst>
+            <pc:docMk/>
+            <pc:sldMk cId="3358753484" sldId="257"/>
+            <ac:spMk id="79" creationId="{BF382C69-3090-B790-36F7-0D952A4DA1DD}"/>
+          </ac:spMkLst>
+        </pc:spChg>
+        <pc:spChg chg="mod">
+          <ac:chgData name="Mouksassi, Samer" userId="5ddd9d3e-a68e-4323-87ac-2ed99798725a" providerId="ADAL" clId="{5B0F5E7A-1D9D-4A1F-A756-4B75D45140AB}" dt="2025-12-12T03:33:05.146" v="174"/>
+          <ac:spMkLst>
+            <pc:docMk/>
+            <pc:sldMk cId="3358753484" sldId="257"/>
+            <ac:spMk id="80" creationId="{9A651E85-7A26-D18E-2C6D-072C980E457D}"/>
+          </ac:spMkLst>
+        </pc:spChg>
+        <pc:spChg chg="mod">
+          <ac:chgData name="Mouksassi, Samer" userId="5ddd9d3e-a68e-4323-87ac-2ed99798725a" providerId="ADAL" clId="{5B0F5E7A-1D9D-4A1F-A756-4B75D45140AB}" dt="2025-12-12T03:31:29.044" v="172" actId="207"/>
+          <ac:spMkLst>
+            <pc:docMk/>
+            <pc:sldMk cId="3358753484" sldId="257"/>
+            <ac:spMk id="81" creationId="{242667E1-01A4-C719-8564-BA21FEC412E9}"/>
+          </ac:spMkLst>
+        </pc:spChg>
+        <pc:spChg chg="mod">
+          <ac:chgData name="Mouksassi, Samer" userId="5ddd9d3e-a68e-4323-87ac-2ed99798725a" providerId="ADAL" clId="{5B0F5E7A-1D9D-4A1F-A756-4B75D45140AB}" dt="2025-12-12T03:33:05.146" v="174"/>
+          <ac:spMkLst>
+            <pc:docMk/>
+            <pc:sldMk cId="3358753484" sldId="257"/>
+            <ac:spMk id="82" creationId="{A0413C0E-9030-78C4-2889-C446925A4BAD}"/>
+          </ac:spMkLst>
+        </pc:spChg>
+        <pc:spChg chg="mod">
+          <ac:chgData name="Mouksassi, Samer" userId="5ddd9d3e-a68e-4323-87ac-2ed99798725a" providerId="ADAL" clId="{5B0F5E7A-1D9D-4A1F-A756-4B75D45140AB}" dt="2025-12-12T03:31:33.115" v="173" actId="207"/>
+          <ac:spMkLst>
+            <pc:docMk/>
+            <pc:sldMk cId="3358753484" sldId="257"/>
+            <ac:spMk id="84" creationId="{DCC39EA7-36E2-4C71-9223-A8ABCD7BBADE}"/>
+          </ac:spMkLst>
+        </pc:spChg>
+        <pc:spChg chg="mod">
+          <ac:chgData name="Mouksassi, Samer" userId="5ddd9d3e-a68e-4323-87ac-2ed99798725a" providerId="ADAL" clId="{5B0F5E7A-1D9D-4A1F-A756-4B75D45140AB}" dt="2025-12-12T03:31:33.115" v="173" actId="207"/>
+          <ac:spMkLst>
+            <pc:docMk/>
+            <pc:sldMk cId="3358753484" sldId="257"/>
+            <ac:spMk id="86" creationId="{4440EE3B-6099-F69F-98C2-C0AFD010D3D9}"/>
+          </ac:spMkLst>
+        </pc:spChg>
+        <pc:spChg chg="mod">
+          <ac:chgData name="Mouksassi, Samer" userId="5ddd9d3e-a68e-4323-87ac-2ed99798725a" providerId="ADAL" clId="{5B0F5E7A-1D9D-4A1F-A756-4B75D45140AB}" dt="2025-12-12T03:31:33.115" v="173" actId="207"/>
+          <ac:spMkLst>
+            <pc:docMk/>
+            <pc:sldMk cId="3358753484" sldId="257"/>
+            <ac:spMk id="87" creationId="{81DF5285-8E4B-A069-98AA-3F5A313CAF7D}"/>
+          </ac:spMkLst>
+        </pc:spChg>
+        <pc:spChg chg="mod">
+          <ac:chgData name="Mouksassi, Samer" userId="5ddd9d3e-a68e-4323-87ac-2ed99798725a" providerId="ADAL" clId="{5B0F5E7A-1D9D-4A1F-A756-4B75D45140AB}" dt="2025-12-12T03:31:33.115" v="173" actId="207"/>
+          <ac:spMkLst>
+            <pc:docMk/>
+            <pc:sldMk cId="3358753484" sldId="257"/>
+            <ac:spMk id="88" creationId="{60100562-8E57-46AC-9B5A-FE415E306DFA}"/>
+          </ac:spMkLst>
+        </pc:spChg>
+        <pc:spChg chg="mod">
+          <ac:chgData name="Mouksassi, Samer" userId="5ddd9d3e-a68e-4323-87ac-2ed99798725a" providerId="ADAL" clId="{5B0F5E7A-1D9D-4A1F-A756-4B75D45140AB}" dt="2025-12-12T03:31:33.115" v="173" actId="207"/>
+          <ac:spMkLst>
+            <pc:docMk/>
+            <pc:sldMk cId="3358753484" sldId="257"/>
+            <ac:spMk id="90" creationId="{850ED9F5-5FC8-168E-8C7F-DA74E289387F}"/>
+          </ac:spMkLst>
+        </pc:spChg>
+        <pc:spChg chg="mod">
+          <ac:chgData name="Mouksassi, Samer" userId="5ddd9d3e-a68e-4323-87ac-2ed99798725a" providerId="ADAL" clId="{5B0F5E7A-1D9D-4A1F-A756-4B75D45140AB}" dt="2025-12-12T03:31:33.115" v="173" actId="207"/>
+          <ac:spMkLst>
+            <pc:docMk/>
+            <pc:sldMk cId="3358753484" sldId="257"/>
+            <ac:spMk id="91" creationId="{0B5DCD7B-3C0E-B85C-A307-2BD218B8E037}"/>
+          </ac:spMkLst>
+        </pc:spChg>
+        <pc:spChg chg="mod">
+          <ac:chgData name="Mouksassi, Samer" userId="5ddd9d3e-a68e-4323-87ac-2ed99798725a" providerId="ADAL" clId="{5B0F5E7A-1D9D-4A1F-A756-4B75D45140AB}" dt="2025-12-12T03:31:33.115" v="173" actId="207"/>
+          <ac:spMkLst>
+            <pc:docMk/>
+            <pc:sldMk cId="3358753484" sldId="257"/>
+            <ac:spMk id="92" creationId="{4D1CC47F-03E8-9ADC-4EC6-65A901C3D60F}"/>
+          </ac:spMkLst>
+        </pc:spChg>
+        <pc:spChg chg="mod">
+          <ac:chgData name="Mouksassi, Samer" userId="5ddd9d3e-a68e-4323-87ac-2ed99798725a" providerId="ADAL" clId="{5B0F5E7A-1D9D-4A1F-A756-4B75D45140AB}" dt="2025-12-12T03:31:33.115" v="173" actId="207"/>
+          <ac:spMkLst>
+            <pc:docMk/>
+            <pc:sldMk cId="3358753484" sldId="257"/>
+            <ac:spMk id="93" creationId="{04D2C7C7-49CF-DC7E-26F0-2814F511BACF}"/>
+          </ac:spMkLst>
+        </pc:spChg>
+        <pc:spChg chg="mod">
+          <ac:chgData name="Mouksassi, Samer" userId="5ddd9d3e-a68e-4323-87ac-2ed99798725a" providerId="ADAL" clId="{5B0F5E7A-1D9D-4A1F-A756-4B75D45140AB}" dt="2025-12-12T03:31:33.115" v="173" actId="207"/>
+          <ac:spMkLst>
+            <pc:docMk/>
+            <pc:sldMk cId="3358753484" sldId="257"/>
+            <ac:spMk id="95" creationId="{A98BE7C5-D9EB-61A5-2148-BE2F15319480}"/>
+          </ac:spMkLst>
+        </pc:spChg>
+        <pc:spChg chg="mod">
+          <ac:chgData name="Mouksassi, Samer" userId="5ddd9d3e-a68e-4323-87ac-2ed99798725a" providerId="ADAL" clId="{5B0F5E7A-1D9D-4A1F-A756-4B75D45140AB}" dt="2025-12-12T03:31:33.115" v="173" actId="207"/>
+          <ac:spMkLst>
+            <pc:docMk/>
+            <pc:sldMk cId="3358753484" sldId="257"/>
+            <ac:spMk id="96" creationId="{94712D17-F266-6C74-6A03-A4A5F5FF807B}"/>
+          </ac:spMkLst>
+        </pc:spChg>
+        <pc:spChg chg="mod">
+          <ac:chgData name="Mouksassi, Samer" userId="5ddd9d3e-a68e-4323-87ac-2ed99798725a" providerId="ADAL" clId="{5B0F5E7A-1D9D-4A1F-A756-4B75D45140AB}" dt="2025-12-12T03:33:05.146" v="174"/>
+          <ac:spMkLst>
+            <pc:docMk/>
+            <pc:sldMk cId="3358753484" sldId="257"/>
+            <ac:spMk id="114" creationId="{D08AD0DF-9163-0FAA-1844-88463EA23459}"/>
+          </ac:spMkLst>
+        </pc:spChg>
+        <pc:spChg chg="mod">
+          <ac:chgData name="Mouksassi, Samer" userId="5ddd9d3e-a68e-4323-87ac-2ed99798725a" providerId="ADAL" clId="{5B0F5E7A-1D9D-4A1F-A756-4B75D45140AB}" dt="2025-12-12T03:33:05.146" v="174"/>
+          <ac:spMkLst>
+            <pc:docMk/>
+            <pc:sldMk cId="3358753484" sldId="257"/>
+            <ac:spMk id="120" creationId="{247F8D7D-D7EC-CC90-D7F9-D9FE4C81F3B6}"/>
+          </ac:spMkLst>
+        </pc:spChg>
+        <pc:spChg chg="mod">
+          <ac:chgData name="Mouksassi, Samer" userId="5ddd9d3e-a68e-4323-87ac-2ed99798725a" providerId="ADAL" clId="{5B0F5E7A-1D9D-4A1F-A756-4B75D45140AB}" dt="2025-12-12T03:33:05.146" v="174"/>
+          <ac:spMkLst>
+            <pc:docMk/>
+            <pc:sldMk cId="3358753484" sldId="257"/>
+            <ac:spMk id="127" creationId="{1CE06509-7D46-F6E6-F165-2D9B66EF8781}"/>
+          </ac:spMkLst>
+        </pc:spChg>
+      </pc:sldChg>
+      <pc:sldChg chg="addSp delSp modSp mod">
+        <pc:chgData name="Mouksassi, Samer" userId="5ddd9d3e-a68e-4323-87ac-2ed99798725a" providerId="ADAL" clId="{5B0F5E7A-1D9D-4A1F-A756-4B75D45140AB}" dt="2025-12-12T03:33:05.146" v="174"/>
+        <pc:sldMkLst>
+          <pc:docMk/>
+          <pc:sldMk cId="3554878006" sldId="258"/>
+        </pc:sldMkLst>
+        <pc:spChg chg="del mod">
+          <ac:chgData name="Mouksassi, Samer" userId="5ddd9d3e-a68e-4323-87ac-2ed99798725a" providerId="ADAL" clId="{5B0F5E7A-1D9D-4A1F-A756-4B75D45140AB}" dt="2025-12-12T03:31:18.256" v="170" actId="478"/>
+          <ac:spMkLst>
+            <pc:docMk/>
+            <pc:sldMk cId="3554878006" sldId="258"/>
+            <ac:spMk id="4" creationId="{5A8AAFC7-7C78-4005-8C56-0D245423A6AF}"/>
+          </ac:spMkLst>
+        </pc:spChg>
+        <pc:spChg chg="mod">
+          <ac:chgData name="Mouksassi, Samer" userId="5ddd9d3e-a68e-4323-87ac-2ed99798725a" providerId="ADAL" clId="{5B0F5E7A-1D9D-4A1F-A756-4B75D45140AB}" dt="2025-12-12T03:33:05.146" v="174"/>
+          <ac:spMkLst>
+            <pc:docMk/>
+            <pc:sldMk cId="3554878006" sldId="258"/>
+            <ac:spMk id="35" creationId="{1F972CB0-056F-5D8D-3E0D-979BFCD34F6A}"/>
+          </ac:spMkLst>
+        </pc:spChg>
+        <pc:spChg chg="mod">
+          <ac:chgData name="Mouksassi, Samer" userId="5ddd9d3e-a68e-4323-87ac-2ed99798725a" providerId="ADAL" clId="{5B0F5E7A-1D9D-4A1F-A756-4B75D45140AB}" dt="2025-12-12T03:33:05.146" v="174"/>
+          <ac:spMkLst>
+            <pc:docMk/>
+            <pc:sldMk cId="3554878006" sldId="258"/>
+            <ac:spMk id="47" creationId="{540D4F51-9DA8-1929-5738-3185AB276A69}"/>
+          </ac:spMkLst>
+        </pc:spChg>
+        <pc:spChg chg="mod">
+          <ac:chgData name="Mouksassi, Samer" userId="5ddd9d3e-a68e-4323-87ac-2ed99798725a" providerId="ADAL" clId="{5B0F5E7A-1D9D-4A1F-A756-4B75D45140AB}" dt="2025-12-12T03:33:05.146" v="174"/>
+          <ac:spMkLst>
+            <pc:docMk/>
+            <pc:sldMk cId="3554878006" sldId="258"/>
+            <ac:spMk id="65" creationId="{5DDC7E2B-F560-7005-04C2-B4E6550EBA15}"/>
+          </ac:spMkLst>
+        </pc:spChg>
+        <pc:spChg chg="mod">
+          <ac:chgData name="Mouksassi, Samer" userId="5ddd9d3e-a68e-4323-87ac-2ed99798725a" providerId="ADAL" clId="{5B0F5E7A-1D9D-4A1F-A756-4B75D45140AB}" dt="2025-12-12T03:28:36.798" v="130" actId="1076"/>
+          <ac:spMkLst>
+            <pc:docMk/>
+            <pc:sldMk cId="3554878006" sldId="258"/>
+            <ac:spMk id="66" creationId="{E64B1EE4-F220-4BCF-C049-543428C20E85}"/>
+          </ac:spMkLst>
+        </pc:spChg>
+        <pc:spChg chg="mod">
+          <ac:chgData name="Mouksassi, Samer" userId="5ddd9d3e-a68e-4323-87ac-2ed99798725a" providerId="ADAL" clId="{5B0F5E7A-1D9D-4A1F-A756-4B75D45140AB}" dt="2025-12-12T03:33:05.146" v="174"/>
+          <ac:spMkLst>
+            <pc:docMk/>
+            <pc:sldMk cId="3554878006" sldId="258"/>
+            <ac:spMk id="68" creationId="{A202CED6-C3D6-9F2F-EF4E-5AE1F071D83F}"/>
+          </ac:spMkLst>
+        </pc:spChg>
+        <pc:spChg chg="mod">
+          <ac:chgData name="Mouksassi, Samer" userId="5ddd9d3e-a68e-4323-87ac-2ed99798725a" providerId="ADAL" clId="{5B0F5E7A-1D9D-4A1F-A756-4B75D45140AB}" dt="2025-12-12T03:31:13.015" v="168" actId="207"/>
+          <ac:spMkLst>
+            <pc:docMk/>
+            <pc:sldMk cId="3554878006" sldId="258"/>
+            <ac:spMk id="69" creationId="{EB95ECD2-7D87-DB40-2AC7-6ED0FDFF9779}"/>
+          </ac:spMkLst>
+        </pc:spChg>
+        <pc:spChg chg="mod">
+          <ac:chgData name="Mouksassi, Samer" userId="5ddd9d3e-a68e-4323-87ac-2ed99798725a" providerId="ADAL" clId="{5B0F5E7A-1D9D-4A1F-A756-4B75D45140AB}" dt="2025-12-12T03:31:13.015" v="168" actId="207"/>
+          <ac:spMkLst>
+            <pc:docMk/>
+            <pc:sldMk cId="3554878006" sldId="258"/>
+            <ac:spMk id="71" creationId="{7E52AFEF-7D8F-2E4B-C8F7-82C610FC67FC}"/>
+          </ac:spMkLst>
+        </pc:spChg>
+        <pc:spChg chg="mod">
+          <ac:chgData name="Mouksassi, Samer" userId="5ddd9d3e-a68e-4323-87ac-2ed99798725a" providerId="ADAL" clId="{5B0F5E7A-1D9D-4A1F-A756-4B75D45140AB}" dt="2025-12-12T03:33:05.146" v="174"/>
+          <ac:spMkLst>
+            <pc:docMk/>
+            <pc:sldMk cId="3554878006" sldId="258"/>
+            <ac:spMk id="72" creationId="{80A84359-3291-8A19-2B51-FAA48F6BDD31}"/>
+          </ac:spMkLst>
+        </pc:spChg>
+        <pc:spChg chg="mod">
+          <ac:chgData name="Mouksassi, Samer" userId="5ddd9d3e-a68e-4323-87ac-2ed99798725a" providerId="ADAL" clId="{5B0F5E7A-1D9D-4A1F-A756-4B75D45140AB}" dt="2025-12-12T03:33:05.146" v="174"/>
+          <ac:spMkLst>
+            <pc:docMk/>
+            <pc:sldMk cId="3554878006" sldId="258"/>
+            <ac:spMk id="74" creationId="{C21307DD-F989-B490-5827-EDEA3E913C5B}"/>
+          </ac:spMkLst>
+        </pc:spChg>
+        <pc:spChg chg="mod">
+          <ac:chgData name="Mouksassi, Samer" userId="5ddd9d3e-a68e-4323-87ac-2ed99798725a" providerId="ADAL" clId="{5B0F5E7A-1D9D-4A1F-A756-4B75D45140AB}" dt="2025-12-12T03:31:13.015" v="168" actId="207"/>
+          <ac:spMkLst>
+            <pc:docMk/>
+            <pc:sldMk cId="3554878006" sldId="258"/>
+            <ac:spMk id="75" creationId="{3A13A7E1-CB04-5180-AFB8-650264CF3231}"/>
+          </ac:spMkLst>
+        </pc:spChg>
+        <pc:spChg chg="mod">
+          <ac:chgData name="Mouksassi, Samer" userId="5ddd9d3e-a68e-4323-87ac-2ed99798725a" providerId="ADAL" clId="{5B0F5E7A-1D9D-4A1F-A756-4B75D45140AB}" dt="2025-12-12T03:31:13.015" v="168" actId="207"/>
+          <ac:spMkLst>
+            <pc:docMk/>
+            <pc:sldMk cId="3554878006" sldId="258"/>
+            <ac:spMk id="77" creationId="{6F1DA2E2-0164-FEB2-9C1A-DEC5E223E1DC}"/>
+          </ac:spMkLst>
+        </pc:spChg>
+        <pc:spChg chg="mod">
+          <ac:chgData name="Mouksassi, Samer" userId="5ddd9d3e-a68e-4323-87ac-2ed99798725a" providerId="ADAL" clId="{5B0F5E7A-1D9D-4A1F-A756-4B75D45140AB}" dt="2025-12-12T03:33:05.146" v="174"/>
+          <ac:spMkLst>
+            <pc:docMk/>
+            <pc:sldMk cId="3554878006" sldId="258"/>
+            <ac:spMk id="78" creationId="{F0ACFAD1-04E2-8C84-5B52-9E8473831FE0}"/>
+          </ac:spMkLst>
+        </pc:spChg>
+        <pc:spChg chg="mod">
+          <ac:chgData name="Mouksassi, Samer" userId="5ddd9d3e-a68e-4323-87ac-2ed99798725a" providerId="ADAL" clId="{5B0F5E7A-1D9D-4A1F-A756-4B75D45140AB}" dt="2025-12-12T03:31:13.015" v="168" actId="207"/>
+          <ac:spMkLst>
+            <pc:docMk/>
+            <pc:sldMk cId="3554878006" sldId="258"/>
+            <ac:spMk id="80" creationId="{E724959C-BD75-4F95-43FB-CA44E4E99E24}"/>
+          </ac:spMkLst>
+        </pc:spChg>
+        <pc:spChg chg="mod">
+          <ac:chgData name="Mouksassi, Samer" userId="5ddd9d3e-a68e-4323-87ac-2ed99798725a" providerId="ADAL" clId="{5B0F5E7A-1D9D-4A1F-A756-4B75D45140AB}" dt="2025-12-12T03:31:13.015" v="168" actId="207"/>
+          <ac:spMkLst>
+            <pc:docMk/>
+            <pc:sldMk cId="3554878006" sldId="258"/>
+            <ac:spMk id="81" creationId="{76958A7F-26CE-5A23-CBA8-49D7D7941605}"/>
+          </ac:spMkLst>
+        </pc:spChg>
+        <pc:spChg chg="mod">
+          <ac:chgData name="Mouksassi, Samer" userId="5ddd9d3e-a68e-4323-87ac-2ed99798725a" providerId="ADAL" clId="{5B0F5E7A-1D9D-4A1F-A756-4B75D45140AB}" dt="2025-12-12T03:31:13.015" v="168" actId="207"/>
+          <ac:spMkLst>
+            <pc:docMk/>
+            <pc:sldMk cId="3554878006" sldId="258"/>
+            <ac:spMk id="82" creationId="{64EEE45E-EC13-75F3-4413-2801081EEAF2}"/>
+          </ac:spMkLst>
+        </pc:spChg>
+        <pc:spChg chg="mod">
+          <ac:chgData name="Mouksassi, Samer" userId="5ddd9d3e-a68e-4323-87ac-2ed99798725a" providerId="ADAL" clId="{5B0F5E7A-1D9D-4A1F-A756-4B75D45140AB}" dt="2025-12-12T03:31:21.534" v="171" actId="207"/>
+          <ac:spMkLst>
+            <pc:docMk/>
+            <pc:sldMk cId="3554878006" sldId="258"/>
+            <ac:spMk id="83" creationId="{A4A2F402-ED2F-E6D8-B797-21F3461EB5E8}"/>
+          </ac:spMkLst>
+        </pc:spChg>
+        <pc:spChg chg="mod">
+          <ac:chgData name="Mouksassi, Samer" userId="5ddd9d3e-a68e-4323-87ac-2ed99798725a" providerId="ADAL" clId="{5B0F5E7A-1D9D-4A1F-A756-4B75D45140AB}" dt="2025-12-12T03:31:21.534" v="171" actId="207"/>
+          <ac:spMkLst>
+            <pc:docMk/>
+            <pc:sldMk cId="3554878006" sldId="258"/>
+            <ac:spMk id="84" creationId="{C2784868-BBA7-B882-8748-178294D248CA}"/>
+          </ac:spMkLst>
+        </pc:spChg>
+        <pc:spChg chg="mod">
+          <ac:chgData name="Mouksassi, Samer" userId="5ddd9d3e-a68e-4323-87ac-2ed99798725a" providerId="ADAL" clId="{5B0F5E7A-1D9D-4A1F-A756-4B75D45140AB}" dt="2025-12-12T03:31:21.534" v="171" actId="207"/>
+          <ac:spMkLst>
+            <pc:docMk/>
+            <pc:sldMk cId="3554878006" sldId="258"/>
+            <ac:spMk id="85" creationId="{AFABD57F-D3C9-DE63-ACFC-23DB70A190DC}"/>
+          </ac:spMkLst>
+        </pc:spChg>
+        <pc:spChg chg="mod">
+          <ac:chgData name="Mouksassi, Samer" userId="5ddd9d3e-a68e-4323-87ac-2ed99798725a" providerId="ADAL" clId="{5B0F5E7A-1D9D-4A1F-A756-4B75D45140AB}" dt="2025-12-12T03:31:21.534" v="171" actId="207"/>
+          <ac:spMkLst>
+            <pc:docMk/>
+            <pc:sldMk cId="3554878006" sldId="258"/>
+            <ac:spMk id="86" creationId="{43ABD79F-08E3-031F-6CC7-CD7FA217A009}"/>
+          </ac:spMkLst>
+        </pc:spChg>
+        <pc:spChg chg="mod">
+          <ac:chgData name="Mouksassi, Samer" userId="5ddd9d3e-a68e-4323-87ac-2ed99798725a" providerId="ADAL" clId="{5B0F5E7A-1D9D-4A1F-A756-4B75D45140AB}" dt="2025-12-12T03:31:21.534" v="171" actId="207"/>
+          <ac:spMkLst>
+            <pc:docMk/>
+            <pc:sldMk cId="3554878006" sldId="258"/>
+            <ac:spMk id="88" creationId="{3352ADA9-1A0A-2E2E-126E-8D4E5F6AE79B}"/>
+          </ac:spMkLst>
+        </pc:spChg>
+        <pc:spChg chg="mod">
+          <ac:chgData name="Mouksassi, Samer" userId="5ddd9d3e-a68e-4323-87ac-2ed99798725a" providerId="ADAL" clId="{5B0F5E7A-1D9D-4A1F-A756-4B75D45140AB}" dt="2025-12-12T03:31:21.534" v="171" actId="207"/>
+          <ac:spMkLst>
+            <pc:docMk/>
+            <pc:sldMk cId="3554878006" sldId="258"/>
+            <ac:spMk id="89" creationId="{AEC37FE0-425D-D359-8F70-B1A02CDE6C61}"/>
+          </ac:spMkLst>
+        </pc:spChg>
+        <pc:spChg chg="mod">
+          <ac:chgData name="Mouksassi, Samer" userId="5ddd9d3e-a68e-4323-87ac-2ed99798725a" providerId="ADAL" clId="{5B0F5E7A-1D9D-4A1F-A756-4B75D45140AB}" dt="2025-12-12T03:31:21.534" v="171" actId="207"/>
+          <ac:spMkLst>
+            <pc:docMk/>
+            <pc:sldMk cId="3554878006" sldId="258"/>
+            <ac:spMk id="91" creationId="{CA69383D-4F2E-AA79-ADF1-017D7A9C691E}"/>
+          </ac:spMkLst>
+        </pc:spChg>
+        <pc:spChg chg="mod">
+          <ac:chgData name="Mouksassi, Samer" userId="5ddd9d3e-a68e-4323-87ac-2ed99798725a" providerId="ADAL" clId="{5B0F5E7A-1D9D-4A1F-A756-4B75D45140AB}" dt="2025-12-12T03:33:05.146" v="174"/>
+          <ac:spMkLst>
+            <pc:docMk/>
+            <pc:sldMk cId="3554878006" sldId="258"/>
+            <ac:spMk id="92" creationId="{51D504F1-3A6A-C8A1-6BED-BCF9FE35F819}"/>
+          </ac:spMkLst>
+        </pc:spChg>
+        <pc:spChg chg="mod">
+          <ac:chgData name="Mouksassi, Samer" userId="5ddd9d3e-a68e-4323-87ac-2ed99798725a" providerId="ADAL" clId="{5B0F5E7A-1D9D-4A1F-A756-4B75D45140AB}" dt="2025-12-12T03:31:21.534" v="171" actId="207"/>
+          <ac:spMkLst>
+            <pc:docMk/>
+            <pc:sldMk cId="3554878006" sldId="258"/>
+            <ac:spMk id="93" creationId="{E58ACAAB-5343-E118-0C57-9B8F27322505}"/>
+          </ac:spMkLst>
+        </pc:spChg>
+        <pc:spChg chg="mod">
+          <ac:chgData name="Mouksassi, Samer" userId="5ddd9d3e-a68e-4323-87ac-2ed99798725a" providerId="ADAL" clId="{5B0F5E7A-1D9D-4A1F-A756-4B75D45140AB}" dt="2025-12-12T03:31:21.534" v="171" actId="207"/>
+          <ac:spMkLst>
+            <pc:docMk/>
+            <pc:sldMk cId="3554878006" sldId="258"/>
+            <ac:spMk id="95" creationId="{BBE8FA48-6755-D904-4138-48E1F34750A0}"/>
+          </ac:spMkLst>
+        </pc:spChg>
+        <pc:spChg chg="mod">
+          <ac:chgData name="Mouksassi, Samer" userId="5ddd9d3e-a68e-4323-87ac-2ed99798725a" providerId="ADAL" clId="{5B0F5E7A-1D9D-4A1F-A756-4B75D45140AB}" dt="2025-12-12T03:33:05.146" v="174"/>
+          <ac:spMkLst>
+            <pc:docMk/>
+            <pc:sldMk cId="3554878006" sldId="258"/>
+            <ac:spMk id="96" creationId="{D0B9713D-D8D4-6F59-EE39-5062197EE066}"/>
+          </ac:spMkLst>
+        </pc:spChg>
+        <pc:spChg chg="add mod">
+          <ac:chgData name="Mouksassi, Samer" userId="5ddd9d3e-a68e-4323-87ac-2ed99798725a" providerId="ADAL" clId="{5B0F5E7A-1D9D-4A1F-A756-4B75D45140AB}" dt="2025-12-12T03:25:39.327" v="51" actId="1076"/>
+          <ac:spMkLst>
+            <pc:docMk/>
+            <pc:sldMk cId="3554878006" sldId="258"/>
+            <ac:spMk id="117" creationId="{F14BC5B9-001E-4B1C-DB64-3431E63F9DD4}"/>
+          </ac:spMkLst>
+        </pc:spChg>
+        <pc:spChg chg="add del mod">
+          <ac:chgData name="Mouksassi, Samer" userId="5ddd9d3e-a68e-4323-87ac-2ed99798725a" providerId="ADAL" clId="{5B0F5E7A-1D9D-4A1F-A756-4B75D45140AB}" dt="2025-12-12T03:30:21.279" v="167" actId="478"/>
+          <ac:spMkLst>
+            <pc:docMk/>
+            <pc:sldMk cId="3554878006" sldId="258"/>
+            <ac:spMk id="119" creationId="{9140E7DB-145D-8F27-860E-3D8E57A498D3}"/>
+          </ac:spMkLst>
+        </pc:spChg>
+        <pc:spChg chg="add mod">
+          <ac:chgData name="Mouksassi, Samer" userId="5ddd9d3e-a68e-4323-87ac-2ed99798725a" providerId="ADAL" clId="{5B0F5E7A-1D9D-4A1F-A756-4B75D45140AB}" dt="2025-12-12T03:30:08.024" v="164" actId="1076"/>
+          <ac:spMkLst>
+            <pc:docMk/>
+            <pc:sldMk cId="3554878006" sldId="258"/>
+            <ac:spMk id="120" creationId="{B33B5A10-9C1D-0A2B-AF92-B1F582A77D70}"/>
+          </ac:spMkLst>
+        </pc:spChg>
+        <pc:spChg chg="add mod">
+          <ac:chgData name="Mouksassi, Samer" userId="5ddd9d3e-a68e-4323-87ac-2ed99798725a" providerId="ADAL" clId="{5B0F5E7A-1D9D-4A1F-A756-4B75D45140AB}" dt="2025-12-12T03:25:44.283" v="58" actId="20577"/>
+          <ac:spMkLst>
+            <pc:docMk/>
+            <pc:sldMk cId="3554878006" sldId="258"/>
+            <ac:spMk id="121" creationId="{99EE1128-E8BE-35DD-9B5B-9AA40EDA2DED}"/>
+          </ac:spMkLst>
+        </pc:spChg>
+        <pc:spChg chg="add mod">
+          <ac:chgData name="Mouksassi, Samer" userId="5ddd9d3e-a68e-4323-87ac-2ed99798725a" providerId="ADAL" clId="{5B0F5E7A-1D9D-4A1F-A756-4B75D45140AB}" dt="2025-12-12T03:26:04.397" v="61" actId="108"/>
+          <ac:spMkLst>
+            <pc:docMk/>
+            <pc:sldMk cId="3554878006" sldId="258"/>
+            <ac:spMk id="122" creationId="{7970B14E-6E66-61C1-9FED-139FD366DFCC}"/>
+          </ac:spMkLst>
+        </pc:spChg>
+        <pc:spChg chg="add mod">
+          <ac:chgData name="Mouksassi, Samer" userId="5ddd9d3e-a68e-4323-87ac-2ed99798725a" providerId="ADAL" clId="{5B0F5E7A-1D9D-4A1F-A756-4B75D45140AB}" dt="2025-12-12T03:30:12.386" v="165" actId="1076"/>
+          <ac:spMkLst>
+            <pc:docMk/>
+            <pc:sldMk cId="3554878006" sldId="258"/>
+            <ac:spMk id="123" creationId="{BA6AD47D-B516-28FB-A897-FCD4E6D74FC6}"/>
+          </ac:spMkLst>
+        </pc:spChg>
+        <pc:spChg chg="add mod">
+          <ac:chgData name="Mouksassi, Samer" userId="5ddd9d3e-a68e-4323-87ac-2ed99798725a" providerId="ADAL" clId="{5B0F5E7A-1D9D-4A1F-A756-4B75D45140AB}" dt="2025-12-12T03:30:18.751" v="166" actId="1076"/>
+          <ac:spMkLst>
+            <pc:docMk/>
+            <pc:sldMk cId="3554878006" sldId="258"/>
+            <ac:spMk id="124" creationId="{5084582F-6C7B-B8A1-A8F2-C67A2CF9414D}"/>
+          </ac:spMkLst>
+        </pc:spChg>
+        <pc:spChg chg="add mod">
+          <ac:chgData name="Mouksassi, Samer" userId="5ddd9d3e-a68e-4323-87ac-2ed99798725a" providerId="ADAL" clId="{5B0F5E7A-1D9D-4A1F-A756-4B75D45140AB}" dt="2025-12-12T03:26:52.307" v="98" actId="20577"/>
+          <ac:spMkLst>
+            <pc:docMk/>
+            <pc:sldMk cId="3554878006" sldId="258"/>
+            <ac:spMk id="125" creationId="{B400A5B1-787A-A4E0-B056-6C9C909A8081}"/>
+          </ac:spMkLst>
+        </pc:spChg>
+        <pc:spChg chg="add mod">
+          <ac:chgData name="Mouksassi, Samer" userId="5ddd9d3e-a68e-4323-87ac-2ed99798725a" providerId="ADAL" clId="{5B0F5E7A-1D9D-4A1F-A756-4B75D45140AB}" dt="2025-12-12T03:29:50.827" v="160" actId="1076"/>
+          <ac:spMkLst>
+            <pc:docMk/>
+            <pc:sldMk cId="3554878006" sldId="258"/>
+            <ac:spMk id="126" creationId="{84ACE411-F272-E4D9-33A0-1488FD9F44D3}"/>
+          </ac:spMkLst>
+        </pc:spChg>
+        <pc:spChg chg="add mod">
+          <ac:chgData name="Mouksassi, Samer" userId="5ddd9d3e-a68e-4323-87ac-2ed99798725a" providerId="ADAL" clId="{5B0F5E7A-1D9D-4A1F-A756-4B75D45140AB}" dt="2025-12-12T03:33:05.146" v="174"/>
+          <ac:spMkLst>
+            <pc:docMk/>
+            <pc:sldMk cId="3554878006" sldId="258"/>
+            <ac:spMk id="127" creationId="{00AB23FB-21A3-B497-186E-F0795DD2255F}"/>
+          </ac:spMkLst>
+        </pc:spChg>
+        <pc:spChg chg="add mod">
+          <ac:chgData name="Mouksassi, Samer" userId="5ddd9d3e-a68e-4323-87ac-2ed99798725a" providerId="ADAL" clId="{5B0F5E7A-1D9D-4A1F-A756-4B75D45140AB}" dt="2025-12-12T03:28:06.956" v="124" actId="1076"/>
+          <ac:spMkLst>
+            <pc:docMk/>
+            <pc:sldMk cId="3554878006" sldId="258"/>
+            <ac:spMk id="128" creationId="{00635B37-395A-7665-65CF-E41A57291981}"/>
+          </ac:spMkLst>
+        </pc:spChg>
+        <pc:spChg chg="add mod">
+          <ac:chgData name="Mouksassi, Samer" userId="5ddd9d3e-a68e-4323-87ac-2ed99798725a" providerId="ADAL" clId="{5B0F5E7A-1D9D-4A1F-A756-4B75D45140AB}" dt="2025-12-12T03:29:12.534" v="138" actId="20577"/>
+          <ac:spMkLst>
+            <pc:docMk/>
+            <pc:sldMk cId="3554878006" sldId="258"/>
+            <ac:spMk id="129" creationId="{F7EAC0F7-2448-72C1-9E69-9711D3A546ED}"/>
+          </ac:spMkLst>
+        </pc:spChg>
+        <pc:spChg chg="add mod">
+          <ac:chgData name="Mouksassi, Samer" userId="5ddd9d3e-a68e-4323-87ac-2ed99798725a" providerId="ADAL" clId="{5B0F5E7A-1D9D-4A1F-A756-4B75D45140AB}" dt="2025-12-12T03:29:16.249" v="140" actId="571"/>
+          <ac:spMkLst>
+            <pc:docMk/>
+            <pc:sldMk cId="3554878006" sldId="258"/>
+            <ac:spMk id="130" creationId="{44B69BDC-2FB4-6C94-8C09-D310AAE5B2FF}"/>
+          </ac:spMkLst>
+        </pc:spChg>
+        <pc:spChg chg="add mod">
+          <ac:chgData name="Mouksassi, Samer" userId="5ddd9d3e-a68e-4323-87ac-2ed99798725a" providerId="ADAL" clId="{5B0F5E7A-1D9D-4A1F-A756-4B75D45140AB}" dt="2025-12-12T03:29:28.085" v="154" actId="1076"/>
+          <ac:spMkLst>
+            <pc:docMk/>
+            <pc:sldMk cId="3554878006" sldId="258"/>
+            <ac:spMk id="131" creationId="{4E852EBC-E7D7-B977-8B14-9274203D837A}"/>
+          </ac:spMkLst>
+        </pc:spChg>
+      </pc:sldChg>
+      <pc:sldMasterChg chg="modSp modSldLayout">
+        <pc:chgData name="Mouksassi, Samer" userId="5ddd9d3e-a68e-4323-87ac-2ed99798725a" providerId="ADAL" clId="{5B0F5E7A-1D9D-4A1F-A756-4B75D45140AB}" dt="2025-12-12T03:33:05.146" v="174"/>
+        <pc:sldMasterMkLst>
+          <pc:docMk/>
+          <pc:sldMasterMk cId="666274591" sldId="2147483648"/>
+        </pc:sldMasterMkLst>
+        <pc:spChg chg="mod">
+          <ac:chgData name="Mouksassi, Samer" userId="5ddd9d3e-a68e-4323-87ac-2ed99798725a" providerId="ADAL" clId="{5B0F5E7A-1D9D-4A1F-A756-4B75D45140AB}" dt="2025-12-12T03:33:05.146" v="174"/>
+          <ac:spMkLst>
+            <pc:docMk/>
+            <pc:sldMasterMk cId="666274591" sldId="2147483648"/>
+            <ac:spMk id="2" creationId="{00000000-0000-0000-0000-000000000000}"/>
+          </ac:spMkLst>
+        </pc:spChg>
+        <pc:spChg chg="mod">
+          <ac:chgData name="Mouksassi, Samer" userId="5ddd9d3e-a68e-4323-87ac-2ed99798725a" providerId="ADAL" clId="{5B0F5E7A-1D9D-4A1F-A756-4B75D45140AB}" dt="2025-12-12T03:33:05.146" v="174"/>
+          <ac:spMkLst>
+            <pc:docMk/>
+            <pc:sldMasterMk cId="666274591" sldId="2147483648"/>
+            <ac:spMk id="3" creationId="{00000000-0000-0000-0000-000000000000}"/>
+          </ac:spMkLst>
+        </pc:spChg>
+        <pc:spChg chg="mod">
+          <ac:chgData name="Mouksassi, Samer" userId="5ddd9d3e-a68e-4323-87ac-2ed99798725a" providerId="ADAL" clId="{5B0F5E7A-1D9D-4A1F-A756-4B75D45140AB}" dt="2025-12-12T03:33:05.146" v="174"/>
+          <ac:spMkLst>
+            <pc:docMk/>
+            <pc:sldMasterMk cId="666274591" sldId="2147483648"/>
+            <ac:spMk id="4" creationId="{00000000-0000-0000-0000-000000000000}"/>
+          </ac:spMkLst>
+        </pc:spChg>
+        <pc:spChg chg="mod">
+          <ac:chgData name="Mouksassi, Samer" userId="5ddd9d3e-a68e-4323-87ac-2ed99798725a" providerId="ADAL" clId="{5B0F5E7A-1D9D-4A1F-A756-4B75D45140AB}" dt="2025-12-12T03:33:05.146" v="174"/>
+          <ac:spMkLst>
+            <pc:docMk/>
+            <pc:sldMasterMk cId="666274591" sldId="2147483648"/>
+            <ac:spMk id="5" creationId="{00000000-0000-0000-0000-000000000000}"/>
+          </ac:spMkLst>
+        </pc:spChg>
+        <pc:spChg chg="mod">
+          <ac:chgData name="Mouksassi, Samer" userId="5ddd9d3e-a68e-4323-87ac-2ed99798725a" providerId="ADAL" clId="{5B0F5E7A-1D9D-4A1F-A756-4B75D45140AB}" dt="2025-12-12T03:33:05.146" v="174"/>
+          <ac:spMkLst>
+            <pc:docMk/>
+            <pc:sldMasterMk cId="666274591" sldId="2147483648"/>
+            <ac:spMk id="6" creationId="{00000000-0000-0000-0000-000000000000}"/>
+          </ac:spMkLst>
+        </pc:spChg>
+        <pc:sldLayoutChg chg="modSp">
+          <pc:chgData name="Mouksassi, Samer" userId="5ddd9d3e-a68e-4323-87ac-2ed99798725a" providerId="ADAL" clId="{5B0F5E7A-1D9D-4A1F-A756-4B75D45140AB}" dt="2025-12-12T03:33:05.146" v="174"/>
+          <pc:sldLayoutMkLst>
+            <pc:docMk/>
+            <pc:sldMasterMk cId="666274591" sldId="2147483648"/>
+            <pc:sldLayoutMk cId="329626357" sldId="2147483649"/>
+          </pc:sldLayoutMkLst>
+          <pc:spChg chg="mod">
+            <ac:chgData name="Mouksassi, Samer" userId="5ddd9d3e-a68e-4323-87ac-2ed99798725a" providerId="ADAL" clId="{5B0F5E7A-1D9D-4A1F-A756-4B75D45140AB}" dt="2025-12-12T03:33:05.146" v="174"/>
+            <ac:spMkLst>
+              <pc:docMk/>
+              <pc:sldMasterMk cId="666274591" sldId="2147483648"/>
+              <pc:sldLayoutMk cId="329626357" sldId="2147483649"/>
+              <ac:spMk id="2" creationId="{00000000-0000-0000-0000-000000000000}"/>
+            </ac:spMkLst>
+          </pc:spChg>
+          <pc:spChg chg="mod">
+            <ac:chgData name="Mouksassi, Samer" userId="5ddd9d3e-a68e-4323-87ac-2ed99798725a" providerId="ADAL" clId="{5B0F5E7A-1D9D-4A1F-A756-4B75D45140AB}" dt="2025-12-12T03:33:05.146" v="174"/>
+            <ac:spMkLst>
+              <pc:docMk/>
+              <pc:sldMasterMk cId="666274591" sldId="2147483648"/>
+              <pc:sldLayoutMk cId="329626357" sldId="2147483649"/>
+              <ac:spMk id="3" creationId="{00000000-0000-0000-0000-000000000000}"/>
+            </ac:spMkLst>
+          </pc:spChg>
+        </pc:sldLayoutChg>
+        <pc:sldLayoutChg chg="modSp">
+          <pc:chgData name="Mouksassi, Samer" userId="5ddd9d3e-a68e-4323-87ac-2ed99798725a" providerId="ADAL" clId="{5B0F5E7A-1D9D-4A1F-A756-4B75D45140AB}" dt="2025-12-12T03:33:05.146" v="174"/>
+          <pc:sldLayoutMkLst>
+            <pc:docMk/>
+            <pc:sldMasterMk cId="666274591" sldId="2147483648"/>
+            <pc:sldLayoutMk cId="2061327686" sldId="2147483651"/>
+          </pc:sldLayoutMkLst>
+          <pc:spChg chg="mod">
+            <ac:chgData name="Mouksassi, Samer" userId="5ddd9d3e-a68e-4323-87ac-2ed99798725a" providerId="ADAL" clId="{5B0F5E7A-1D9D-4A1F-A756-4B75D45140AB}" dt="2025-12-12T03:33:05.146" v="174"/>
+            <ac:spMkLst>
+              <pc:docMk/>
+              <pc:sldMasterMk cId="666274591" sldId="2147483648"/>
+              <pc:sldLayoutMk cId="2061327686" sldId="2147483651"/>
+              <ac:spMk id="2" creationId="{00000000-0000-0000-0000-000000000000}"/>
+            </ac:spMkLst>
+          </pc:spChg>
+          <pc:spChg chg="mod">
+            <ac:chgData name="Mouksassi, Samer" userId="5ddd9d3e-a68e-4323-87ac-2ed99798725a" providerId="ADAL" clId="{5B0F5E7A-1D9D-4A1F-A756-4B75D45140AB}" dt="2025-12-12T03:33:05.146" v="174"/>
+            <ac:spMkLst>
+              <pc:docMk/>
+              <pc:sldMasterMk cId="666274591" sldId="2147483648"/>
+              <pc:sldLayoutMk cId="2061327686" sldId="2147483651"/>
+              <ac:spMk id="3" creationId="{00000000-0000-0000-0000-000000000000}"/>
+            </ac:spMkLst>
+          </pc:spChg>
+        </pc:sldLayoutChg>
+        <pc:sldLayoutChg chg="modSp">
+          <pc:chgData name="Mouksassi, Samer" userId="5ddd9d3e-a68e-4323-87ac-2ed99798725a" providerId="ADAL" clId="{5B0F5E7A-1D9D-4A1F-A756-4B75D45140AB}" dt="2025-12-12T03:33:05.146" v="174"/>
+          <pc:sldLayoutMkLst>
+            <pc:docMk/>
+            <pc:sldMasterMk cId="666274591" sldId="2147483648"/>
+            <pc:sldLayoutMk cId="3083140367" sldId="2147483652"/>
+          </pc:sldLayoutMkLst>
+          <pc:spChg chg="mod">
+            <ac:chgData name="Mouksassi, Samer" userId="5ddd9d3e-a68e-4323-87ac-2ed99798725a" providerId="ADAL" clId="{5B0F5E7A-1D9D-4A1F-A756-4B75D45140AB}" dt="2025-12-12T03:33:05.146" v="174"/>
+            <ac:spMkLst>
+              <pc:docMk/>
+              <pc:sldMasterMk cId="666274591" sldId="2147483648"/>
+              <pc:sldLayoutMk cId="3083140367" sldId="2147483652"/>
+              <ac:spMk id="3" creationId="{00000000-0000-0000-0000-000000000000}"/>
+            </ac:spMkLst>
+          </pc:spChg>
+          <pc:spChg chg="mod">
+            <ac:chgData name="Mouksassi, Samer" userId="5ddd9d3e-a68e-4323-87ac-2ed99798725a" providerId="ADAL" clId="{5B0F5E7A-1D9D-4A1F-A756-4B75D45140AB}" dt="2025-12-12T03:33:05.146" v="174"/>
+            <ac:spMkLst>
+              <pc:docMk/>
+              <pc:sldMasterMk cId="666274591" sldId="2147483648"/>
+              <pc:sldLayoutMk cId="3083140367" sldId="2147483652"/>
+              <ac:spMk id="4" creationId="{00000000-0000-0000-0000-000000000000}"/>
+            </ac:spMkLst>
+          </pc:spChg>
+        </pc:sldLayoutChg>
+        <pc:sldLayoutChg chg="modSp">
+          <pc:chgData name="Mouksassi, Samer" userId="5ddd9d3e-a68e-4323-87ac-2ed99798725a" providerId="ADAL" clId="{5B0F5E7A-1D9D-4A1F-A756-4B75D45140AB}" dt="2025-12-12T03:33:05.146" v="174"/>
+          <pc:sldLayoutMkLst>
+            <pc:docMk/>
+            <pc:sldMasterMk cId="666274591" sldId="2147483648"/>
+            <pc:sldLayoutMk cId="4230559702" sldId="2147483653"/>
+          </pc:sldLayoutMkLst>
+          <pc:spChg chg="mod">
+            <ac:chgData name="Mouksassi, Samer" userId="5ddd9d3e-a68e-4323-87ac-2ed99798725a" providerId="ADAL" clId="{5B0F5E7A-1D9D-4A1F-A756-4B75D45140AB}" dt="2025-12-12T03:33:05.146" v="174"/>
+            <ac:spMkLst>
+              <pc:docMk/>
+              <pc:sldMasterMk cId="666274591" sldId="2147483648"/>
+              <pc:sldLayoutMk cId="4230559702" sldId="2147483653"/>
+              <ac:spMk id="2" creationId="{00000000-0000-0000-0000-000000000000}"/>
+            </ac:spMkLst>
+          </pc:spChg>
+          <pc:spChg chg="mod">
+            <ac:chgData name="Mouksassi, Samer" userId="5ddd9d3e-a68e-4323-87ac-2ed99798725a" providerId="ADAL" clId="{5B0F5E7A-1D9D-4A1F-A756-4B75D45140AB}" dt="2025-12-12T03:33:05.146" v="174"/>
+            <ac:spMkLst>
+              <pc:docMk/>
+              <pc:sldMasterMk cId="666274591" sldId="2147483648"/>
+              <pc:sldLayoutMk cId="4230559702" sldId="2147483653"/>
+              <ac:spMk id="3" creationId="{00000000-0000-0000-0000-000000000000}"/>
+            </ac:spMkLst>
+          </pc:spChg>
+          <pc:spChg chg="mod">
+            <ac:chgData name="Mouksassi, Samer" userId="5ddd9d3e-a68e-4323-87ac-2ed99798725a" providerId="ADAL" clId="{5B0F5E7A-1D9D-4A1F-A756-4B75D45140AB}" dt="2025-12-12T03:33:05.146" v="174"/>
+            <ac:spMkLst>
+              <pc:docMk/>
+              <pc:sldMasterMk cId="666274591" sldId="2147483648"/>
+              <pc:sldLayoutMk cId="4230559702" sldId="2147483653"/>
+              <ac:spMk id="4" creationId="{00000000-0000-0000-0000-000000000000}"/>
+            </ac:spMkLst>
+          </pc:spChg>
+          <pc:spChg chg="mod">
+            <ac:chgData name="Mouksassi, Samer" userId="5ddd9d3e-a68e-4323-87ac-2ed99798725a" providerId="ADAL" clId="{5B0F5E7A-1D9D-4A1F-A756-4B75D45140AB}" dt="2025-12-12T03:33:05.146" v="174"/>
+            <ac:spMkLst>
+              <pc:docMk/>
+              <pc:sldMasterMk cId="666274591" sldId="2147483648"/>
+              <pc:sldLayoutMk cId="4230559702" sldId="2147483653"/>
+              <ac:spMk id="5" creationId="{00000000-0000-0000-0000-000000000000}"/>
+            </ac:spMkLst>
+          </pc:spChg>
+          <pc:spChg chg="mod">
+            <ac:chgData name="Mouksassi, Samer" userId="5ddd9d3e-a68e-4323-87ac-2ed99798725a" providerId="ADAL" clId="{5B0F5E7A-1D9D-4A1F-A756-4B75D45140AB}" dt="2025-12-12T03:33:05.146" v="174"/>
+            <ac:spMkLst>
+              <pc:docMk/>
+              <pc:sldMasterMk cId="666274591" sldId="2147483648"/>
+              <pc:sldLayoutMk cId="4230559702" sldId="2147483653"/>
+              <ac:spMk id="6" creationId="{00000000-0000-0000-0000-000000000000}"/>
+            </ac:spMkLst>
+          </pc:spChg>
+        </pc:sldLayoutChg>
+        <pc:sldLayoutChg chg="modSp">
+          <pc:chgData name="Mouksassi, Samer" userId="5ddd9d3e-a68e-4323-87ac-2ed99798725a" providerId="ADAL" clId="{5B0F5E7A-1D9D-4A1F-A756-4B75D45140AB}" dt="2025-12-12T03:33:05.146" v="174"/>
+          <pc:sldLayoutMkLst>
+            <pc:docMk/>
+            <pc:sldMasterMk cId="666274591" sldId="2147483648"/>
+            <pc:sldLayoutMk cId="1310804531" sldId="2147483656"/>
+          </pc:sldLayoutMkLst>
+          <pc:spChg chg="mod">
+            <ac:chgData name="Mouksassi, Samer" userId="5ddd9d3e-a68e-4323-87ac-2ed99798725a" providerId="ADAL" clId="{5B0F5E7A-1D9D-4A1F-A756-4B75D45140AB}" dt="2025-12-12T03:33:05.146" v="174"/>
+            <ac:spMkLst>
+              <pc:docMk/>
+              <pc:sldMasterMk cId="666274591" sldId="2147483648"/>
+              <pc:sldLayoutMk cId="1310804531" sldId="2147483656"/>
+              <ac:spMk id="2" creationId="{00000000-0000-0000-0000-000000000000}"/>
+            </ac:spMkLst>
+          </pc:spChg>
+          <pc:spChg chg="mod">
+            <ac:chgData name="Mouksassi, Samer" userId="5ddd9d3e-a68e-4323-87ac-2ed99798725a" providerId="ADAL" clId="{5B0F5E7A-1D9D-4A1F-A756-4B75D45140AB}" dt="2025-12-12T03:33:05.146" v="174"/>
+            <ac:spMkLst>
+              <pc:docMk/>
+              <pc:sldMasterMk cId="666274591" sldId="2147483648"/>
+              <pc:sldLayoutMk cId="1310804531" sldId="2147483656"/>
+              <ac:spMk id="3" creationId="{00000000-0000-0000-0000-000000000000}"/>
+            </ac:spMkLst>
+          </pc:spChg>
+          <pc:spChg chg="mod">
+            <ac:chgData name="Mouksassi, Samer" userId="5ddd9d3e-a68e-4323-87ac-2ed99798725a" providerId="ADAL" clId="{5B0F5E7A-1D9D-4A1F-A756-4B75D45140AB}" dt="2025-12-12T03:33:05.146" v="174"/>
+            <ac:spMkLst>
+              <pc:docMk/>
+              <pc:sldMasterMk cId="666274591" sldId="2147483648"/>
+              <pc:sldLayoutMk cId="1310804531" sldId="2147483656"/>
+              <ac:spMk id="4" creationId="{00000000-0000-0000-0000-000000000000}"/>
+            </ac:spMkLst>
+          </pc:spChg>
+        </pc:sldLayoutChg>
+        <pc:sldLayoutChg chg="modSp">
+          <pc:chgData name="Mouksassi, Samer" userId="5ddd9d3e-a68e-4323-87ac-2ed99798725a" providerId="ADAL" clId="{5B0F5E7A-1D9D-4A1F-A756-4B75D45140AB}" dt="2025-12-12T03:33:05.146" v="174"/>
+          <pc:sldLayoutMkLst>
+            <pc:docMk/>
+            <pc:sldMasterMk cId="666274591" sldId="2147483648"/>
+            <pc:sldLayoutMk cId="1056271408" sldId="2147483657"/>
+          </pc:sldLayoutMkLst>
+          <pc:spChg chg="mod">
+            <ac:chgData name="Mouksassi, Samer" userId="5ddd9d3e-a68e-4323-87ac-2ed99798725a" providerId="ADAL" clId="{5B0F5E7A-1D9D-4A1F-A756-4B75D45140AB}" dt="2025-12-12T03:33:05.146" v="174"/>
+            <ac:spMkLst>
+              <pc:docMk/>
+              <pc:sldMasterMk cId="666274591" sldId="2147483648"/>
+              <pc:sldLayoutMk cId="1056271408" sldId="2147483657"/>
+              <ac:spMk id="2" creationId="{00000000-0000-0000-0000-000000000000}"/>
+            </ac:spMkLst>
+          </pc:spChg>
+          <pc:spChg chg="mod">
+            <ac:chgData name="Mouksassi, Samer" userId="5ddd9d3e-a68e-4323-87ac-2ed99798725a" providerId="ADAL" clId="{5B0F5E7A-1D9D-4A1F-A756-4B75D45140AB}" dt="2025-12-12T03:33:05.146" v="174"/>
+            <ac:spMkLst>
+              <pc:docMk/>
+              <pc:sldMasterMk cId="666274591" sldId="2147483648"/>
+              <pc:sldLayoutMk cId="1056271408" sldId="2147483657"/>
+              <ac:spMk id="3" creationId="{00000000-0000-0000-0000-000000000000}"/>
+            </ac:spMkLst>
+          </pc:spChg>
+          <pc:spChg chg="mod">
+            <ac:chgData name="Mouksassi, Samer" userId="5ddd9d3e-a68e-4323-87ac-2ed99798725a" providerId="ADAL" clId="{5B0F5E7A-1D9D-4A1F-A756-4B75D45140AB}" dt="2025-12-12T03:33:05.146" v="174"/>
+            <ac:spMkLst>
+              <pc:docMk/>
+              <pc:sldMasterMk cId="666274591" sldId="2147483648"/>
+              <pc:sldLayoutMk cId="1056271408" sldId="2147483657"/>
+              <ac:spMk id="4" creationId="{00000000-0000-0000-0000-000000000000}"/>
+            </ac:spMkLst>
+          </pc:spChg>
+        </pc:sldLayoutChg>
+        <pc:sldLayoutChg chg="modSp">
+          <pc:chgData name="Mouksassi, Samer" userId="5ddd9d3e-a68e-4323-87ac-2ed99798725a" providerId="ADAL" clId="{5B0F5E7A-1D9D-4A1F-A756-4B75D45140AB}" dt="2025-12-12T03:33:05.146" v="174"/>
+          <pc:sldLayoutMkLst>
+            <pc:docMk/>
+            <pc:sldMasterMk cId="666274591" sldId="2147483648"/>
+            <pc:sldLayoutMk cId="1715730913" sldId="2147483659"/>
+          </pc:sldLayoutMkLst>
+          <pc:spChg chg="mod">
+            <ac:chgData name="Mouksassi, Samer" userId="5ddd9d3e-a68e-4323-87ac-2ed99798725a" providerId="ADAL" clId="{5B0F5E7A-1D9D-4A1F-A756-4B75D45140AB}" dt="2025-12-12T03:33:05.146" v="174"/>
+            <ac:spMkLst>
+              <pc:docMk/>
+              <pc:sldMasterMk cId="666274591" sldId="2147483648"/>
+              <pc:sldLayoutMk cId="1715730913" sldId="2147483659"/>
+              <ac:spMk id="2" creationId="{00000000-0000-0000-0000-000000000000}"/>
+            </ac:spMkLst>
+          </pc:spChg>
+          <pc:spChg chg="mod">
+            <ac:chgData name="Mouksassi, Samer" userId="5ddd9d3e-a68e-4323-87ac-2ed99798725a" providerId="ADAL" clId="{5B0F5E7A-1D9D-4A1F-A756-4B75D45140AB}" dt="2025-12-12T03:33:05.146" v="174"/>
+            <ac:spMkLst>
+              <pc:docMk/>
+              <pc:sldMasterMk cId="666274591" sldId="2147483648"/>
+              <pc:sldLayoutMk cId="1715730913" sldId="2147483659"/>
+              <ac:spMk id="3" creationId="{00000000-0000-0000-0000-000000000000}"/>
+            </ac:spMkLst>
+          </pc:spChg>
+        </pc:sldLayoutChg>
+      </pc:sldMasterChg>
+    </pc:docChg>
+  </pc:docChgLst>
+</pc:chgInfo>
 </file>
 
 <file path=ppt/slideLayouts/slideLayout1.xml><?xml version="1.0" encoding="utf-8"?>
@@ -161,8 +1023,8 @@
         </p:nvSpPr>
         <p:spPr>
           <a:xfrm>
-            <a:off x="567214" y="1656014"/>
-            <a:ext cx="6428422" cy="1142672"/>
+            <a:off x="342901" y="1420286"/>
+            <a:ext cx="3886200" cy="980016"/>
           </a:xfrm>
         </p:spPr>
         <p:txBody>
@@ -189,8 +1051,8 @@
         </p:nvSpPr>
         <p:spPr>
           <a:xfrm>
-            <a:off x="1134428" y="3020801"/>
-            <a:ext cx="5293995" cy="1362322"/>
+            <a:off x="685801" y="2590800"/>
+            <a:ext cx="3200400" cy="1168400"/>
           </a:xfrm>
         </p:spPr>
         <p:txBody>
@@ -206,7 +1068,7 @@
                 </a:solidFill>
               </a:defRPr>
             </a:lvl1pPr>
-            <a:lvl2pPr marL="263113" indent="0" algn="ctr">
+            <a:lvl2pPr marL="263088" indent="0" algn="ctr">
               <a:buNone/>
               <a:defRPr>
                 <a:solidFill>
@@ -216,7 +1078,7 @@
                 </a:solidFill>
               </a:defRPr>
             </a:lvl2pPr>
-            <a:lvl3pPr marL="526227" indent="0" algn="ctr">
+            <a:lvl3pPr marL="526176" indent="0" algn="ctr">
               <a:buNone/>
               <a:defRPr>
                 <a:solidFill>
@@ -226,7 +1088,7 @@
                 </a:solidFill>
               </a:defRPr>
             </a:lvl3pPr>
-            <a:lvl4pPr marL="789341" indent="0" algn="ctr">
+            <a:lvl4pPr marL="789264" indent="0" algn="ctr">
               <a:buNone/>
               <a:defRPr>
                 <a:solidFill>
@@ -236,7 +1098,7 @@
                 </a:solidFill>
               </a:defRPr>
             </a:lvl4pPr>
-            <a:lvl5pPr marL="1052454" indent="0" algn="ctr">
+            <a:lvl5pPr marL="1052353" indent="0" algn="ctr">
               <a:buNone/>
               <a:defRPr>
                 <a:solidFill>
@@ -246,7 +1108,7 @@
                 </a:solidFill>
               </a:defRPr>
             </a:lvl5pPr>
-            <a:lvl6pPr marL="1315568" indent="0" algn="ctr">
+            <a:lvl6pPr marL="1315441" indent="0" algn="ctr">
               <a:buNone/>
               <a:defRPr>
                 <a:solidFill>
@@ -256,7 +1118,7 @@
                 </a:solidFill>
               </a:defRPr>
             </a:lvl6pPr>
-            <a:lvl7pPr marL="1578681" indent="0" algn="ctr">
+            <a:lvl7pPr marL="1578529" indent="0" algn="ctr">
               <a:buNone/>
               <a:defRPr>
                 <a:solidFill>
@@ -266,7 +1128,7 @@
                 </a:solidFill>
               </a:defRPr>
             </a:lvl7pPr>
-            <a:lvl8pPr marL="1841794" indent="0" algn="ctr">
+            <a:lvl8pPr marL="1841616" indent="0" algn="ctr">
               <a:buNone/>
               <a:defRPr>
                 <a:solidFill>
@@ -276,7 +1138,7 @@
                 </a:solidFill>
               </a:defRPr>
             </a:lvl8pPr>
-            <a:lvl9pPr marL="2104908" indent="0" algn="ctr">
+            <a:lvl9pPr marL="2104705" indent="0" algn="ctr">
               <a:buNone/>
               <a:defRPr>
                 <a:solidFill>
@@ -573,8 +1435,8 @@
         </p:nvSpPr>
         <p:spPr>
           <a:xfrm>
-            <a:off x="5939989" y="213483"/>
-            <a:ext cx="1843445" cy="4548477"/>
+            <a:off x="3590927" y="183097"/>
+            <a:ext cx="1114425" cy="3901017"/>
           </a:xfrm>
         </p:spPr>
         <p:txBody>
@@ -601,8 +1463,8 @@
         </p:nvSpPr>
         <p:spPr>
           <a:xfrm>
-            <a:off x="409657" y="213483"/>
-            <a:ext cx="5404287" cy="4548477"/>
+            <a:off x="247653" y="183097"/>
+            <a:ext cx="3267075" cy="3901017"/>
           </a:xfrm>
         </p:spPr>
         <p:txBody>
@@ -923,15 +1785,15 @@
         </p:nvSpPr>
         <p:spPr>
           <a:xfrm>
-            <a:off x="597414" y="3425550"/>
-            <a:ext cx="6428422" cy="1058761"/>
+            <a:off x="361158" y="2937936"/>
+            <a:ext cx="3886200" cy="908050"/>
           </a:xfrm>
         </p:spPr>
         <p:txBody>
           <a:bodyPr anchor="t"/>
           <a:lstStyle>
             <a:lvl1pPr algn="l">
-              <a:defRPr sz="2300" b="1" cap="all"/>
+              <a:defRPr sz="2299" b="1" cap="all"/>
             </a:lvl1pPr>
           </a:lstStyle>
           <a:p>
@@ -955,8 +1817,8 @@
         </p:nvSpPr>
         <p:spPr>
           <a:xfrm>
-            <a:off x="597414" y="2259433"/>
-            <a:ext cx="6428422" cy="1166118"/>
+            <a:off x="361158" y="1937811"/>
+            <a:ext cx="3886200" cy="1000125"/>
           </a:xfrm>
         </p:spPr>
         <p:txBody>
@@ -972,7 +1834,7 @@
                 </a:solidFill>
               </a:defRPr>
             </a:lvl1pPr>
-            <a:lvl2pPr marL="263113" indent="0">
+            <a:lvl2pPr marL="263088" indent="0">
               <a:buNone/>
               <a:defRPr sz="1100">
                 <a:solidFill>
@@ -982,7 +1844,7 @@
                 </a:solidFill>
               </a:defRPr>
             </a:lvl2pPr>
-            <a:lvl3pPr marL="526227" indent="0">
+            <a:lvl3pPr marL="526176" indent="0">
               <a:buNone/>
               <a:defRPr sz="900">
                 <a:solidFill>
@@ -992,7 +1854,7 @@
                 </a:solidFill>
               </a:defRPr>
             </a:lvl3pPr>
-            <a:lvl4pPr marL="789341" indent="0">
+            <a:lvl4pPr marL="789264" indent="0">
               <a:buNone/>
               <a:defRPr sz="800">
                 <a:solidFill>
@@ -1002,7 +1864,7 @@
                 </a:solidFill>
               </a:defRPr>
             </a:lvl4pPr>
-            <a:lvl5pPr marL="1052454" indent="0">
+            <a:lvl5pPr marL="1052353" indent="0">
               <a:buNone/>
               <a:defRPr sz="800">
                 <a:solidFill>
@@ -1012,7 +1874,7 @@
                 </a:solidFill>
               </a:defRPr>
             </a:lvl5pPr>
-            <a:lvl6pPr marL="1315568" indent="0">
+            <a:lvl6pPr marL="1315441" indent="0">
               <a:buNone/>
               <a:defRPr sz="800">
                 <a:solidFill>
@@ -1022,7 +1884,7 @@
                 </a:solidFill>
               </a:defRPr>
             </a:lvl6pPr>
-            <a:lvl7pPr marL="1578681" indent="0">
+            <a:lvl7pPr marL="1578529" indent="0">
               <a:buNone/>
               <a:defRPr sz="800">
                 <a:solidFill>
@@ -1032,7 +1894,7 @@
                 </a:solidFill>
               </a:defRPr>
             </a:lvl7pPr>
-            <a:lvl8pPr marL="1841794" indent="0">
+            <a:lvl8pPr marL="1841616" indent="0">
               <a:buNone/>
               <a:defRPr sz="800">
                 <a:solidFill>
@@ -1042,7 +1904,7 @@
                 </a:solidFill>
               </a:defRPr>
             </a:lvl8pPr>
-            <a:lvl9pPr marL="2104908" indent="0">
+            <a:lvl9pPr marL="2104705" indent="0">
               <a:buNone/>
               <a:defRPr sz="800">
                 <a:solidFill>
@@ -1192,8 +2054,8 @@
         </p:nvSpPr>
         <p:spPr>
           <a:xfrm>
-            <a:off x="409656" y="1243861"/>
-            <a:ext cx="3623866" cy="3518098"/>
+            <a:off x="247651" y="1066802"/>
+            <a:ext cx="2190750" cy="3017309"/>
           </a:xfrm>
         </p:spPr>
         <p:txBody>
@@ -1277,8 +2139,8 @@
         </p:nvSpPr>
         <p:spPr>
           <a:xfrm>
-            <a:off x="4159570" y="1243861"/>
-            <a:ext cx="3623866" cy="3518098"/>
+            <a:off x="2514601" y="1066802"/>
+            <a:ext cx="2190750" cy="3017309"/>
           </a:xfrm>
         </p:spPr>
         <p:txBody>
@@ -1457,8 +2319,8 @@
         </p:nvSpPr>
         <p:spPr>
           <a:xfrm>
-            <a:off x="378143" y="213480"/>
-            <a:ext cx="6806565" cy="888471"/>
+            <a:off x="228601" y="183092"/>
+            <a:ext cx="4114800" cy="762000"/>
           </a:xfrm>
         </p:spPr>
         <p:txBody>
@@ -1489,8 +2351,8 @@
         </p:nvSpPr>
         <p:spPr>
           <a:xfrm>
-            <a:off x="378145" y="1193267"/>
-            <a:ext cx="3341572" cy="497296"/>
+            <a:off x="228602" y="1023409"/>
+            <a:ext cx="2020094" cy="426508"/>
           </a:xfrm>
         </p:spPr>
         <p:txBody>
@@ -1500,35 +2362,35 @@
               <a:buNone/>
               <a:defRPr sz="1400" b="1"/>
             </a:lvl1pPr>
-            <a:lvl2pPr marL="263113" indent="0">
+            <a:lvl2pPr marL="263088" indent="0">
               <a:buNone/>
               <a:defRPr sz="1200" b="1"/>
             </a:lvl2pPr>
-            <a:lvl3pPr marL="526227" indent="0">
+            <a:lvl3pPr marL="526176" indent="0">
               <a:buNone/>
               <a:defRPr sz="1100" b="1"/>
             </a:lvl3pPr>
-            <a:lvl4pPr marL="789341" indent="0">
+            <a:lvl4pPr marL="789264" indent="0">
               <a:buNone/>
               <a:defRPr sz="900" b="1"/>
             </a:lvl4pPr>
-            <a:lvl5pPr marL="1052454" indent="0">
+            <a:lvl5pPr marL="1052353" indent="0">
               <a:buNone/>
               <a:defRPr sz="900" b="1"/>
             </a:lvl5pPr>
-            <a:lvl6pPr marL="1315568" indent="0">
+            <a:lvl6pPr marL="1315441" indent="0">
               <a:buNone/>
               <a:defRPr sz="900" b="1"/>
             </a:lvl6pPr>
-            <a:lvl7pPr marL="1578681" indent="0">
+            <a:lvl7pPr marL="1578529" indent="0">
               <a:buNone/>
               <a:defRPr sz="900" b="1"/>
             </a:lvl7pPr>
-            <a:lvl8pPr marL="1841794" indent="0">
+            <a:lvl8pPr marL="1841616" indent="0">
               <a:buNone/>
               <a:defRPr sz="900" b="1"/>
             </a:lvl8pPr>
-            <a:lvl9pPr marL="2104908" indent="0">
+            <a:lvl9pPr marL="2104705" indent="0">
               <a:buNone/>
               <a:defRPr sz="900" b="1"/>
             </a:lvl9pPr>
@@ -1554,8 +2416,8 @@
         </p:nvSpPr>
         <p:spPr>
           <a:xfrm>
-            <a:off x="378145" y="1690563"/>
-            <a:ext cx="3341572" cy="3071394"/>
+            <a:off x="228602" y="1449918"/>
+            <a:ext cx="2020094" cy="2634191"/>
           </a:xfrm>
         </p:spPr>
         <p:txBody>
@@ -1639,8 +2501,8 @@
         </p:nvSpPr>
         <p:spPr>
           <a:xfrm>
-            <a:off x="3841824" y="1193267"/>
-            <a:ext cx="3342886" cy="497296"/>
+            <a:off x="2322513" y="1023409"/>
+            <a:ext cx="2020889" cy="426508"/>
           </a:xfrm>
         </p:spPr>
         <p:txBody>
@@ -1650,35 +2512,35 @@
               <a:buNone/>
               <a:defRPr sz="1400" b="1"/>
             </a:lvl1pPr>
-            <a:lvl2pPr marL="263113" indent="0">
+            <a:lvl2pPr marL="263088" indent="0">
               <a:buNone/>
               <a:defRPr sz="1200" b="1"/>
             </a:lvl2pPr>
-            <a:lvl3pPr marL="526227" indent="0">
+            <a:lvl3pPr marL="526176" indent="0">
               <a:buNone/>
               <a:defRPr sz="1100" b="1"/>
             </a:lvl3pPr>
-            <a:lvl4pPr marL="789341" indent="0">
+            <a:lvl4pPr marL="789264" indent="0">
               <a:buNone/>
               <a:defRPr sz="900" b="1"/>
             </a:lvl4pPr>
-            <a:lvl5pPr marL="1052454" indent="0">
+            <a:lvl5pPr marL="1052353" indent="0">
               <a:buNone/>
               <a:defRPr sz="900" b="1"/>
             </a:lvl5pPr>
-            <a:lvl6pPr marL="1315568" indent="0">
+            <a:lvl6pPr marL="1315441" indent="0">
               <a:buNone/>
               <a:defRPr sz="900" b="1"/>
             </a:lvl6pPr>
-            <a:lvl7pPr marL="1578681" indent="0">
+            <a:lvl7pPr marL="1578529" indent="0">
               <a:buNone/>
               <a:defRPr sz="900" b="1"/>
             </a:lvl7pPr>
-            <a:lvl8pPr marL="1841794" indent="0">
+            <a:lvl8pPr marL="1841616" indent="0">
               <a:buNone/>
               <a:defRPr sz="900" b="1"/>
             </a:lvl8pPr>
-            <a:lvl9pPr marL="2104908" indent="0">
+            <a:lvl9pPr marL="2104705" indent="0">
               <a:buNone/>
               <a:defRPr sz="900" b="1"/>
             </a:lvl9pPr>
@@ -1704,8 +2566,8 @@
         </p:nvSpPr>
         <p:spPr>
           <a:xfrm>
-            <a:off x="3841824" y="1690563"/>
-            <a:ext cx="3342886" cy="3071394"/>
+            <a:off x="2322513" y="1449918"/>
+            <a:ext cx="2020889" cy="2634191"/>
           </a:xfrm>
         </p:spPr>
         <p:txBody>
@@ -2097,8 +2959,8 @@
         </p:nvSpPr>
         <p:spPr>
           <a:xfrm>
-            <a:off x="378145" y="212246"/>
-            <a:ext cx="2488126" cy="903279"/>
+            <a:off x="228603" y="182034"/>
+            <a:ext cx="1504156" cy="774700"/>
           </a:xfrm>
         </p:spPr>
         <p:txBody>
@@ -2129,15 +2991,15 @@
         </p:nvSpPr>
         <p:spPr>
           <a:xfrm>
-            <a:off x="2956865" y="212248"/>
-            <a:ext cx="4227843" cy="4549712"/>
+            <a:off x="1787527" y="182035"/>
+            <a:ext cx="2555875" cy="3902076"/>
           </a:xfrm>
         </p:spPr>
         <p:txBody>
           <a:bodyPr/>
           <a:lstStyle>
             <a:lvl1pPr>
-              <a:defRPr sz="1800"/>
+              <a:defRPr sz="1799"/>
             </a:lvl1pPr>
             <a:lvl2pPr>
               <a:defRPr sz="1600"/>
@@ -2214,8 +3076,8 @@
         </p:nvSpPr>
         <p:spPr>
           <a:xfrm>
-            <a:off x="378145" y="1115526"/>
-            <a:ext cx="2488126" cy="3646433"/>
+            <a:off x="228603" y="956735"/>
+            <a:ext cx="1504156" cy="3127376"/>
           </a:xfrm>
         </p:spPr>
         <p:txBody>
@@ -2225,35 +3087,35 @@
               <a:buNone/>
               <a:defRPr sz="800"/>
             </a:lvl1pPr>
-            <a:lvl2pPr marL="263113" indent="0">
+            <a:lvl2pPr marL="263088" indent="0">
               <a:buNone/>
-              <a:defRPr sz="700"/>
+              <a:defRPr sz="699"/>
             </a:lvl2pPr>
-            <a:lvl3pPr marL="526227" indent="0">
+            <a:lvl3pPr marL="526176" indent="0">
               <a:buNone/>
               <a:defRPr sz="600"/>
             </a:lvl3pPr>
-            <a:lvl4pPr marL="789341" indent="0">
+            <a:lvl4pPr marL="789264" indent="0">
               <a:buNone/>
               <a:defRPr sz="500"/>
             </a:lvl4pPr>
-            <a:lvl5pPr marL="1052454" indent="0">
+            <a:lvl5pPr marL="1052353" indent="0">
               <a:buNone/>
               <a:defRPr sz="500"/>
             </a:lvl5pPr>
-            <a:lvl6pPr marL="1315568" indent="0">
+            <a:lvl6pPr marL="1315441" indent="0">
               <a:buNone/>
               <a:defRPr sz="500"/>
             </a:lvl6pPr>
-            <a:lvl7pPr marL="1578681" indent="0">
+            <a:lvl7pPr marL="1578529" indent="0">
               <a:buNone/>
               <a:defRPr sz="500"/>
             </a:lvl7pPr>
-            <a:lvl8pPr marL="1841794" indent="0">
+            <a:lvl8pPr marL="1841616" indent="0">
               <a:buNone/>
               <a:defRPr sz="500"/>
             </a:lvl8pPr>
-            <a:lvl9pPr marL="2104908" indent="0">
+            <a:lvl9pPr marL="2104705" indent="0">
               <a:buNone/>
               <a:defRPr sz="500"/>
             </a:lvl9pPr>
@@ -2374,8 +3236,8 @@
         </p:nvSpPr>
         <p:spPr>
           <a:xfrm>
-            <a:off x="1482372" y="3731578"/>
-            <a:ext cx="4537710" cy="440534"/>
+            <a:off x="896144" y="3200403"/>
+            <a:ext cx="2743200" cy="377825"/>
           </a:xfrm>
         </p:spPr>
         <p:txBody>
@@ -2406,8 +3268,8 @@
         </p:nvSpPr>
         <p:spPr>
           <a:xfrm>
-            <a:off x="1482372" y="476319"/>
-            <a:ext cx="4537710" cy="3198495"/>
+            <a:off x="896144" y="408517"/>
+            <a:ext cx="2743200" cy="2743200"/>
           </a:xfrm>
         </p:spPr>
         <p:txBody>
@@ -2415,37 +3277,37 @@
           <a:lstStyle>
             <a:lvl1pPr marL="0" indent="0">
               <a:buNone/>
-              <a:defRPr sz="1800"/>
+              <a:defRPr sz="1799"/>
             </a:lvl1pPr>
-            <a:lvl2pPr marL="263113" indent="0">
+            <a:lvl2pPr marL="263088" indent="0">
               <a:buNone/>
               <a:defRPr sz="1600"/>
             </a:lvl2pPr>
-            <a:lvl3pPr marL="526227" indent="0">
+            <a:lvl3pPr marL="526176" indent="0">
               <a:buNone/>
               <a:defRPr sz="1400"/>
             </a:lvl3pPr>
-            <a:lvl4pPr marL="789341" indent="0">
+            <a:lvl4pPr marL="789264" indent="0">
               <a:buNone/>
               <a:defRPr sz="1200"/>
             </a:lvl4pPr>
-            <a:lvl5pPr marL="1052454" indent="0">
+            <a:lvl5pPr marL="1052353" indent="0">
               <a:buNone/>
               <a:defRPr sz="1200"/>
             </a:lvl5pPr>
-            <a:lvl6pPr marL="1315568" indent="0">
+            <a:lvl6pPr marL="1315441" indent="0">
               <a:buNone/>
               <a:defRPr sz="1200"/>
             </a:lvl6pPr>
-            <a:lvl7pPr marL="1578681" indent="0">
+            <a:lvl7pPr marL="1578529" indent="0">
               <a:buNone/>
               <a:defRPr sz="1200"/>
             </a:lvl7pPr>
-            <a:lvl8pPr marL="1841794" indent="0">
+            <a:lvl8pPr marL="1841616" indent="0">
               <a:buNone/>
               <a:defRPr sz="1200"/>
             </a:lvl8pPr>
-            <a:lvl9pPr marL="2104908" indent="0">
+            <a:lvl9pPr marL="2104705" indent="0">
               <a:buNone/>
               <a:defRPr sz="1200"/>
             </a:lvl9pPr>
@@ -2467,8 +3329,8 @@
         </p:nvSpPr>
         <p:spPr>
           <a:xfrm>
-            <a:off x="1482372" y="4172112"/>
-            <a:ext cx="4537710" cy="625631"/>
+            <a:off x="896144" y="3578227"/>
+            <a:ext cx="2743200" cy="536575"/>
           </a:xfrm>
         </p:spPr>
         <p:txBody>
@@ -2478,35 +3340,35 @@
               <a:buNone/>
               <a:defRPr sz="800"/>
             </a:lvl1pPr>
-            <a:lvl2pPr marL="263113" indent="0">
+            <a:lvl2pPr marL="263088" indent="0">
               <a:buNone/>
-              <a:defRPr sz="700"/>
+              <a:defRPr sz="699"/>
             </a:lvl2pPr>
-            <a:lvl3pPr marL="526227" indent="0">
+            <a:lvl3pPr marL="526176" indent="0">
               <a:buNone/>
               <a:defRPr sz="600"/>
             </a:lvl3pPr>
-            <a:lvl4pPr marL="789341" indent="0">
+            <a:lvl4pPr marL="789264" indent="0">
               <a:buNone/>
               <a:defRPr sz="500"/>
             </a:lvl4pPr>
-            <a:lvl5pPr marL="1052454" indent="0">
+            <a:lvl5pPr marL="1052353" indent="0">
               <a:buNone/>
               <a:defRPr sz="500"/>
             </a:lvl5pPr>
-            <a:lvl6pPr marL="1315568" indent="0">
+            <a:lvl6pPr marL="1315441" indent="0">
               <a:buNone/>
               <a:defRPr sz="500"/>
             </a:lvl6pPr>
-            <a:lvl7pPr marL="1578681" indent="0">
+            <a:lvl7pPr marL="1578529" indent="0">
               <a:buNone/>
               <a:defRPr sz="500"/>
             </a:lvl7pPr>
-            <a:lvl8pPr marL="1841794" indent="0">
+            <a:lvl8pPr marL="1841616" indent="0">
               <a:buNone/>
               <a:defRPr sz="500"/>
             </a:lvl8pPr>
-            <a:lvl9pPr marL="2104908" indent="0">
+            <a:lvl9pPr marL="2104705" indent="0">
               <a:buNone/>
               <a:defRPr sz="500"/>
             </a:lvl9pPr>
@@ -2632,8 +3494,8 @@
         </p:nvSpPr>
         <p:spPr>
           <a:xfrm>
-            <a:off x="378143" y="213480"/>
-            <a:ext cx="6806565" cy="888471"/>
+            <a:off x="228601" y="183092"/>
+            <a:ext cx="4114800" cy="762000"/>
           </a:xfrm>
           <a:prstGeom prst="rect">
             <a:avLst/>
@@ -2665,8 +3527,8 @@
         </p:nvSpPr>
         <p:spPr>
           <a:xfrm>
-            <a:off x="378143" y="1243861"/>
-            <a:ext cx="6806565" cy="3518098"/>
+            <a:off x="228601" y="1066802"/>
+            <a:ext cx="4114800" cy="3017309"/>
           </a:xfrm>
           <a:prstGeom prst="rect">
             <a:avLst/>
@@ -2727,8 +3589,8 @@
         </p:nvSpPr>
         <p:spPr>
           <a:xfrm>
-            <a:off x="378142" y="4940888"/>
-            <a:ext cx="1764665" cy="283817"/>
+            <a:off x="228601" y="4237571"/>
+            <a:ext cx="1066800" cy="243417"/>
           </a:xfrm>
           <a:prstGeom prst="rect">
             <a:avLst/>
@@ -2738,7 +3600,7 @@
           <a:bodyPr vert="horz" lIns="52622" tIns="26311" rIns="52622" bIns="26311" rtlCol="0" anchor="ctr"/>
           <a:lstStyle>
             <a:lvl1pPr algn="l">
-              <a:defRPr sz="700">
+              <a:defRPr sz="699">
                 <a:solidFill>
                   <a:schemeClr val="tx1">
                     <a:tint val="75000"/>
@@ -2768,8 +3630,8 @@
         </p:nvSpPr>
         <p:spPr>
           <a:xfrm>
-            <a:off x="2583974" y="4940888"/>
-            <a:ext cx="2394903" cy="283817"/>
+            <a:off x="1562101" y="4237571"/>
+            <a:ext cx="1447800" cy="243417"/>
           </a:xfrm>
           <a:prstGeom prst="rect">
             <a:avLst/>
@@ -2779,7 +3641,7 @@
           <a:bodyPr vert="horz" lIns="52622" tIns="26311" rIns="52622" bIns="26311" rtlCol="0" anchor="ctr"/>
           <a:lstStyle>
             <a:lvl1pPr algn="ctr">
-              <a:defRPr sz="700">
+              <a:defRPr sz="699">
                 <a:solidFill>
                   <a:schemeClr val="tx1">
                     <a:tint val="75000"/>
@@ -2805,8 +3667,8 @@
         </p:nvSpPr>
         <p:spPr>
           <a:xfrm>
-            <a:off x="5420043" y="4940888"/>
-            <a:ext cx="1764665" cy="283817"/>
+            <a:off x="3276601" y="4237571"/>
+            <a:ext cx="1066800" cy="243417"/>
           </a:xfrm>
           <a:prstGeom prst="rect">
             <a:avLst/>
@@ -2816,7 +3678,7 @@
           <a:bodyPr vert="horz" lIns="52622" tIns="26311" rIns="52622" bIns="26311" rtlCol="0" anchor="ctr"/>
           <a:lstStyle>
             <a:lvl1pPr algn="r">
-              <a:defRPr sz="700">
+              <a:defRPr sz="699">
                 <a:solidFill>
                   <a:schemeClr val="tx1">
                     <a:tint val="75000"/>
@@ -2857,7 +3719,7 @@
   </p:sldLayoutIdLst>
   <p:txStyles>
     <p:titleStyle>
-      <a:lvl1pPr algn="ctr" defTabSz="526227" rtl="0" eaLnBrk="1" latinLnBrk="0" hangingPunct="1">
+      <a:lvl1pPr algn="ctr" defTabSz="526176" rtl="0" eaLnBrk="1" latinLnBrk="0" hangingPunct="1">
         <a:spcBef>
           <a:spcPct val="0"/>
         </a:spcBef>
@@ -2873,13 +3735,13 @@
       </a:lvl1pPr>
     </p:titleStyle>
     <p:bodyStyle>
-      <a:lvl1pPr marL="197335" indent="-197335" algn="l" defTabSz="526227" rtl="0" eaLnBrk="1" latinLnBrk="0" hangingPunct="1">
+      <a:lvl1pPr marL="197316" indent="-197316" algn="l" defTabSz="526176" rtl="0" eaLnBrk="1" latinLnBrk="0" hangingPunct="1">
         <a:spcBef>
           <a:spcPct val="20000"/>
         </a:spcBef>
         <a:buFont typeface="Arial" panose="020B0604020202020204" pitchFamily="34" charset="0"/>
         <a:buChar char="•"/>
-        <a:defRPr sz="1800" kern="1200">
+        <a:defRPr sz="1799" kern="1200">
           <a:solidFill>
             <a:schemeClr val="tx1"/>
           </a:solidFill>
@@ -2888,7 +3750,7 @@
           <a:cs typeface="+mn-cs"/>
         </a:defRPr>
       </a:lvl1pPr>
-      <a:lvl2pPr marL="427559" indent="-164446" algn="l" defTabSz="526227" rtl="0" eaLnBrk="1" latinLnBrk="0" hangingPunct="1">
+      <a:lvl2pPr marL="427518" indent="-164431" algn="l" defTabSz="526176" rtl="0" eaLnBrk="1" latinLnBrk="0" hangingPunct="1">
         <a:spcBef>
           <a:spcPct val="20000"/>
         </a:spcBef>
@@ -2903,7 +3765,7 @@
           <a:cs typeface="+mn-cs"/>
         </a:defRPr>
       </a:lvl2pPr>
-      <a:lvl3pPr marL="657784" indent="-131557" algn="l" defTabSz="526227" rtl="0" eaLnBrk="1" latinLnBrk="0" hangingPunct="1">
+      <a:lvl3pPr marL="657721" indent="-131545" algn="l" defTabSz="526176" rtl="0" eaLnBrk="1" latinLnBrk="0" hangingPunct="1">
         <a:spcBef>
           <a:spcPct val="20000"/>
         </a:spcBef>
@@ -2918,7 +3780,7 @@
           <a:cs typeface="+mn-cs"/>
         </a:defRPr>
       </a:lvl3pPr>
-      <a:lvl4pPr marL="920897" indent="-131557" algn="l" defTabSz="526227" rtl="0" eaLnBrk="1" latinLnBrk="0" hangingPunct="1">
+      <a:lvl4pPr marL="920808" indent="-131545" algn="l" defTabSz="526176" rtl="0" eaLnBrk="1" latinLnBrk="0" hangingPunct="1">
         <a:spcBef>
           <a:spcPct val="20000"/>
         </a:spcBef>
@@ -2933,7 +3795,7 @@
           <a:cs typeface="+mn-cs"/>
         </a:defRPr>
       </a:lvl4pPr>
-      <a:lvl5pPr marL="1184011" indent="-131557" algn="l" defTabSz="526227" rtl="0" eaLnBrk="1" latinLnBrk="0" hangingPunct="1">
+      <a:lvl5pPr marL="1183897" indent="-131545" algn="l" defTabSz="526176" rtl="0" eaLnBrk="1" latinLnBrk="0" hangingPunct="1">
         <a:spcBef>
           <a:spcPct val="20000"/>
         </a:spcBef>
@@ -2948,7 +3810,7 @@
           <a:cs typeface="+mn-cs"/>
         </a:defRPr>
       </a:lvl5pPr>
-      <a:lvl6pPr marL="1447125" indent="-131557" algn="l" defTabSz="526227" rtl="0" eaLnBrk="1" latinLnBrk="0" hangingPunct="1">
+      <a:lvl6pPr marL="1446985" indent="-131545" algn="l" defTabSz="526176" rtl="0" eaLnBrk="1" latinLnBrk="0" hangingPunct="1">
         <a:spcBef>
           <a:spcPct val="20000"/>
         </a:spcBef>
@@ -2963,7 +3825,7 @@
           <a:cs typeface="+mn-cs"/>
         </a:defRPr>
       </a:lvl6pPr>
-      <a:lvl7pPr marL="1710238" indent="-131557" algn="l" defTabSz="526227" rtl="0" eaLnBrk="1" latinLnBrk="0" hangingPunct="1">
+      <a:lvl7pPr marL="1710072" indent="-131545" algn="l" defTabSz="526176" rtl="0" eaLnBrk="1" latinLnBrk="0" hangingPunct="1">
         <a:spcBef>
           <a:spcPct val="20000"/>
         </a:spcBef>
@@ -2978,7 +3840,7 @@
           <a:cs typeface="+mn-cs"/>
         </a:defRPr>
       </a:lvl7pPr>
-      <a:lvl8pPr marL="1973351" indent="-131557" algn="l" defTabSz="526227" rtl="0" eaLnBrk="1" latinLnBrk="0" hangingPunct="1">
+      <a:lvl8pPr marL="1973161" indent="-131545" algn="l" defTabSz="526176" rtl="0" eaLnBrk="1" latinLnBrk="0" hangingPunct="1">
         <a:spcBef>
           <a:spcPct val="20000"/>
         </a:spcBef>
@@ -2993,7 +3855,7 @@
           <a:cs typeface="+mn-cs"/>
         </a:defRPr>
       </a:lvl8pPr>
-      <a:lvl9pPr marL="2236465" indent="-131557" algn="l" defTabSz="526227" rtl="0" eaLnBrk="1" latinLnBrk="0" hangingPunct="1">
+      <a:lvl9pPr marL="2236249" indent="-131545" algn="l" defTabSz="526176" rtl="0" eaLnBrk="1" latinLnBrk="0" hangingPunct="1">
         <a:spcBef>
           <a:spcPct val="20000"/>
         </a:spcBef>
@@ -3013,7 +3875,7 @@
       <a:defPPr>
         <a:defRPr lang="en-US"/>
       </a:defPPr>
-      <a:lvl1pPr marL="0" algn="l" defTabSz="526227" rtl="0" eaLnBrk="1" latinLnBrk="0" hangingPunct="1">
+      <a:lvl1pPr marL="0" algn="l" defTabSz="526176" rtl="0" eaLnBrk="1" latinLnBrk="0" hangingPunct="1">
         <a:defRPr sz="1100" kern="1200">
           <a:solidFill>
             <a:schemeClr val="tx1"/>
@@ -3023,7 +3885,7 @@
           <a:cs typeface="+mn-cs"/>
         </a:defRPr>
       </a:lvl1pPr>
-      <a:lvl2pPr marL="263113" algn="l" defTabSz="526227" rtl="0" eaLnBrk="1" latinLnBrk="0" hangingPunct="1">
+      <a:lvl2pPr marL="263088" algn="l" defTabSz="526176" rtl="0" eaLnBrk="1" latinLnBrk="0" hangingPunct="1">
         <a:defRPr sz="1100" kern="1200">
           <a:solidFill>
             <a:schemeClr val="tx1"/>
@@ -3033,7 +3895,7 @@
           <a:cs typeface="+mn-cs"/>
         </a:defRPr>
       </a:lvl2pPr>
-      <a:lvl3pPr marL="526227" algn="l" defTabSz="526227" rtl="0" eaLnBrk="1" latinLnBrk="0" hangingPunct="1">
+      <a:lvl3pPr marL="526176" algn="l" defTabSz="526176" rtl="0" eaLnBrk="1" latinLnBrk="0" hangingPunct="1">
         <a:defRPr sz="1100" kern="1200">
           <a:solidFill>
             <a:schemeClr val="tx1"/>
@@ -3043,7 +3905,7 @@
           <a:cs typeface="+mn-cs"/>
         </a:defRPr>
       </a:lvl3pPr>
-      <a:lvl4pPr marL="789341" algn="l" defTabSz="526227" rtl="0" eaLnBrk="1" latinLnBrk="0" hangingPunct="1">
+      <a:lvl4pPr marL="789264" algn="l" defTabSz="526176" rtl="0" eaLnBrk="1" latinLnBrk="0" hangingPunct="1">
         <a:defRPr sz="1100" kern="1200">
           <a:solidFill>
             <a:schemeClr val="tx1"/>
@@ -3053,7 +3915,7 @@
           <a:cs typeface="+mn-cs"/>
         </a:defRPr>
       </a:lvl4pPr>
-      <a:lvl5pPr marL="1052454" algn="l" defTabSz="526227" rtl="0" eaLnBrk="1" latinLnBrk="0" hangingPunct="1">
+      <a:lvl5pPr marL="1052353" algn="l" defTabSz="526176" rtl="0" eaLnBrk="1" latinLnBrk="0" hangingPunct="1">
         <a:defRPr sz="1100" kern="1200">
           <a:solidFill>
             <a:schemeClr val="tx1"/>
@@ -3063,7 +3925,7 @@
           <a:cs typeface="+mn-cs"/>
         </a:defRPr>
       </a:lvl5pPr>
-      <a:lvl6pPr marL="1315568" algn="l" defTabSz="526227" rtl="0" eaLnBrk="1" latinLnBrk="0" hangingPunct="1">
+      <a:lvl6pPr marL="1315441" algn="l" defTabSz="526176" rtl="0" eaLnBrk="1" latinLnBrk="0" hangingPunct="1">
         <a:defRPr sz="1100" kern="1200">
           <a:solidFill>
             <a:schemeClr val="tx1"/>
@@ -3073,7 +3935,7 @@
           <a:cs typeface="+mn-cs"/>
         </a:defRPr>
       </a:lvl6pPr>
-      <a:lvl7pPr marL="1578681" algn="l" defTabSz="526227" rtl="0" eaLnBrk="1" latinLnBrk="0" hangingPunct="1">
+      <a:lvl7pPr marL="1578529" algn="l" defTabSz="526176" rtl="0" eaLnBrk="1" latinLnBrk="0" hangingPunct="1">
         <a:defRPr sz="1100" kern="1200">
           <a:solidFill>
             <a:schemeClr val="tx1"/>
@@ -3083,7 +3945,7 @@
           <a:cs typeface="+mn-cs"/>
         </a:defRPr>
       </a:lvl7pPr>
-      <a:lvl8pPr marL="1841794" algn="l" defTabSz="526227" rtl="0" eaLnBrk="1" latinLnBrk="0" hangingPunct="1">
+      <a:lvl8pPr marL="1841616" algn="l" defTabSz="526176" rtl="0" eaLnBrk="1" latinLnBrk="0" hangingPunct="1">
         <a:defRPr sz="1100" kern="1200">
           <a:solidFill>
             <a:schemeClr val="tx1"/>
@@ -3093,7 +3955,7 @@
           <a:cs typeface="+mn-cs"/>
         </a:defRPr>
       </a:lvl8pPr>
-      <a:lvl9pPr marL="2104908" algn="l" defTabSz="526227" rtl="0" eaLnBrk="1" latinLnBrk="0" hangingPunct="1">
+      <a:lvl9pPr marL="2104705" algn="l" defTabSz="526176" rtl="0" eaLnBrk="1" latinLnBrk="0" hangingPunct="1">
         <a:defRPr sz="1100" kern="1200">
           <a:solidFill>
             <a:schemeClr val="tx1"/>
@@ -3145,7 +4007,7 @@
         </p:nvSpPr>
         <p:spPr>
           <a:xfrm>
-            <a:off x="2105025" y="950912"/>
+            <a:off x="609602" y="571500"/>
             <a:ext cx="3112121" cy="3429000"/>
           </a:xfrm>
           <a:prstGeom prst="rect">
@@ -3179,7 +4041,7 @@
         </p:nvSpPr>
         <p:spPr>
           <a:xfrm>
-            <a:off x="2812999" y="1073884"/>
+            <a:off x="1317576" y="694472"/>
             <a:ext cx="85433" cy="2886396"/>
           </a:xfrm>
           <a:custGeom>
@@ -3471,7 +4333,7 @@
         </p:nvSpPr>
         <p:spPr>
           <a:xfrm>
-            <a:off x="3346242" y="1073884"/>
+            <a:off x="1850817" y="694472"/>
             <a:ext cx="0" cy="2886396"/>
           </a:xfrm>
           <a:custGeom>
@@ -3763,7 +4625,7 @@
         </p:nvSpPr>
         <p:spPr>
           <a:xfrm>
-            <a:off x="3794053" y="1073884"/>
+            <a:off x="2298630" y="694472"/>
             <a:ext cx="85433" cy="2886396"/>
           </a:xfrm>
           <a:custGeom>
@@ -4055,8 +4917,8 @@
         </p:nvSpPr>
         <p:spPr>
           <a:xfrm>
-            <a:off x="4241862" y="1073884"/>
-            <a:ext cx="170869" cy="2886396"/>
+            <a:off x="2746438" y="694472"/>
+            <a:ext cx="170870" cy="2886396"/>
           </a:xfrm>
           <a:custGeom>
             <a:avLst/>
@@ -4347,7 +5209,7 @@
         </p:nvSpPr>
         <p:spPr>
           <a:xfrm>
-            <a:off x="4689672" y="1073884"/>
+            <a:off x="3194247" y="694472"/>
             <a:ext cx="256304" cy="2886396"/>
           </a:xfrm>
           <a:custGeom>
@@ -4639,7 +5501,7 @@
         </p:nvSpPr>
         <p:spPr>
           <a:xfrm>
-            <a:off x="2775440" y="3539173"/>
+            <a:off x="1280016" y="3159762"/>
             <a:ext cx="2318734" cy="0"/>
           </a:xfrm>
           <a:custGeom>
@@ -4925,7 +5787,7 @@
         </p:nvSpPr>
         <p:spPr>
           <a:xfrm>
-            <a:off x="2775440" y="2935988"/>
+            <a:off x="1280016" y="2556576"/>
             <a:ext cx="2318734" cy="0"/>
           </a:xfrm>
           <a:custGeom>
@@ -5196,7 +6058,7 @@
         </p:nvSpPr>
         <p:spPr>
           <a:xfrm>
-            <a:off x="2775440" y="2332315"/>
+            <a:off x="1280016" y="1952903"/>
             <a:ext cx="2318734" cy="0"/>
           </a:xfrm>
           <a:custGeom>
@@ -5464,7 +6326,7 @@
         </p:nvSpPr>
         <p:spPr>
           <a:xfrm>
-            <a:off x="2775440" y="1728645"/>
+            <a:off x="1280016" y="1349232"/>
             <a:ext cx="2318734" cy="0"/>
           </a:xfrm>
           <a:custGeom>
@@ -5735,7 +6597,7 @@
         </p:nvSpPr>
         <p:spPr>
           <a:xfrm>
-            <a:off x="2775440" y="1125460"/>
+            <a:off x="1280016" y="746048"/>
             <a:ext cx="2318734" cy="0"/>
           </a:xfrm>
           <a:custGeom>
@@ -6021,7 +6883,7 @@
         </p:nvSpPr>
         <p:spPr>
           <a:xfrm>
-            <a:off x="4127621" y="2360990"/>
+            <a:off x="2632199" y="1981581"/>
             <a:ext cx="288345" cy="325105"/>
           </a:xfrm>
           <a:custGeom>
@@ -6217,7 +7079,7 @@
         </p:nvSpPr>
         <p:spPr>
           <a:xfrm>
-            <a:off x="2900146" y="1497552"/>
+            <a:off x="1404721" y="1118143"/>
             <a:ext cx="222750" cy="200915"/>
           </a:xfrm>
           <a:custGeom>
@@ -6345,7 +7207,7 @@
         </p:nvSpPr>
         <p:spPr>
           <a:xfrm>
-            <a:off x="3670476" y="2173668"/>
+            <a:off x="2175051" y="1794255"/>
             <a:ext cx="506698" cy="558796"/>
           </a:xfrm>
           <a:custGeom>
@@ -6760,7 +7622,7 @@
         </p:nvSpPr>
         <p:spPr>
           <a:xfrm>
-            <a:off x="4438383" y="1969369"/>
+            <a:off x="2942961" y="1589960"/>
             <a:ext cx="262789" cy="413753"/>
           </a:xfrm>
           <a:custGeom>
@@ -6912,7 +7774,7 @@
         </p:nvSpPr>
         <p:spPr>
           <a:xfrm>
-            <a:off x="4249943" y="2166126"/>
+            <a:off x="2754518" y="1786717"/>
             <a:ext cx="211260" cy="307351"/>
           </a:xfrm>
           <a:custGeom>
@@ -7072,7 +7934,7 @@
         </p:nvSpPr>
         <p:spPr>
           <a:xfrm>
-            <a:off x="3927008" y="1668276"/>
+            <a:off x="2431586" y="1288864"/>
             <a:ext cx="428513" cy="415652"/>
           </a:xfrm>
           <a:custGeom>
@@ -7359,7 +8221,7 @@
         </p:nvSpPr>
         <p:spPr>
           <a:xfrm>
-            <a:off x="3703960" y="1625725"/>
+            <a:off x="2208536" y="1246313"/>
             <a:ext cx="272268" cy="482570"/>
           </a:xfrm>
           <a:custGeom>
@@ -7577,7 +8439,7 @@
         </p:nvSpPr>
         <p:spPr>
           <a:xfrm>
-            <a:off x="4037598" y="3196994"/>
+            <a:off x="2542173" y="2817586"/>
             <a:ext cx="60996" cy="60305"/>
           </a:xfrm>
           <a:custGeom>
@@ -7662,7 +8524,7 @@
         </p:nvSpPr>
         <p:spPr>
           <a:xfrm>
-            <a:off x="4010379" y="2800396"/>
+            <a:off x="2514957" y="2420984"/>
             <a:ext cx="200751" cy="204158"/>
           </a:xfrm>
           <a:custGeom>
@@ -7822,8 +8684,8 @@
         </p:nvSpPr>
         <p:spPr>
           <a:xfrm>
-            <a:off x="3862661" y="2865412"/>
-            <a:ext cx="251555" cy="276680"/>
+            <a:off x="2367239" y="2486003"/>
+            <a:ext cx="251555" cy="276679"/>
           </a:xfrm>
           <a:custGeom>
             <a:avLst/>
@@ -7986,8 +8848,8 @@
         </p:nvSpPr>
         <p:spPr>
           <a:xfrm>
-            <a:off x="3654922" y="2843666"/>
-            <a:ext cx="350809" cy="365341"/>
+            <a:off x="2159499" y="2464256"/>
+            <a:ext cx="350809" cy="365340"/>
           </a:xfrm>
           <a:custGeom>
             <a:avLst/>
@@ -8162,7 +9024,7 @@
         </p:nvSpPr>
         <p:spPr>
           <a:xfrm>
-            <a:off x="2880837" y="1831321"/>
+            <a:off x="1385412" y="1451911"/>
             <a:ext cx="161854" cy="128767"/>
           </a:xfrm>
           <a:custGeom>
@@ -8338,7 +9200,7 @@
         </p:nvSpPr>
         <p:spPr>
           <a:xfrm>
-            <a:off x="3024815" y="1578494"/>
+            <a:off x="1529390" y="1199085"/>
             <a:ext cx="433838" cy="449077"/>
           </a:xfrm>
           <a:custGeom>
@@ -8610,7 +9472,7 @@
         </p:nvSpPr>
         <p:spPr>
           <a:xfrm>
-            <a:off x="2900146" y="1505420"/>
+            <a:off x="1404722" y="1126010"/>
             <a:ext cx="318362" cy="385707"/>
           </a:xfrm>
           <a:custGeom>
@@ -8771,7 +9633,7 @@
         </p:nvSpPr>
         <p:spPr>
           <a:xfrm>
-            <a:off x="3366732" y="1963001"/>
+            <a:off x="1871307" y="1583589"/>
             <a:ext cx="80222" cy="183922"/>
           </a:xfrm>
           <a:custGeom>
@@ -8890,8 +9752,8 @@
         </p:nvSpPr>
         <p:spPr>
           <a:xfrm>
-            <a:off x="3354053" y="1623856"/>
-            <a:ext cx="408393" cy="356514"/>
+            <a:off x="1858629" y="1244444"/>
+            <a:ext cx="408392" cy="356514"/>
           </a:xfrm>
           <a:custGeom>
             <a:avLst/>
@@ -9108,7 +9970,7 @@
         </p:nvSpPr>
         <p:spPr>
           <a:xfrm>
-            <a:off x="3417864" y="1913793"/>
+            <a:off x="1922442" y="1534381"/>
             <a:ext cx="314507" cy="290526"/>
           </a:xfrm>
           <a:custGeom>
@@ -9331,7 +10193,7 @@
         </p:nvSpPr>
         <p:spPr>
           <a:xfrm>
-            <a:off x="3572316" y="1944174"/>
+            <a:off x="2076893" y="1564762"/>
             <a:ext cx="200733" cy="335994"/>
           </a:xfrm>
           <a:custGeom>
@@ -9558,7 +10420,7 @@
         </p:nvSpPr>
         <p:spPr>
           <a:xfrm>
-            <a:off x="3344922" y="1999734"/>
+            <a:off x="1849499" y="1620323"/>
             <a:ext cx="50953" cy="153628"/>
           </a:xfrm>
           <a:custGeom>
@@ -9659,7 +10521,7 @@
         </p:nvSpPr>
         <p:spPr>
           <a:xfrm>
-            <a:off x="3259915" y="1997329"/>
+            <a:off x="1764490" y="1617920"/>
             <a:ext cx="114540" cy="192807"/>
           </a:xfrm>
           <a:custGeom>
@@ -9783,7 +10645,7 @@
         </p:nvSpPr>
         <p:spPr>
           <a:xfrm>
-            <a:off x="3117361" y="2014662"/>
+            <a:off x="1621938" y="1635253"/>
             <a:ext cx="160787" cy="186707"/>
           </a:xfrm>
           <a:custGeom>
@@ -9965,7 +10827,7 @@
         </p:nvSpPr>
         <p:spPr>
           <a:xfrm>
-            <a:off x="2945049" y="1952421"/>
+            <a:off x="1449627" y="1573012"/>
             <a:ext cx="193097" cy="159281"/>
           </a:xfrm>
           <a:custGeom>
@@ -10219,8 +11081,8 @@
         </p:nvSpPr>
         <p:spPr>
           <a:xfrm>
-            <a:off x="2904619" y="1951152"/>
-            <a:ext cx="78909" cy="47923"/>
+            <a:off x="1409195" y="1571740"/>
+            <a:ext cx="78908" cy="47924"/>
           </a:xfrm>
           <a:custGeom>
             <a:avLst/>
@@ -10320,8 +11182,8 @@
         </p:nvSpPr>
         <p:spPr>
           <a:xfrm>
-            <a:off x="3041968" y="2074517"/>
-            <a:ext cx="103555" cy="126326"/>
+            <a:off x="1546544" y="1695105"/>
+            <a:ext cx="103556" cy="126326"/>
           </a:xfrm>
           <a:custGeom>
             <a:avLst/>
@@ -10445,8 +11307,8 @@
         </p:nvSpPr>
         <p:spPr>
           <a:xfrm>
-            <a:off x="2994373" y="2029063"/>
-            <a:ext cx="80028" cy="98431"/>
+            <a:off x="1498949" y="1649654"/>
+            <a:ext cx="80029" cy="98431"/>
           </a:xfrm>
           <a:custGeom>
             <a:avLst/>
@@ -10555,7 +11417,7 @@
         </p:nvSpPr>
         <p:spPr>
           <a:xfrm>
-            <a:off x="3201174" y="1876056"/>
+            <a:off x="1705752" y="1496644"/>
             <a:ext cx="202703" cy="166170"/>
           </a:xfrm>
           <a:custGeom>
@@ -10716,7 +11578,7 @@
         </p:nvSpPr>
         <p:spPr>
           <a:xfrm>
-            <a:off x="3731147" y="1995998"/>
+            <a:off x="2235722" y="1616588"/>
             <a:ext cx="343866" cy="267871"/>
           </a:xfrm>
           <a:custGeom>
@@ -10946,7 +11808,7 @@
         </p:nvSpPr>
         <p:spPr>
           <a:xfrm>
-            <a:off x="3641757" y="2219787"/>
+            <a:off x="2146332" y="1840378"/>
             <a:ext cx="196130" cy="264593"/>
           </a:xfrm>
           <a:custGeom>
@@ -11137,7 +11999,7 @@
         </p:nvSpPr>
         <p:spPr>
           <a:xfrm>
-            <a:off x="3580803" y="2262086"/>
+            <a:off x="2085378" y="1882677"/>
             <a:ext cx="150016" cy="190325"/>
           </a:xfrm>
           <a:custGeom>
@@ -11274,7 +12136,7 @@
         </p:nvSpPr>
         <p:spPr>
           <a:xfrm>
-            <a:off x="3594334" y="2263382"/>
+            <a:off x="2098911" y="1883971"/>
             <a:ext cx="52777" cy="38446"/>
           </a:xfrm>
           <a:custGeom>
@@ -11339,7 +12201,7 @@
         </p:nvSpPr>
         <p:spPr>
           <a:xfrm>
-            <a:off x="3923109" y="2580976"/>
+            <a:off x="2427685" y="2201565"/>
             <a:ext cx="311450" cy="293472"/>
           </a:xfrm>
           <a:custGeom>
@@ -11571,7 +12433,7 @@
         </p:nvSpPr>
         <p:spPr>
           <a:xfrm>
-            <a:off x="4210523" y="2610929"/>
+            <a:off x="2715098" y="2231520"/>
             <a:ext cx="78762" cy="228509"/>
           </a:xfrm>
           <a:custGeom>
@@ -11704,8 +12566,8 @@
         </p:nvSpPr>
         <p:spPr>
           <a:xfrm>
-            <a:off x="4143088" y="2643723"/>
-            <a:ext cx="279921" cy="495763"/>
+            <a:off x="2647664" y="2264314"/>
+            <a:ext cx="279920" cy="495763"/>
           </a:xfrm>
           <a:custGeom>
             <a:avLst/>
@@ -11979,7 +12841,7 @@
         </p:nvGrpSpPr>
         <p:grpSpPr>
           <a:xfrm>
-            <a:off x="3766427" y="2999111"/>
+            <a:off x="2271003" y="2619702"/>
             <a:ext cx="428010" cy="384175"/>
             <a:chOff x="3766427" y="2999111"/>
             <a:chExt cx="428010" cy="384175"/>
@@ -12473,7 +13335,7 @@
         </p:nvSpPr>
         <p:spPr>
           <a:xfrm>
-            <a:off x="3663480" y="2466272"/>
+            <a:off x="2168057" y="2086863"/>
             <a:ext cx="28811" cy="40805"/>
           </a:xfrm>
           <a:custGeom>
@@ -12544,7 +13406,7 @@
         </p:nvSpPr>
         <p:spPr>
           <a:xfrm>
-            <a:off x="3652748" y="2509319"/>
+            <a:off x="2157326" y="2129908"/>
             <a:ext cx="331267" cy="364206"/>
           </a:xfrm>
           <a:custGeom>
@@ -12786,8 +13648,8 @@
         </p:nvSpPr>
         <p:spPr>
           <a:xfrm>
-            <a:off x="4119741" y="2403202"/>
-            <a:ext cx="45880" cy="64938"/>
+            <a:off x="2624318" y="2023790"/>
+            <a:ext cx="45879" cy="64938"/>
           </a:xfrm>
           <a:custGeom>
             <a:avLst/>
@@ -12869,8 +13731,8 @@
         </p:nvSpPr>
         <p:spPr>
           <a:xfrm>
-            <a:off x="4474943" y="2695744"/>
-            <a:ext cx="203274" cy="409314"/>
+            <a:off x="2979521" y="2316332"/>
+            <a:ext cx="203273" cy="409314"/>
           </a:xfrm>
           <a:custGeom>
             <a:avLst/>
@@ -13060,8 +13922,8 @@
         </p:nvSpPr>
         <p:spPr>
           <a:xfrm>
-            <a:off x="2900653" y="1913473"/>
-            <a:ext cx="79432" cy="22522"/>
+            <a:off x="1405229" y="1534064"/>
+            <a:ext cx="79432" cy="22521"/>
           </a:xfrm>
           <a:custGeom>
             <a:avLst/>
@@ -13152,7 +14014,7 @@
         </p:nvSpPr>
         <p:spPr>
           <a:xfrm>
-            <a:off x="3536053" y="1205085"/>
+            <a:off x="2040628" y="825673"/>
             <a:ext cx="101072" cy="212438"/>
           </a:xfrm>
           <a:custGeom>
@@ -13289,8 +14151,8 @@
         </p:nvSpPr>
         <p:spPr>
           <a:xfrm>
-            <a:off x="3122256" y="1212056"/>
-            <a:ext cx="536280" cy="545039"/>
+            <a:off x="1626832" y="832645"/>
+            <a:ext cx="536280" cy="545038"/>
           </a:xfrm>
           <a:custGeom>
             <a:avLst/>
@@ -13519,7 +14381,7 @@
         </p:nvSpPr>
         <p:spPr>
           <a:xfrm>
-            <a:off x="4305271" y="1789064"/>
+            <a:off x="2809849" y="1409652"/>
             <a:ext cx="181383" cy="167302"/>
           </a:xfrm>
           <a:custGeom>
@@ -13647,7 +14509,7 @@
         </p:nvSpPr>
         <p:spPr>
           <a:xfrm>
-            <a:off x="2901599" y="1252977"/>
+            <a:off x="1406177" y="873568"/>
             <a:ext cx="416119" cy="432783"/>
           </a:xfrm>
           <a:custGeom>
@@ -13880,7 +14742,7 @@
         </p:nvSpPr>
         <p:spPr>
           <a:xfrm>
-            <a:off x="3978387" y="1378932"/>
+            <a:off x="2482961" y="999520"/>
             <a:ext cx="329964" cy="289342"/>
           </a:xfrm>
           <a:custGeom>
@@ -14058,8 +14920,8 @@
         </p:nvSpPr>
         <p:spPr>
           <a:xfrm>
-            <a:off x="3587405" y="1332100"/>
-            <a:ext cx="413541" cy="409206"/>
+            <a:off x="2091981" y="952690"/>
+            <a:ext cx="413540" cy="409207"/>
           </a:xfrm>
           <a:custGeom>
             <a:avLst/>
@@ -14270,7 +15132,7 @@
         </p:nvSpPr>
         <p:spPr>
           <a:xfrm>
-            <a:off x="4222292" y="1880787"/>
+            <a:off x="2726868" y="1501375"/>
             <a:ext cx="394194" cy="348238"/>
           </a:xfrm>
           <a:custGeom>
@@ -14496,8 +15358,8 @@
         </p:nvSpPr>
         <p:spPr>
           <a:xfrm>
-            <a:off x="4450313" y="1948996"/>
-            <a:ext cx="42991" cy="53507"/>
+            <a:off x="2954891" y="1569584"/>
+            <a:ext cx="42991" cy="53508"/>
           </a:xfrm>
           <a:custGeom>
             <a:avLst/>
@@ -14585,7 +15447,7 @@
         </p:nvSpPr>
         <p:spPr>
           <a:xfrm>
-            <a:off x="4475207" y="1986351"/>
+            <a:off x="2979784" y="1606942"/>
             <a:ext cx="170443" cy="104591"/>
           </a:xfrm>
           <a:custGeom>
@@ -14701,7 +15563,7 @@
         </p:nvSpPr>
         <p:spPr>
           <a:xfrm>
-            <a:off x="4134822" y="2204040"/>
+            <a:off x="2639398" y="1824628"/>
             <a:ext cx="145358" cy="171840"/>
           </a:xfrm>
           <a:custGeom>
@@ -14831,7 +15693,7 @@
         </p:nvSpPr>
         <p:spPr>
           <a:xfrm>
-            <a:off x="4119741" y="2366564"/>
+            <a:off x="2624316" y="1987155"/>
             <a:ext cx="47992" cy="53823"/>
           </a:xfrm>
           <a:custGeom>
@@ -14914,7 +15776,7 @@
         </p:nvSpPr>
         <p:spPr>
           <a:xfrm>
-            <a:off x="3980887" y="1962628"/>
+            <a:off x="2485466" y="1583217"/>
             <a:ext cx="304949" cy="263768"/>
           </a:xfrm>
           <a:custGeom>
@@ -15147,7 +16009,7 @@
         </p:nvSpPr>
         <p:spPr>
           <a:xfrm>
-            <a:off x="2238825" y="3468479"/>
+            <a:off x="743400" y="3089068"/>
             <a:ext cx="219756" cy="141388"/>
           </a:xfrm>
           <a:prstGeom prst="rect">
@@ -15159,23 +16021,15 @@
           <a:bodyPr wrap="none" lIns="0" tIns="0" rIns="0" bIns="0" anchor="ctr" anchorCtr="1"/>
           <a:lstStyle/>
           <a:p>
-            <a:pPr marL="0" marR="0" indent="0" algn="l">
+            <a:pPr>
               <a:lnSpc>
                 <a:spcPts val="880"/>
               </a:lnSpc>
-              <a:spcBef>
-                <a:spcPts val="0"/>
-              </a:spcBef>
-              <a:spcAft>
-                <a:spcPts val="0"/>
-              </a:spcAft>
             </a:pPr>
             <a:r>
               <a:rPr sz="880">
                 <a:solidFill>
-                  <a:srgbClr val="4D4D4D">
-                    <a:alpha val="100000"/>
-                  </a:srgbClr>
+                  <a:srgbClr val="FF0000"/>
                 </a:solidFill>
                 <a:latin typeface="Arial"/>
                 <a:cs typeface="Arial"/>
@@ -15199,8 +16053,8 @@
         </p:nvSpPr>
         <p:spPr>
           <a:xfrm>
-            <a:off x="2458581" y="3471548"/>
-            <a:ext cx="74490" cy="138316"/>
+            <a:off x="963158" y="3092136"/>
+            <a:ext cx="74489" cy="138316"/>
           </a:xfrm>
           <a:prstGeom prst="rect">
             <a:avLst/>
@@ -15211,23 +16065,15 @@
           <a:bodyPr wrap="none" lIns="0" tIns="0" rIns="0" bIns="0" anchor="ctr" anchorCtr="1"/>
           <a:lstStyle/>
           <a:p>
-            <a:pPr marL="0" marR="0" indent="0" algn="l">
+            <a:pPr>
               <a:lnSpc>
                 <a:spcPts val="880"/>
               </a:lnSpc>
-              <a:spcBef>
-                <a:spcPts val="0"/>
-              </a:spcBef>
-              <a:spcAft>
-                <a:spcPts val="0"/>
-              </a:spcAft>
             </a:pPr>
             <a:r>
               <a:rPr sz="880">
                 <a:solidFill>
-                  <a:srgbClr val="4D4D4D">
-                    <a:alpha val="100000"/>
-                  </a:srgbClr>
+                  <a:srgbClr val="FF0000"/>
                 </a:solidFill>
                 <a:latin typeface="Symbol"/>
                 <a:cs typeface="Symbol"/>
@@ -15251,7 +16097,7 @@
         </p:nvSpPr>
         <p:spPr>
           <a:xfrm>
-            <a:off x="2533072" y="3468479"/>
+            <a:off x="1037649" y="3089068"/>
             <a:ext cx="131691" cy="141388"/>
           </a:xfrm>
           <a:prstGeom prst="rect">
@@ -15263,23 +16109,15 @@
           <a:bodyPr wrap="none" lIns="0" tIns="0" rIns="0" bIns="0" anchor="ctr" anchorCtr="1"/>
           <a:lstStyle/>
           <a:p>
-            <a:pPr marL="0" marR="0" indent="0" algn="l">
+            <a:pPr>
               <a:lnSpc>
                 <a:spcPts val="880"/>
               </a:lnSpc>
-              <a:spcBef>
-                <a:spcPts val="0"/>
-              </a:spcBef>
-              <a:spcAft>
-                <a:spcPts val="0"/>
-              </a:spcAft>
             </a:pPr>
             <a:r>
               <a:rPr sz="880">
                 <a:solidFill>
-                  <a:srgbClr val="4D4D4D">
-                    <a:alpha val="100000"/>
-                  </a:srgbClr>
+                  <a:srgbClr val="FF0000"/>
                 </a:solidFill>
                 <a:latin typeface="Arial"/>
                 <a:cs typeface="Arial"/>
@@ -15303,7 +16141,7 @@
         </p:nvSpPr>
         <p:spPr>
           <a:xfrm>
-            <a:off x="2238825" y="2865294"/>
+            <a:off x="743400" y="2485883"/>
             <a:ext cx="219756" cy="141388"/>
           </a:xfrm>
           <a:prstGeom prst="rect">
@@ -15315,23 +16153,15 @@
           <a:bodyPr wrap="none" lIns="0" tIns="0" rIns="0" bIns="0" anchor="ctr" anchorCtr="1"/>
           <a:lstStyle/>
           <a:p>
-            <a:pPr marL="0" marR="0" indent="0" algn="l">
+            <a:pPr>
               <a:lnSpc>
                 <a:spcPts val="880"/>
               </a:lnSpc>
-              <a:spcBef>
-                <a:spcPts val="0"/>
-              </a:spcBef>
-              <a:spcAft>
-                <a:spcPts val="0"/>
-              </a:spcAft>
             </a:pPr>
             <a:r>
               <a:rPr sz="880">
                 <a:solidFill>
-                  <a:srgbClr val="4D4D4D">
-                    <a:alpha val="100000"/>
-                  </a:srgbClr>
+                  <a:srgbClr val="FF0000"/>
                 </a:solidFill>
                 <a:latin typeface="Arial"/>
                 <a:cs typeface="Arial"/>
@@ -15355,8 +16185,8 @@
         </p:nvSpPr>
         <p:spPr>
           <a:xfrm>
-            <a:off x="2458581" y="2868364"/>
-            <a:ext cx="74490" cy="138316"/>
+            <a:off x="963158" y="2488952"/>
+            <a:ext cx="74489" cy="138316"/>
           </a:xfrm>
           <a:prstGeom prst="rect">
             <a:avLst/>
@@ -15367,23 +16197,15 @@
           <a:bodyPr wrap="none" lIns="0" tIns="0" rIns="0" bIns="0" anchor="ctr" anchorCtr="1"/>
           <a:lstStyle/>
           <a:p>
-            <a:pPr marL="0" marR="0" indent="0" algn="l">
+            <a:pPr>
               <a:lnSpc>
                 <a:spcPts val="880"/>
               </a:lnSpc>
-              <a:spcBef>
-                <a:spcPts val="0"/>
-              </a:spcBef>
-              <a:spcAft>
-                <a:spcPts val="0"/>
-              </a:spcAft>
             </a:pPr>
             <a:r>
               <a:rPr sz="880">
                 <a:solidFill>
-                  <a:srgbClr val="4D4D4D">
-                    <a:alpha val="100000"/>
-                  </a:srgbClr>
+                  <a:srgbClr val="FF0000"/>
                 </a:solidFill>
                 <a:latin typeface="Symbol"/>
                 <a:cs typeface="Symbol"/>
@@ -15407,7 +16229,7 @@
         </p:nvSpPr>
         <p:spPr>
           <a:xfrm>
-            <a:off x="2533072" y="2865294"/>
+            <a:off x="1037649" y="2485883"/>
             <a:ext cx="131691" cy="141388"/>
           </a:xfrm>
           <a:prstGeom prst="rect">
@@ -15419,23 +16241,15 @@
           <a:bodyPr wrap="none" lIns="0" tIns="0" rIns="0" bIns="0" anchor="ctr" anchorCtr="1"/>
           <a:lstStyle/>
           <a:p>
-            <a:pPr marL="0" marR="0" indent="0" algn="l">
+            <a:pPr>
               <a:lnSpc>
                 <a:spcPts val="880"/>
               </a:lnSpc>
-              <a:spcBef>
-                <a:spcPts val="0"/>
-              </a:spcBef>
-              <a:spcAft>
-                <a:spcPts val="0"/>
-              </a:spcAft>
             </a:pPr>
             <a:r>
               <a:rPr sz="880">
                 <a:solidFill>
-                  <a:srgbClr val="4D4D4D">
-                    <a:alpha val="100000"/>
-                  </a:srgbClr>
+                  <a:srgbClr val="FF0000"/>
                 </a:solidFill>
                 <a:latin typeface="Arial"/>
                 <a:cs typeface="Arial"/>
@@ -15459,7 +16273,7 @@
         </p:nvSpPr>
         <p:spPr>
           <a:xfrm>
-            <a:off x="2425456" y="2260733"/>
+            <a:off x="930031" y="1881321"/>
             <a:ext cx="164816" cy="141388"/>
           </a:xfrm>
           <a:prstGeom prst="rect">
@@ -15471,23 +16285,15 @@
           <a:bodyPr wrap="none" lIns="0" tIns="0" rIns="0" bIns="0" anchor="ctr" anchorCtr="1"/>
           <a:lstStyle/>
           <a:p>
-            <a:pPr marL="0" marR="0" indent="0" algn="l">
+            <a:pPr>
               <a:lnSpc>
                 <a:spcPts val="880"/>
               </a:lnSpc>
-              <a:spcBef>
-                <a:spcPts val="0"/>
-              </a:spcBef>
-              <a:spcAft>
-                <a:spcPts val="0"/>
-              </a:spcAft>
             </a:pPr>
             <a:r>
               <a:rPr sz="880">
                 <a:solidFill>
-                  <a:srgbClr val="4D4D4D">
-                    <a:alpha val="100000"/>
-                  </a:srgbClr>
+                  <a:srgbClr val="FF0000"/>
                 </a:solidFill>
                 <a:latin typeface="Arial"/>
                 <a:cs typeface="Arial"/>
@@ -15511,8 +16317,8 @@
         </p:nvSpPr>
         <p:spPr>
           <a:xfrm>
-            <a:off x="2590274" y="2263804"/>
-            <a:ext cx="74490" cy="138316"/>
+            <a:off x="1094851" y="1884392"/>
+            <a:ext cx="74489" cy="138316"/>
           </a:xfrm>
           <a:prstGeom prst="rect">
             <a:avLst/>
@@ -15523,23 +16329,15 @@
           <a:bodyPr wrap="none" lIns="0" tIns="0" rIns="0" bIns="0" anchor="ctr" anchorCtr="1"/>
           <a:lstStyle/>
           <a:p>
-            <a:pPr marL="0" marR="0" indent="0" algn="l">
+            <a:pPr>
               <a:lnSpc>
                 <a:spcPts val="880"/>
               </a:lnSpc>
-              <a:spcBef>
-                <a:spcPts val="0"/>
-              </a:spcBef>
-              <a:spcAft>
-                <a:spcPts val="0"/>
-              </a:spcAft>
             </a:pPr>
             <a:r>
               <a:rPr sz="880">
                 <a:solidFill>
-                  <a:srgbClr val="4D4D4D">
-                    <a:alpha val="100000"/>
-                  </a:srgbClr>
+                  <a:srgbClr val="FF0000"/>
                 </a:solidFill>
                 <a:latin typeface="Symbol"/>
                 <a:cs typeface="Symbol"/>
@@ -15563,7 +16361,7 @@
         </p:nvSpPr>
         <p:spPr>
           <a:xfrm>
-            <a:off x="2227997" y="1657062"/>
+            <a:off x="732572" y="1277651"/>
             <a:ext cx="219756" cy="141388"/>
           </a:xfrm>
           <a:prstGeom prst="rect">
@@ -15575,23 +16373,15 @@
           <a:bodyPr wrap="none" lIns="0" tIns="0" rIns="0" bIns="0" anchor="ctr" anchorCtr="1"/>
           <a:lstStyle/>
           <a:p>
-            <a:pPr marL="0" marR="0" indent="0" algn="l">
+            <a:pPr>
               <a:lnSpc>
                 <a:spcPts val="880"/>
               </a:lnSpc>
-              <a:spcBef>
-                <a:spcPts val="0"/>
-              </a:spcBef>
-              <a:spcAft>
-                <a:spcPts val="0"/>
-              </a:spcAft>
             </a:pPr>
             <a:r>
               <a:rPr sz="880">
                 <a:solidFill>
-                  <a:srgbClr val="4D4D4D">
-                    <a:alpha val="100000"/>
-                  </a:srgbClr>
+                  <a:srgbClr val="FF0000"/>
                 </a:solidFill>
                 <a:latin typeface="Arial"/>
                 <a:cs typeface="Arial"/>
@@ -15615,8 +16405,8 @@
         </p:nvSpPr>
         <p:spPr>
           <a:xfrm>
-            <a:off x="2447755" y="1660131"/>
-            <a:ext cx="74490" cy="138316"/>
+            <a:off x="952333" y="1280720"/>
+            <a:ext cx="74489" cy="138316"/>
           </a:xfrm>
           <a:prstGeom prst="rect">
             <a:avLst/>
@@ -15627,23 +16417,15 @@
           <a:bodyPr wrap="none" lIns="0" tIns="0" rIns="0" bIns="0" anchor="ctr" anchorCtr="1"/>
           <a:lstStyle/>
           <a:p>
-            <a:pPr marL="0" marR="0" indent="0" algn="l">
+            <a:pPr>
               <a:lnSpc>
                 <a:spcPts val="880"/>
               </a:lnSpc>
-              <a:spcBef>
-                <a:spcPts val="0"/>
-              </a:spcBef>
-              <a:spcAft>
-                <a:spcPts val="0"/>
-              </a:spcAft>
             </a:pPr>
             <a:r>
               <a:rPr sz="880">
                 <a:solidFill>
-                  <a:srgbClr val="4D4D4D">
-                    <a:alpha val="100000"/>
-                  </a:srgbClr>
+                  <a:srgbClr val="FF0000"/>
                 </a:solidFill>
                 <a:latin typeface="Symbol"/>
                 <a:cs typeface="Symbol"/>
@@ -15667,7 +16449,7 @@
         </p:nvSpPr>
         <p:spPr>
           <a:xfrm>
-            <a:off x="2522247" y="1657062"/>
+            <a:off x="1026825" y="1277651"/>
             <a:ext cx="142519" cy="141388"/>
           </a:xfrm>
           <a:prstGeom prst="rect">
@@ -15679,23 +16461,15 @@
           <a:bodyPr wrap="none" lIns="0" tIns="0" rIns="0" bIns="0" anchor="ctr" anchorCtr="1"/>
           <a:lstStyle/>
           <a:p>
-            <a:pPr marL="0" marR="0" indent="0" algn="l">
+            <a:pPr>
               <a:lnSpc>
                 <a:spcPts val="880"/>
               </a:lnSpc>
-              <a:spcBef>
-                <a:spcPts val="0"/>
-              </a:spcBef>
-              <a:spcAft>
-                <a:spcPts val="0"/>
-              </a:spcAft>
             </a:pPr>
             <a:r>
               <a:rPr sz="880">
                 <a:solidFill>
-                  <a:srgbClr val="4D4D4D">
-                    <a:alpha val="100000"/>
-                  </a:srgbClr>
+                  <a:srgbClr val="FF0000"/>
                 </a:solidFill>
                 <a:latin typeface="Arial"/>
                 <a:cs typeface="Arial"/>
@@ -15719,7 +16493,7 @@
         </p:nvSpPr>
         <p:spPr>
           <a:xfrm>
-            <a:off x="2227997" y="1053877"/>
+            <a:off x="732572" y="674465"/>
             <a:ext cx="219756" cy="141388"/>
           </a:xfrm>
           <a:prstGeom prst="rect">
@@ -15731,23 +16505,15 @@
           <a:bodyPr wrap="none" lIns="0" tIns="0" rIns="0" bIns="0" anchor="ctr" anchorCtr="1"/>
           <a:lstStyle/>
           <a:p>
-            <a:pPr marL="0" marR="0" indent="0" algn="l">
+            <a:pPr>
               <a:lnSpc>
                 <a:spcPts val="880"/>
               </a:lnSpc>
-              <a:spcBef>
-                <a:spcPts val="0"/>
-              </a:spcBef>
-              <a:spcAft>
-                <a:spcPts val="0"/>
-              </a:spcAft>
             </a:pPr>
             <a:r>
               <a:rPr sz="880">
                 <a:solidFill>
-                  <a:srgbClr val="4D4D4D">
-                    <a:alpha val="100000"/>
-                  </a:srgbClr>
+                  <a:srgbClr val="FF0000"/>
                 </a:solidFill>
                 <a:latin typeface="Arial"/>
                 <a:cs typeface="Arial"/>
@@ -15771,8 +16537,8 @@
         </p:nvSpPr>
         <p:spPr>
           <a:xfrm>
-            <a:off x="2447755" y="1056948"/>
-            <a:ext cx="74490" cy="138316"/>
+            <a:off x="952333" y="677537"/>
+            <a:ext cx="74489" cy="138316"/>
           </a:xfrm>
           <a:prstGeom prst="rect">
             <a:avLst/>
@@ -15783,23 +16549,15 @@
           <a:bodyPr wrap="none" lIns="0" tIns="0" rIns="0" bIns="0" anchor="ctr" anchorCtr="1"/>
           <a:lstStyle/>
           <a:p>
-            <a:pPr marL="0" marR="0" indent="0" algn="l">
+            <a:pPr>
               <a:lnSpc>
                 <a:spcPts val="880"/>
               </a:lnSpc>
-              <a:spcBef>
-                <a:spcPts val="0"/>
-              </a:spcBef>
-              <a:spcAft>
-                <a:spcPts val="0"/>
-              </a:spcAft>
             </a:pPr>
             <a:r>
               <a:rPr sz="880">
                 <a:solidFill>
-                  <a:srgbClr val="4D4D4D">
-                    <a:alpha val="100000"/>
-                  </a:srgbClr>
+                  <a:srgbClr val="FF0000"/>
                 </a:solidFill>
                 <a:latin typeface="Symbol"/>
                 <a:cs typeface="Symbol"/>
@@ -15823,7 +16581,7 @@
         </p:nvSpPr>
         <p:spPr>
           <a:xfrm>
-            <a:off x="2522247" y="1053877"/>
+            <a:off x="1026825" y="674465"/>
             <a:ext cx="142519" cy="141388"/>
           </a:xfrm>
           <a:prstGeom prst="rect">
@@ -15835,23 +16593,15 @@
           <a:bodyPr wrap="none" lIns="0" tIns="0" rIns="0" bIns="0" anchor="ctr" anchorCtr="1"/>
           <a:lstStyle/>
           <a:p>
-            <a:pPr marL="0" marR="0" indent="0" algn="l">
+            <a:pPr>
               <a:lnSpc>
                 <a:spcPts val="880"/>
               </a:lnSpc>
-              <a:spcBef>
-                <a:spcPts val="0"/>
-              </a:spcBef>
-              <a:spcAft>
-                <a:spcPts val="0"/>
-              </a:spcAft>
             </a:pPr>
             <a:r>
               <a:rPr sz="880">
                 <a:solidFill>
-                  <a:srgbClr val="4D4D4D">
-                    <a:alpha val="100000"/>
-                  </a:srgbClr>
+                  <a:srgbClr val="FF0000"/>
                 </a:solidFill>
                 <a:latin typeface="Arial"/>
                 <a:cs typeface="Arial"/>
@@ -15875,7 +16625,7 @@
         </p:nvSpPr>
         <p:spPr>
           <a:xfrm>
-            <a:off x="2658154" y="4071602"/>
+            <a:off x="1162729" y="3692191"/>
             <a:ext cx="219756" cy="141388"/>
           </a:xfrm>
           <a:prstGeom prst="rect">
@@ -15887,23 +16637,15 @@
           <a:bodyPr wrap="none" lIns="0" tIns="0" rIns="0" bIns="0" anchor="ctr" anchorCtr="1"/>
           <a:lstStyle/>
           <a:p>
-            <a:pPr marL="0" marR="0" indent="0" algn="l">
+            <a:pPr>
               <a:lnSpc>
                 <a:spcPts val="880"/>
               </a:lnSpc>
-              <a:spcBef>
-                <a:spcPts val="0"/>
-              </a:spcBef>
-              <a:spcAft>
-                <a:spcPts val="0"/>
-              </a:spcAft>
             </a:pPr>
             <a:r>
               <a:rPr sz="880">
                 <a:solidFill>
-                  <a:srgbClr val="4D4D4D">
-                    <a:alpha val="100000"/>
-                  </a:srgbClr>
+                  <a:srgbClr val="FF0000"/>
                 </a:solidFill>
                 <a:latin typeface="Arial"/>
                 <a:cs typeface="Arial"/>
@@ -15927,8 +16669,8 @@
         </p:nvSpPr>
         <p:spPr>
           <a:xfrm>
-            <a:off x="2877912" y="4074673"/>
-            <a:ext cx="74490" cy="138316"/>
+            <a:off x="1382489" y="3695262"/>
+            <a:ext cx="74489" cy="138316"/>
           </a:xfrm>
           <a:prstGeom prst="rect">
             <a:avLst/>
@@ -15939,23 +16681,15 @@
           <a:bodyPr wrap="none" lIns="0" tIns="0" rIns="0" bIns="0" anchor="ctr" anchorCtr="1"/>
           <a:lstStyle/>
           <a:p>
-            <a:pPr marL="0" marR="0" indent="0" algn="l">
+            <a:pPr>
               <a:lnSpc>
                 <a:spcPts val="880"/>
               </a:lnSpc>
-              <a:spcBef>
-                <a:spcPts val="0"/>
-              </a:spcBef>
-              <a:spcAft>
-                <a:spcPts val="0"/>
-              </a:spcAft>
             </a:pPr>
             <a:r>
               <a:rPr sz="880">
                 <a:solidFill>
-                  <a:srgbClr val="4D4D4D">
-                    <a:alpha val="100000"/>
-                  </a:srgbClr>
+                  <a:srgbClr val="FF0000"/>
                 </a:solidFill>
                 <a:latin typeface="Symbol"/>
                 <a:cs typeface="Symbol"/>
@@ -15979,7 +16713,7 @@
         </p:nvSpPr>
         <p:spPr>
           <a:xfrm>
-            <a:off x="2952403" y="4071602"/>
+            <a:off x="1456978" y="3692191"/>
             <a:ext cx="186308" cy="141388"/>
           </a:xfrm>
           <a:prstGeom prst="rect">
@@ -15991,23 +16725,15 @@
           <a:bodyPr wrap="none" lIns="0" tIns="0" rIns="0" bIns="0" anchor="ctr" anchorCtr="1"/>
           <a:lstStyle/>
           <a:p>
-            <a:pPr marL="0" marR="0" indent="0" algn="l">
+            <a:pPr>
               <a:lnSpc>
                 <a:spcPts val="880"/>
               </a:lnSpc>
-              <a:spcBef>
-                <a:spcPts val="0"/>
-              </a:spcBef>
-              <a:spcAft>
-                <a:spcPts val="0"/>
-              </a:spcAft>
             </a:pPr>
             <a:r>
               <a:rPr sz="880">
                 <a:solidFill>
-                  <a:srgbClr val="4D4D4D">
-                    <a:alpha val="100000"/>
-                  </a:srgbClr>
+                  <a:srgbClr val="FF0000"/>
                 </a:solidFill>
                 <a:latin typeface="Arial"/>
                 <a:cs typeface="Arial"/>
@@ -16031,7 +16757,7 @@
         </p:nvSpPr>
         <p:spPr>
           <a:xfrm>
-            <a:off x="3226589" y="4071602"/>
+            <a:off x="1731164" y="3692191"/>
             <a:ext cx="164816" cy="141388"/>
           </a:xfrm>
           <a:prstGeom prst="rect">
@@ -16043,23 +16769,15 @@
           <a:bodyPr wrap="none" lIns="0" tIns="0" rIns="0" bIns="0" anchor="ctr" anchorCtr="1"/>
           <a:lstStyle/>
           <a:p>
-            <a:pPr marL="0" marR="0" indent="0" algn="l">
+            <a:pPr>
               <a:lnSpc>
                 <a:spcPts val="880"/>
               </a:lnSpc>
-              <a:spcBef>
-                <a:spcPts val="0"/>
-              </a:spcBef>
-              <a:spcAft>
-                <a:spcPts val="0"/>
-              </a:spcAft>
             </a:pPr>
             <a:r>
               <a:rPr sz="880">
                 <a:solidFill>
-                  <a:srgbClr val="4D4D4D">
-                    <a:alpha val="100000"/>
-                  </a:srgbClr>
+                  <a:srgbClr val="FF0000"/>
                 </a:solidFill>
                 <a:latin typeface="Arial"/>
                 <a:cs typeface="Arial"/>
@@ -16083,8 +16801,8 @@
         </p:nvSpPr>
         <p:spPr>
           <a:xfrm>
-            <a:off x="3391407" y="4074673"/>
-            <a:ext cx="74490" cy="138316"/>
+            <a:off x="1895984" y="3695262"/>
+            <a:ext cx="74489" cy="138316"/>
           </a:xfrm>
           <a:prstGeom prst="rect">
             <a:avLst/>
@@ -16095,23 +16813,15 @@
           <a:bodyPr wrap="none" lIns="0" tIns="0" rIns="0" bIns="0" anchor="ctr" anchorCtr="1"/>
           <a:lstStyle/>
           <a:p>
-            <a:pPr marL="0" marR="0" indent="0" algn="l">
+            <a:pPr>
               <a:lnSpc>
                 <a:spcPts val="880"/>
               </a:lnSpc>
-              <a:spcBef>
-                <a:spcPts val="0"/>
-              </a:spcBef>
-              <a:spcAft>
-                <a:spcPts val="0"/>
-              </a:spcAft>
             </a:pPr>
             <a:r>
               <a:rPr sz="880">
                 <a:solidFill>
-                  <a:srgbClr val="4D4D4D">
-                    <a:alpha val="100000"/>
-                  </a:srgbClr>
+                  <a:srgbClr val="FF0000"/>
                 </a:solidFill>
                 <a:latin typeface="Symbol"/>
                 <a:cs typeface="Symbol"/>
@@ -16135,7 +16845,7 @@
         </p:nvSpPr>
         <p:spPr>
           <a:xfrm>
-            <a:off x="3581083" y="4071602"/>
+            <a:off x="2085658" y="3692191"/>
             <a:ext cx="219756" cy="141388"/>
           </a:xfrm>
           <a:prstGeom prst="rect">
@@ -16147,23 +16857,15 @@
           <a:bodyPr wrap="none" lIns="0" tIns="0" rIns="0" bIns="0" anchor="ctr" anchorCtr="1"/>
           <a:lstStyle/>
           <a:p>
-            <a:pPr marL="0" marR="0" indent="0" algn="l">
+            <a:pPr>
               <a:lnSpc>
                 <a:spcPts val="880"/>
               </a:lnSpc>
-              <a:spcBef>
-                <a:spcPts val="0"/>
-              </a:spcBef>
-              <a:spcAft>
-                <a:spcPts val="0"/>
-              </a:spcAft>
             </a:pPr>
             <a:r>
               <a:rPr sz="880">
                 <a:solidFill>
-                  <a:srgbClr val="4D4D4D">
-                    <a:alpha val="100000"/>
-                  </a:srgbClr>
+                  <a:srgbClr val="FF0000"/>
                 </a:solidFill>
                 <a:latin typeface="Arial"/>
                 <a:cs typeface="Arial"/>
@@ -16187,8 +16889,8 @@
         </p:nvSpPr>
         <p:spPr>
           <a:xfrm>
-            <a:off x="3800839" y="4074673"/>
-            <a:ext cx="74490" cy="138316"/>
+            <a:off x="2305416" y="3695262"/>
+            <a:ext cx="74489" cy="138316"/>
           </a:xfrm>
           <a:prstGeom prst="rect">
             <a:avLst/>
@@ -16199,23 +16901,15 @@
           <a:bodyPr wrap="none" lIns="0" tIns="0" rIns="0" bIns="0" anchor="ctr" anchorCtr="1"/>
           <a:lstStyle/>
           <a:p>
-            <a:pPr marL="0" marR="0" indent="0" algn="l">
+            <a:pPr>
               <a:lnSpc>
                 <a:spcPts val="880"/>
               </a:lnSpc>
-              <a:spcBef>
-                <a:spcPts val="0"/>
-              </a:spcBef>
-              <a:spcAft>
-                <a:spcPts val="0"/>
-              </a:spcAft>
             </a:pPr>
             <a:r>
               <a:rPr sz="880">
                 <a:solidFill>
-                  <a:srgbClr val="4D4D4D">
-                    <a:alpha val="100000"/>
-                  </a:srgbClr>
+                  <a:srgbClr val="FF0000"/>
                 </a:solidFill>
                 <a:latin typeface="Symbol"/>
                 <a:cs typeface="Symbol"/>
@@ -16239,7 +16933,7 @@
         </p:nvSpPr>
         <p:spPr>
           <a:xfrm>
-            <a:off x="3875330" y="4071602"/>
+            <a:off x="2379908" y="3692191"/>
             <a:ext cx="131691" cy="141388"/>
           </a:xfrm>
           <a:prstGeom prst="rect">
@@ -16251,23 +16945,15 @@
           <a:bodyPr wrap="none" lIns="0" tIns="0" rIns="0" bIns="0" anchor="ctr" anchorCtr="1"/>
           <a:lstStyle/>
           <a:p>
-            <a:pPr marL="0" marR="0" indent="0" algn="l">
+            <a:pPr>
               <a:lnSpc>
                 <a:spcPts val="880"/>
               </a:lnSpc>
-              <a:spcBef>
-                <a:spcPts val="0"/>
-              </a:spcBef>
-              <a:spcAft>
-                <a:spcPts val="0"/>
-              </a:spcAft>
             </a:pPr>
             <a:r>
               <a:rPr sz="880">
                 <a:solidFill>
-                  <a:srgbClr val="4D4D4D">
-                    <a:alpha val="100000"/>
-                  </a:srgbClr>
+                  <a:srgbClr val="FF0000"/>
                 </a:solidFill>
                 <a:latin typeface="Arial"/>
                 <a:cs typeface="Arial"/>
@@ -16291,7 +16977,7 @@
         </p:nvSpPr>
         <p:spPr>
           <a:xfrm>
-            <a:off x="4028891" y="4071602"/>
+            <a:off x="2533466" y="3692191"/>
             <a:ext cx="219756" cy="141388"/>
           </a:xfrm>
           <a:prstGeom prst="rect">
@@ -16303,23 +16989,15 @@
           <a:bodyPr wrap="none" lIns="0" tIns="0" rIns="0" bIns="0" anchor="ctr" anchorCtr="1"/>
           <a:lstStyle/>
           <a:p>
-            <a:pPr marL="0" marR="0" indent="0" algn="l">
+            <a:pPr>
               <a:lnSpc>
                 <a:spcPts val="880"/>
               </a:lnSpc>
-              <a:spcBef>
-                <a:spcPts val="0"/>
-              </a:spcBef>
-              <a:spcAft>
-                <a:spcPts val="0"/>
-              </a:spcAft>
             </a:pPr>
             <a:r>
               <a:rPr sz="880">
                 <a:solidFill>
-                  <a:srgbClr val="4D4D4D">
-                    <a:alpha val="100000"/>
-                  </a:srgbClr>
+                  <a:srgbClr val="FF0000"/>
                 </a:solidFill>
                 <a:latin typeface="Arial"/>
                 <a:cs typeface="Arial"/>
@@ -16343,8 +17021,8 @@
         </p:nvSpPr>
         <p:spPr>
           <a:xfrm>
-            <a:off x="4248649" y="4074673"/>
-            <a:ext cx="74490" cy="138316"/>
+            <a:off x="2753226" y="3695262"/>
+            <a:ext cx="74489" cy="138316"/>
           </a:xfrm>
           <a:prstGeom prst="rect">
             <a:avLst/>
@@ -16355,23 +17033,15 @@
           <a:bodyPr wrap="none" lIns="0" tIns="0" rIns="0" bIns="0" anchor="ctr" anchorCtr="1"/>
           <a:lstStyle/>
           <a:p>
-            <a:pPr marL="0" marR="0" indent="0" algn="l">
+            <a:pPr>
               <a:lnSpc>
                 <a:spcPts val="880"/>
               </a:lnSpc>
-              <a:spcBef>
-                <a:spcPts val="0"/>
-              </a:spcBef>
-              <a:spcAft>
-                <a:spcPts val="0"/>
-              </a:spcAft>
             </a:pPr>
             <a:r>
               <a:rPr sz="880">
                 <a:solidFill>
-                  <a:srgbClr val="4D4D4D">
-                    <a:alpha val="100000"/>
-                  </a:srgbClr>
+                  <a:srgbClr val="FF0000"/>
                 </a:solidFill>
                 <a:latin typeface="Symbol"/>
                 <a:cs typeface="Symbol"/>
@@ -16395,7 +17065,7 @@
         </p:nvSpPr>
         <p:spPr>
           <a:xfrm>
-            <a:off x="4323139" y="4071602"/>
+            <a:off x="2827717" y="3692191"/>
             <a:ext cx="131691" cy="141388"/>
           </a:xfrm>
           <a:prstGeom prst="rect">
@@ -16407,23 +17077,15 @@
           <a:bodyPr wrap="none" lIns="0" tIns="0" rIns="0" bIns="0" anchor="ctr" anchorCtr="1"/>
           <a:lstStyle/>
           <a:p>
-            <a:pPr marL="0" marR="0" indent="0" algn="l">
+            <a:pPr>
               <a:lnSpc>
                 <a:spcPts val="880"/>
               </a:lnSpc>
-              <a:spcBef>
-                <a:spcPts val="0"/>
-              </a:spcBef>
-              <a:spcAft>
-                <a:spcPts val="0"/>
-              </a:spcAft>
             </a:pPr>
             <a:r>
               <a:rPr sz="880">
                 <a:solidFill>
-                  <a:srgbClr val="4D4D4D">
-                    <a:alpha val="100000"/>
-                  </a:srgbClr>
+                  <a:srgbClr val="FF0000"/>
                 </a:solidFill>
                 <a:latin typeface="Arial"/>
                 <a:cs typeface="Arial"/>
@@ -16447,7 +17109,7 @@
         </p:nvSpPr>
         <p:spPr>
           <a:xfrm>
-            <a:off x="4476702" y="4071602"/>
+            <a:off x="2981277" y="3692191"/>
             <a:ext cx="219756" cy="141388"/>
           </a:xfrm>
           <a:prstGeom prst="rect">
@@ -16459,23 +17121,15 @@
           <a:bodyPr wrap="none" lIns="0" tIns="0" rIns="0" bIns="0" anchor="ctr" anchorCtr="1"/>
           <a:lstStyle/>
           <a:p>
-            <a:pPr marL="0" marR="0" indent="0" algn="l">
+            <a:pPr>
               <a:lnSpc>
                 <a:spcPts val="880"/>
               </a:lnSpc>
-              <a:spcBef>
-                <a:spcPts val="0"/>
-              </a:spcBef>
-              <a:spcAft>
-                <a:spcPts val="0"/>
-              </a:spcAft>
             </a:pPr>
             <a:r>
               <a:rPr sz="880">
                 <a:solidFill>
-                  <a:srgbClr val="4D4D4D">
-                    <a:alpha val="100000"/>
-                  </a:srgbClr>
+                  <a:srgbClr val="FF0000"/>
                 </a:solidFill>
                 <a:latin typeface="Arial"/>
                 <a:cs typeface="Arial"/>
@@ -16499,8 +17153,8 @@
         </p:nvSpPr>
         <p:spPr>
           <a:xfrm>
-            <a:off x="4696458" y="4074673"/>
-            <a:ext cx="74490" cy="138316"/>
+            <a:off x="3201035" y="3695262"/>
+            <a:ext cx="74489" cy="138316"/>
           </a:xfrm>
           <a:prstGeom prst="rect">
             <a:avLst/>
@@ -16511,23 +17165,15 @@
           <a:bodyPr wrap="none" lIns="0" tIns="0" rIns="0" bIns="0" anchor="ctr" anchorCtr="1"/>
           <a:lstStyle/>
           <a:p>
-            <a:pPr marL="0" marR="0" indent="0" algn="l">
+            <a:pPr>
               <a:lnSpc>
                 <a:spcPts val="880"/>
               </a:lnSpc>
-              <a:spcBef>
-                <a:spcPts val="0"/>
-              </a:spcBef>
-              <a:spcAft>
-                <a:spcPts val="0"/>
-              </a:spcAft>
             </a:pPr>
             <a:r>
               <a:rPr sz="880">
                 <a:solidFill>
-                  <a:srgbClr val="4D4D4D">
-                    <a:alpha val="100000"/>
-                  </a:srgbClr>
+                  <a:srgbClr val="FF0000"/>
                 </a:solidFill>
                 <a:latin typeface="Symbol"/>
                 <a:cs typeface="Symbol"/>
@@ -16551,7 +17197,7 @@
         </p:nvSpPr>
         <p:spPr>
           <a:xfrm>
-            <a:off x="4770949" y="4071602"/>
+            <a:off x="3275527" y="3692191"/>
             <a:ext cx="131691" cy="141388"/>
           </a:xfrm>
           <a:prstGeom prst="rect">
@@ -16563,23 +17209,15 @@
           <a:bodyPr wrap="none" lIns="0" tIns="0" rIns="0" bIns="0" anchor="ctr" anchorCtr="1"/>
           <a:lstStyle/>
           <a:p>
-            <a:pPr marL="0" marR="0" indent="0" algn="l">
+            <a:pPr>
               <a:lnSpc>
                 <a:spcPts val="880"/>
               </a:lnSpc>
-              <a:spcBef>
-                <a:spcPts val="0"/>
-              </a:spcBef>
-              <a:spcAft>
-                <a:spcPts val="0"/>
-              </a:spcAft>
             </a:pPr>
             <a:r>
               <a:rPr sz="880">
                 <a:solidFill>
-                  <a:srgbClr val="4D4D4D">
-                    <a:alpha val="100000"/>
-                  </a:srgbClr>
+                  <a:srgbClr val="FF0000"/>
                 </a:solidFill>
                 <a:latin typeface="Arial"/>
                 <a:cs typeface="Arial"/>
@@ -16603,7 +17241,7 @@
         </p:nvGrpSpPr>
         <p:grpSpPr>
           <a:xfrm>
-            <a:off x="3260484" y="1381276"/>
+            <a:off x="1765062" y="1001864"/>
             <a:ext cx="1356571" cy="2004354"/>
             <a:chOff x="3412315" y="1531332"/>
             <a:chExt cx="1356571" cy="2004354"/>
@@ -19278,40 +19916,6 @@
       </p:grpSpPr>
       <p:sp>
         <p:nvSpPr>
-          <p:cNvPr id="4" name="rc4">
-            <a:extLst>
-              <a:ext uri="{FF2B5EF4-FFF2-40B4-BE49-F238E27FC236}">
-                <a16:creationId xmlns:a16="http://schemas.microsoft.com/office/drawing/2014/main" id="{5A8AAFC7-7C78-4005-8C56-0D245423A6AF}"/>
-              </a:ext>
-            </a:extLst>
-          </p:cNvPr>
-          <p:cNvSpPr/>
-          <p:nvPr/>
-        </p:nvSpPr>
-        <p:spPr>
-          <a:xfrm>
-            <a:off x="2105025" y="950912"/>
-            <a:ext cx="3112121" cy="3429000"/>
-          </a:xfrm>
-          <a:prstGeom prst="rect">
-            <a:avLst/>
-          </a:prstGeom>
-          <a:solidFill>
-            <a:srgbClr val="FFFFFF">
-              <a:alpha val="100000"/>
-            </a:srgbClr>
-          </a:solidFill>
-        </p:spPr>
-        <p:txBody>
-          <a:bodyPr/>
-          <a:lstStyle/>
-          <a:p>
-            <a:endParaRPr/>
-          </a:p>
-        </p:txBody>
-      </p:sp>
-      <p:sp>
-        <p:nvSpPr>
           <p:cNvPr id="5" name="pl5">
             <a:extLst>
               <a:ext uri="{FF2B5EF4-FFF2-40B4-BE49-F238E27FC236}">
@@ -19324,7 +19928,7 @@
         </p:nvSpPr>
         <p:spPr>
           <a:xfrm>
-            <a:off x="2812999" y="1073884"/>
+            <a:off x="1317576" y="694472"/>
             <a:ext cx="85433" cy="2886396"/>
           </a:xfrm>
           <a:custGeom>
@@ -19616,7 +20220,7 @@
         </p:nvSpPr>
         <p:spPr>
           <a:xfrm>
-            <a:off x="3346242" y="1073884"/>
+            <a:off x="1850817" y="694472"/>
             <a:ext cx="0" cy="2886396"/>
           </a:xfrm>
           <a:custGeom>
@@ -19908,7 +20512,7 @@
         </p:nvSpPr>
         <p:spPr>
           <a:xfrm>
-            <a:off x="3794053" y="1073884"/>
+            <a:off x="2298630" y="694472"/>
             <a:ext cx="85433" cy="2886396"/>
           </a:xfrm>
           <a:custGeom>
@@ -20200,8 +20804,8 @@
         </p:nvSpPr>
         <p:spPr>
           <a:xfrm>
-            <a:off x="4241862" y="1073884"/>
-            <a:ext cx="170869" cy="2886396"/>
+            <a:off x="2746438" y="694472"/>
+            <a:ext cx="170870" cy="2886396"/>
           </a:xfrm>
           <a:custGeom>
             <a:avLst/>
@@ -20492,7 +21096,7 @@
         </p:nvSpPr>
         <p:spPr>
           <a:xfrm>
-            <a:off x="4689672" y="1073884"/>
+            <a:off x="3194247" y="694472"/>
             <a:ext cx="256304" cy="2886396"/>
           </a:xfrm>
           <a:custGeom>
@@ -20784,7 +21388,7 @@
         </p:nvSpPr>
         <p:spPr>
           <a:xfrm>
-            <a:off x="2775440" y="3539173"/>
+            <a:off x="1280016" y="3159762"/>
             <a:ext cx="2318734" cy="0"/>
           </a:xfrm>
           <a:custGeom>
@@ -21070,7 +21674,7 @@
         </p:nvSpPr>
         <p:spPr>
           <a:xfrm>
-            <a:off x="2775440" y="2935988"/>
+            <a:off x="1280016" y="2556576"/>
             <a:ext cx="2318734" cy="0"/>
           </a:xfrm>
           <a:custGeom>
@@ -21341,7 +21945,7 @@
         </p:nvSpPr>
         <p:spPr>
           <a:xfrm>
-            <a:off x="2775440" y="2332315"/>
+            <a:off x="1280016" y="1952903"/>
             <a:ext cx="2318734" cy="0"/>
           </a:xfrm>
           <a:custGeom>
@@ -21609,7 +22213,7 @@
         </p:nvSpPr>
         <p:spPr>
           <a:xfrm>
-            <a:off x="2775440" y="1728645"/>
+            <a:off x="1280016" y="1349232"/>
             <a:ext cx="2318734" cy="0"/>
           </a:xfrm>
           <a:custGeom>
@@ -21880,7 +22484,7 @@
         </p:nvSpPr>
         <p:spPr>
           <a:xfrm>
-            <a:off x="2775440" y="1125460"/>
+            <a:off x="1280016" y="746048"/>
             <a:ext cx="2318734" cy="0"/>
           </a:xfrm>
           <a:custGeom>
@@ -22166,7 +22770,7 @@
         </p:nvSpPr>
         <p:spPr>
           <a:xfrm>
-            <a:off x="5129520" y="2695744"/>
+            <a:off x="3634097" y="2316335"/>
             <a:ext cx="288345" cy="325105"/>
           </a:xfrm>
           <a:custGeom>
@@ -22362,7 +22966,7 @@
         </p:nvSpPr>
         <p:spPr>
           <a:xfrm>
-            <a:off x="2900146" y="1497552"/>
+            <a:off x="1404721" y="1118143"/>
             <a:ext cx="222750" cy="200915"/>
           </a:xfrm>
           <a:custGeom>
@@ -22490,7 +23094,7 @@
         </p:nvSpPr>
         <p:spPr>
           <a:xfrm>
-            <a:off x="1490728" y="2219787"/>
+            <a:off x="-4696" y="1840375"/>
             <a:ext cx="506698" cy="558796"/>
           </a:xfrm>
           <a:custGeom>
@@ -22905,7 +23509,7 @@
         </p:nvSpPr>
         <p:spPr>
           <a:xfrm>
-            <a:off x="4438383" y="1969369"/>
+            <a:off x="2942961" y="1589960"/>
             <a:ext cx="262789" cy="413753"/>
           </a:xfrm>
           <a:custGeom>
@@ -23057,7 +23661,7 @@
         </p:nvSpPr>
         <p:spPr>
           <a:xfrm>
-            <a:off x="5576245" y="2221098"/>
+            <a:off x="4080821" y="1841688"/>
             <a:ext cx="211260" cy="307351"/>
           </a:xfrm>
           <a:custGeom>
@@ -23217,7 +23821,7 @@
         </p:nvSpPr>
         <p:spPr>
           <a:xfrm>
-            <a:off x="3927008" y="1668276"/>
+            <a:off x="2431586" y="1288864"/>
             <a:ext cx="428513" cy="415652"/>
           </a:xfrm>
           <a:custGeom>
@@ -23504,7 +24108,7 @@
         </p:nvSpPr>
         <p:spPr>
           <a:xfrm>
-            <a:off x="3703960" y="1625725"/>
+            <a:off x="2208536" y="1246313"/>
             <a:ext cx="272268" cy="482570"/>
           </a:xfrm>
           <a:custGeom>
@@ -23722,7 +24326,7 @@
         </p:nvSpPr>
         <p:spPr>
           <a:xfrm>
-            <a:off x="4285903" y="3584078"/>
+            <a:off x="2790481" y="3204667"/>
             <a:ext cx="200751" cy="204158"/>
           </a:xfrm>
           <a:custGeom>
@@ -23882,8 +24486,8 @@
         </p:nvSpPr>
         <p:spPr>
           <a:xfrm>
-            <a:off x="3862661" y="2865412"/>
-            <a:ext cx="251555" cy="276680"/>
+            <a:off x="2367239" y="2486003"/>
+            <a:ext cx="251555" cy="276679"/>
           </a:xfrm>
           <a:custGeom>
             <a:avLst/>
@@ -24046,8 +24650,8 @@
         </p:nvSpPr>
         <p:spPr>
           <a:xfrm>
-            <a:off x="3654922" y="2843666"/>
-            <a:ext cx="350809" cy="365341"/>
+            <a:off x="2159499" y="2464256"/>
+            <a:ext cx="350809" cy="365340"/>
           </a:xfrm>
           <a:custGeom>
             <a:avLst/>
@@ -24222,7 +24826,7 @@
         </p:nvSpPr>
         <p:spPr>
           <a:xfrm>
-            <a:off x="2880837" y="1831321"/>
+            <a:off x="1385412" y="1451911"/>
             <a:ext cx="161854" cy="128767"/>
           </a:xfrm>
           <a:custGeom>
@@ -24398,7 +25002,7 @@
         </p:nvSpPr>
         <p:spPr>
           <a:xfrm>
-            <a:off x="3024815" y="1578494"/>
+            <a:off x="1529390" y="1199085"/>
             <a:ext cx="433838" cy="449077"/>
           </a:xfrm>
           <a:custGeom>
@@ -24670,7 +25274,7 @@
         </p:nvSpPr>
         <p:spPr>
           <a:xfrm>
-            <a:off x="2900146" y="1505420"/>
+            <a:off x="1404722" y="1126010"/>
             <a:ext cx="318362" cy="385707"/>
           </a:xfrm>
           <a:custGeom>
@@ -24831,7 +25435,7 @@
         </p:nvSpPr>
         <p:spPr>
           <a:xfrm>
-            <a:off x="3366732" y="1963001"/>
+            <a:off x="1871307" y="1583589"/>
             <a:ext cx="80222" cy="183922"/>
           </a:xfrm>
           <a:custGeom>
@@ -24950,8 +25554,8 @@
         </p:nvSpPr>
         <p:spPr>
           <a:xfrm>
-            <a:off x="3354053" y="1623856"/>
-            <a:ext cx="408393" cy="356514"/>
+            <a:off x="1858629" y="1244444"/>
+            <a:ext cx="408392" cy="356514"/>
           </a:xfrm>
           <a:custGeom>
             <a:avLst/>
@@ -25168,7 +25772,7 @@
         </p:nvSpPr>
         <p:spPr>
           <a:xfrm>
-            <a:off x="1829264" y="1868890"/>
+            <a:off x="333842" y="1489479"/>
             <a:ext cx="314507" cy="290526"/>
           </a:xfrm>
           <a:custGeom>
@@ -25391,7 +25995,7 @@
         </p:nvSpPr>
         <p:spPr>
           <a:xfrm>
-            <a:off x="3572316" y="1944174"/>
+            <a:off x="2076893" y="1564762"/>
             <a:ext cx="200733" cy="335994"/>
           </a:xfrm>
           <a:custGeom>
@@ -25618,7 +26222,7 @@
         </p:nvSpPr>
         <p:spPr>
           <a:xfrm>
-            <a:off x="3344922" y="1999734"/>
+            <a:off x="1849499" y="1620323"/>
             <a:ext cx="50953" cy="153628"/>
           </a:xfrm>
           <a:custGeom>
@@ -25719,7 +26323,7 @@
         </p:nvSpPr>
         <p:spPr>
           <a:xfrm>
-            <a:off x="1616394" y="1717663"/>
+            <a:off x="120970" y="1338253"/>
             <a:ext cx="114540" cy="192807"/>
           </a:xfrm>
           <a:custGeom>
@@ -25843,7 +26447,7 @@
         </p:nvSpPr>
         <p:spPr>
           <a:xfrm>
-            <a:off x="3117361" y="2014662"/>
+            <a:off x="1621938" y="1635253"/>
             <a:ext cx="160787" cy="186707"/>
           </a:xfrm>
           <a:custGeom>
@@ -26025,7 +26629,7 @@
         </p:nvSpPr>
         <p:spPr>
           <a:xfrm>
-            <a:off x="2945049" y="1952421"/>
+            <a:off x="1449627" y="1573012"/>
             <a:ext cx="193097" cy="159281"/>
           </a:xfrm>
           <a:custGeom>
@@ -26279,8 +26883,8 @@
         </p:nvSpPr>
         <p:spPr>
           <a:xfrm>
-            <a:off x="2904619" y="1951152"/>
-            <a:ext cx="78909" cy="47923"/>
+            <a:off x="1409195" y="1571740"/>
+            <a:ext cx="78908" cy="47924"/>
           </a:xfrm>
           <a:custGeom>
             <a:avLst/>
@@ -26380,8 +26984,8 @@
         </p:nvSpPr>
         <p:spPr>
           <a:xfrm>
-            <a:off x="3041968" y="2074517"/>
-            <a:ext cx="103555" cy="126326"/>
+            <a:off x="1546544" y="1695105"/>
+            <a:ext cx="103556" cy="126326"/>
           </a:xfrm>
           <a:custGeom>
             <a:avLst/>
@@ -26505,8 +27109,8 @@
         </p:nvSpPr>
         <p:spPr>
           <a:xfrm>
-            <a:off x="2994373" y="2029063"/>
-            <a:ext cx="80028" cy="98431"/>
+            <a:off x="1498949" y="1649654"/>
+            <a:ext cx="80029" cy="98431"/>
           </a:xfrm>
           <a:custGeom>
             <a:avLst/>
@@ -26615,7 +27219,7 @@
         </p:nvSpPr>
         <p:spPr>
           <a:xfrm>
-            <a:off x="3201174" y="1876056"/>
+            <a:off x="1705752" y="1496644"/>
             <a:ext cx="202703" cy="166170"/>
           </a:xfrm>
           <a:custGeom>
@@ -26776,7 +27380,7 @@
         </p:nvSpPr>
         <p:spPr>
           <a:xfrm>
-            <a:off x="3731147" y="1995998"/>
+            <a:off x="2235722" y="1616588"/>
             <a:ext cx="343866" cy="267871"/>
           </a:xfrm>
           <a:custGeom>
@@ -27006,7 +27610,7 @@
         </p:nvSpPr>
         <p:spPr>
           <a:xfrm>
-            <a:off x="3641757" y="2219787"/>
+            <a:off x="2146332" y="1840378"/>
             <a:ext cx="196130" cy="264593"/>
           </a:xfrm>
           <a:custGeom>
@@ -27197,7 +27801,7 @@
         </p:nvSpPr>
         <p:spPr>
           <a:xfrm>
-            <a:off x="3580803" y="2262086"/>
+            <a:off x="2085378" y="1882677"/>
             <a:ext cx="150016" cy="190325"/>
           </a:xfrm>
           <a:custGeom>
@@ -27334,7 +27938,7 @@
         </p:nvSpPr>
         <p:spPr>
           <a:xfrm>
-            <a:off x="3594334" y="2263382"/>
+            <a:off x="2098911" y="1883971"/>
             <a:ext cx="52777" cy="38446"/>
           </a:xfrm>
           <a:custGeom>
@@ -27399,7 +28003,7 @@
         </p:nvSpPr>
         <p:spPr>
           <a:xfrm>
-            <a:off x="4156427" y="3200797"/>
+            <a:off x="2661003" y="2821386"/>
             <a:ext cx="311450" cy="293472"/>
           </a:xfrm>
           <a:custGeom>
@@ -27631,7 +28235,7 @@
         </p:nvSpPr>
         <p:spPr>
           <a:xfrm>
-            <a:off x="5160866" y="3041639"/>
+            <a:off x="3665441" y="2662229"/>
             <a:ext cx="78762" cy="228509"/>
           </a:xfrm>
           <a:custGeom>
@@ -27764,8 +28368,8 @@
         </p:nvSpPr>
         <p:spPr>
           <a:xfrm>
-            <a:off x="4143088" y="2643723"/>
-            <a:ext cx="279921" cy="495763"/>
+            <a:off x="2647664" y="2264314"/>
+            <a:ext cx="279920" cy="495763"/>
           </a:xfrm>
           <a:custGeom>
             <a:avLst/>
@@ -28039,7 +28643,7 @@
         </p:nvSpPr>
         <p:spPr>
           <a:xfrm>
-            <a:off x="4139038" y="3106830"/>
+            <a:off x="2643616" y="2727418"/>
             <a:ext cx="35821" cy="49064"/>
           </a:xfrm>
           <a:custGeom>
@@ -28116,7 +28720,7 @@
         </p:nvSpPr>
         <p:spPr>
           <a:xfrm>
-            <a:off x="3663480" y="2466272"/>
+            <a:off x="2168057" y="2086863"/>
             <a:ext cx="28811" cy="40805"/>
           </a:xfrm>
           <a:custGeom>
@@ -28187,7 +28791,7 @@
         </p:nvSpPr>
         <p:spPr>
           <a:xfrm>
-            <a:off x="3652748" y="2509319"/>
+            <a:off x="2157326" y="2129908"/>
             <a:ext cx="331267" cy="364206"/>
           </a:xfrm>
           <a:custGeom>
@@ -28429,8 +29033,8 @@
         </p:nvSpPr>
         <p:spPr>
           <a:xfrm>
-            <a:off x="4119741" y="2403202"/>
-            <a:ext cx="45880" cy="64938"/>
+            <a:off x="2624318" y="2023790"/>
+            <a:ext cx="45879" cy="64938"/>
           </a:xfrm>
           <a:custGeom>
             <a:avLst/>
@@ -28512,8 +29116,8 @@
         </p:nvSpPr>
         <p:spPr>
           <a:xfrm>
-            <a:off x="4474943" y="2695744"/>
-            <a:ext cx="203274" cy="409314"/>
+            <a:off x="2979521" y="2316332"/>
+            <a:ext cx="203273" cy="409314"/>
           </a:xfrm>
           <a:custGeom>
             <a:avLst/>
@@ -28703,8 +29307,8 @@
         </p:nvSpPr>
         <p:spPr>
           <a:xfrm>
-            <a:off x="2900653" y="1913473"/>
-            <a:ext cx="79432" cy="22522"/>
+            <a:off x="1405229" y="1534064"/>
+            <a:ext cx="79432" cy="22521"/>
           </a:xfrm>
           <a:custGeom>
             <a:avLst/>
@@ -28795,7 +29399,7 @@
         </p:nvSpPr>
         <p:spPr>
           <a:xfrm>
-            <a:off x="3536053" y="1205085"/>
+            <a:off x="2040628" y="825673"/>
             <a:ext cx="101072" cy="212438"/>
           </a:xfrm>
           <a:custGeom>
@@ -28932,8 +29536,8 @@
         </p:nvSpPr>
         <p:spPr>
           <a:xfrm>
-            <a:off x="3122256" y="1212056"/>
-            <a:ext cx="536280" cy="545039"/>
+            <a:off x="1626832" y="832645"/>
+            <a:ext cx="536280" cy="545038"/>
           </a:xfrm>
           <a:custGeom>
             <a:avLst/>
@@ -29162,7 +29766,7 @@
         </p:nvSpPr>
         <p:spPr>
           <a:xfrm>
-            <a:off x="4305271" y="1789064"/>
+            <a:off x="2809849" y="1409652"/>
             <a:ext cx="181383" cy="167302"/>
           </a:xfrm>
           <a:custGeom>
@@ -29290,7 +29894,7 @@
         </p:nvSpPr>
         <p:spPr>
           <a:xfrm>
-            <a:off x="2901599" y="1252977"/>
+            <a:off x="1406177" y="873568"/>
             <a:ext cx="416119" cy="432783"/>
           </a:xfrm>
           <a:custGeom>
@@ -29523,7 +30127,7 @@
         </p:nvSpPr>
         <p:spPr>
           <a:xfrm>
-            <a:off x="5083550" y="1391541"/>
+            <a:off x="3588124" y="1012129"/>
             <a:ext cx="329964" cy="289342"/>
           </a:xfrm>
           <a:custGeom>
@@ -29701,8 +30305,8 @@
         </p:nvSpPr>
         <p:spPr>
           <a:xfrm>
-            <a:off x="3587405" y="1332100"/>
-            <a:ext cx="413541" cy="409206"/>
+            <a:off x="2091981" y="952690"/>
+            <a:ext cx="413540" cy="409207"/>
           </a:xfrm>
           <a:custGeom>
             <a:avLst/>
@@ -29913,7 +30517,7 @@
         </p:nvSpPr>
         <p:spPr>
           <a:xfrm>
-            <a:off x="5163456" y="1850167"/>
+            <a:off x="3668032" y="1470756"/>
             <a:ext cx="394194" cy="348238"/>
           </a:xfrm>
           <a:custGeom>
@@ -30139,8 +30743,8 @@
         </p:nvSpPr>
         <p:spPr>
           <a:xfrm>
-            <a:off x="4450313" y="1948996"/>
-            <a:ext cx="42991" cy="53507"/>
+            <a:off x="2954891" y="1569584"/>
+            <a:ext cx="42991" cy="53508"/>
           </a:xfrm>
           <a:custGeom>
             <a:avLst/>
@@ -30228,7 +30832,7 @@
         </p:nvSpPr>
         <p:spPr>
           <a:xfrm>
-            <a:off x="4475207" y="1986351"/>
+            <a:off x="2979784" y="1606942"/>
             <a:ext cx="170443" cy="104591"/>
           </a:xfrm>
           <a:custGeom>
@@ -30344,7 +30948,7 @@
         </p:nvSpPr>
         <p:spPr>
           <a:xfrm>
-            <a:off x="5306348" y="2461452"/>
+            <a:off x="3834211" y="1999389"/>
             <a:ext cx="145358" cy="171840"/>
           </a:xfrm>
           <a:custGeom>
@@ -30474,7 +31078,7 @@
         </p:nvSpPr>
         <p:spPr>
           <a:xfrm>
-            <a:off x="4119741" y="2366564"/>
+            <a:off x="2624316" y="1987155"/>
             <a:ext cx="47992" cy="53823"/>
           </a:xfrm>
           <a:custGeom>
@@ -30557,7 +31161,7 @@
         </p:nvSpPr>
         <p:spPr>
           <a:xfrm>
-            <a:off x="3980887" y="1962628"/>
+            <a:off x="2485466" y="1583217"/>
             <a:ext cx="304949" cy="263768"/>
           </a:xfrm>
           <a:custGeom>
@@ -30790,7 +31394,7 @@
         </p:nvSpPr>
         <p:spPr>
           <a:xfrm>
-            <a:off x="2238825" y="3468479"/>
+            <a:off x="743400" y="3089068"/>
             <a:ext cx="219756" cy="141388"/>
           </a:xfrm>
           <a:prstGeom prst="rect">
@@ -30802,23 +31406,15 @@
           <a:bodyPr wrap="none" lIns="0" tIns="0" rIns="0" bIns="0" anchor="ctr" anchorCtr="1"/>
           <a:lstStyle/>
           <a:p>
-            <a:pPr marL="0" marR="0" indent="0" algn="l">
+            <a:pPr>
               <a:lnSpc>
                 <a:spcPts val="880"/>
               </a:lnSpc>
-              <a:spcBef>
-                <a:spcPts val="0"/>
-              </a:spcBef>
-              <a:spcAft>
-                <a:spcPts val="0"/>
-              </a:spcAft>
             </a:pPr>
             <a:r>
               <a:rPr sz="880">
                 <a:solidFill>
-                  <a:srgbClr val="4D4D4D">
-                    <a:alpha val="100000"/>
-                  </a:srgbClr>
+                  <a:srgbClr val="FF0000"/>
                 </a:solidFill>
                 <a:latin typeface="Arial"/>
                 <a:cs typeface="Arial"/>
@@ -30842,8 +31438,8 @@
         </p:nvSpPr>
         <p:spPr>
           <a:xfrm>
-            <a:off x="2458581" y="3471548"/>
-            <a:ext cx="74490" cy="138316"/>
+            <a:off x="963158" y="3092136"/>
+            <a:ext cx="74489" cy="138316"/>
           </a:xfrm>
           <a:prstGeom prst="rect">
             <a:avLst/>
@@ -30854,23 +31450,15 @@
           <a:bodyPr wrap="none" lIns="0" tIns="0" rIns="0" bIns="0" anchor="ctr" anchorCtr="1"/>
           <a:lstStyle/>
           <a:p>
-            <a:pPr marL="0" marR="0" indent="0" algn="l">
+            <a:pPr>
               <a:lnSpc>
                 <a:spcPts val="880"/>
               </a:lnSpc>
-              <a:spcBef>
-                <a:spcPts val="0"/>
-              </a:spcBef>
-              <a:spcAft>
-                <a:spcPts val="0"/>
-              </a:spcAft>
             </a:pPr>
             <a:r>
               <a:rPr sz="880">
                 <a:solidFill>
-                  <a:srgbClr val="4D4D4D">
-                    <a:alpha val="100000"/>
-                  </a:srgbClr>
+                  <a:srgbClr val="FF0000"/>
                 </a:solidFill>
                 <a:latin typeface="Symbol"/>
                 <a:cs typeface="Symbol"/>
@@ -30894,7 +31482,7 @@
         </p:nvSpPr>
         <p:spPr>
           <a:xfrm>
-            <a:off x="2533072" y="3468479"/>
+            <a:off x="1037649" y="3089068"/>
             <a:ext cx="131691" cy="141388"/>
           </a:xfrm>
           <a:prstGeom prst="rect">
@@ -30906,23 +31494,15 @@
           <a:bodyPr wrap="none" lIns="0" tIns="0" rIns="0" bIns="0" anchor="ctr" anchorCtr="1"/>
           <a:lstStyle/>
           <a:p>
-            <a:pPr marL="0" marR="0" indent="0" algn="l">
+            <a:pPr>
               <a:lnSpc>
                 <a:spcPts val="880"/>
               </a:lnSpc>
-              <a:spcBef>
-                <a:spcPts val="0"/>
-              </a:spcBef>
-              <a:spcAft>
-                <a:spcPts val="0"/>
-              </a:spcAft>
             </a:pPr>
             <a:r>
               <a:rPr sz="880">
                 <a:solidFill>
-                  <a:srgbClr val="4D4D4D">
-                    <a:alpha val="100000"/>
-                  </a:srgbClr>
+                  <a:srgbClr val="FF0000"/>
                 </a:solidFill>
                 <a:latin typeface="Arial"/>
                 <a:cs typeface="Arial"/>
@@ -30946,7 +31526,7 @@
         </p:nvSpPr>
         <p:spPr>
           <a:xfrm>
-            <a:off x="2238825" y="2865294"/>
+            <a:off x="743400" y="2485883"/>
             <a:ext cx="219756" cy="141388"/>
           </a:xfrm>
           <a:prstGeom prst="rect">
@@ -30958,23 +31538,15 @@
           <a:bodyPr wrap="none" lIns="0" tIns="0" rIns="0" bIns="0" anchor="ctr" anchorCtr="1"/>
           <a:lstStyle/>
           <a:p>
-            <a:pPr marL="0" marR="0" indent="0" algn="l">
+            <a:pPr>
               <a:lnSpc>
                 <a:spcPts val="880"/>
               </a:lnSpc>
-              <a:spcBef>
-                <a:spcPts val="0"/>
-              </a:spcBef>
-              <a:spcAft>
-                <a:spcPts val="0"/>
-              </a:spcAft>
             </a:pPr>
             <a:r>
               <a:rPr sz="880">
                 <a:solidFill>
-                  <a:srgbClr val="4D4D4D">
-                    <a:alpha val="100000"/>
-                  </a:srgbClr>
+                  <a:srgbClr val="FF0000"/>
                 </a:solidFill>
                 <a:latin typeface="Arial"/>
                 <a:cs typeface="Arial"/>
@@ -30998,8 +31570,8 @@
         </p:nvSpPr>
         <p:spPr>
           <a:xfrm>
-            <a:off x="2458581" y="2868364"/>
-            <a:ext cx="74490" cy="138316"/>
+            <a:off x="963158" y="2488952"/>
+            <a:ext cx="74489" cy="138316"/>
           </a:xfrm>
           <a:prstGeom prst="rect">
             <a:avLst/>
@@ -31010,23 +31582,15 @@
           <a:bodyPr wrap="none" lIns="0" tIns="0" rIns="0" bIns="0" anchor="ctr" anchorCtr="1"/>
           <a:lstStyle/>
           <a:p>
-            <a:pPr marL="0" marR="0" indent="0" algn="l">
+            <a:pPr>
               <a:lnSpc>
                 <a:spcPts val="880"/>
               </a:lnSpc>
-              <a:spcBef>
-                <a:spcPts val="0"/>
-              </a:spcBef>
-              <a:spcAft>
-                <a:spcPts val="0"/>
-              </a:spcAft>
             </a:pPr>
             <a:r>
               <a:rPr sz="880">
                 <a:solidFill>
-                  <a:srgbClr val="4D4D4D">
-                    <a:alpha val="100000"/>
-                  </a:srgbClr>
+                  <a:srgbClr val="FF0000"/>
                 </a:solidFill>
                 <a:latin typeface="Symbol"/>
                 <a:cs typeface="Symbol"/>
@@ -31050,7 +31614,7 @@
         </p:nvSpPr>
         <p:spPr>
           <a:xfrm>
-            <a:off x="2533072" y="2865294"/>
+            <a:off x="1037649" y="2485883"/>
             <a:ext cx="131691" cy="141388"/>
           </a:xfrm>
           <a:prstGeom prst="rect">
@@ -31062,23 +31626,15 @@
           <a:bodyPr wrap="none" lIns="0" tIns="0" rIns="0" bIns="0" anchor="ctr" anchorCtr="1"/>
           <a:lstStyle/>
           <a:p>
-            <a:pPr marL="0" marR="0" indent="0" algn="l">
+            <a:pPr>
               <a:lnSpc>
                 <a:spcPts val="880"/>
               </a:lnSpc>
-              <a:spcBef>
-                <a:spcPts val="0"/>
-              </a:spcBef>
-              <a:spcAft>
-                <a:spcPts val="0"/>
-              </a:spcAft>
             </a:pPr>
             <a:r>
               <a:rPr sz="880">
                 <a:solidFill>
-                  <a:srgbClr val="4D4D4D">
-                    <a:alpha val="100000"/>
-                  </a:srgbClr>
+                  <a:srgbClr val="FF0000"/>
                 </a:solidFill>
                 <a:latin typeface="Arial"/>
                 <a:cs typeface="Arial"/>
@@ -31102,7 +31658,7 @@
         </p:nvSpPr>
         <p:spPr>
           <a:xfrm>
-            <a:off x="2425456" y="2260733"/>
+            <a:off x="930031" y="1881321"/>
             <a:ext cx="164816" cy="141388"/>
           </a:xfrm>
           <a:prstGeom prst="rect">
@@ -31114,23 +31670,15 @@
           <a:bodyPr wrap="none" lIns="0" tIns="0" rIns="0" bIns="0" anchor="ctr" anchorCtr="1"/>
           <a:lstStyle/>
           <a:p>
-            <a:pPr marL="0" marR="0" indent="0" algn="l">
+            <a:pPr>
               <a:lnSpc>
                 <a:spcPts val="880"/>
               </a:lnSpc>
-              <a:spcBef>
-                <a:spcPts val="0"/>
-              </a:spcBef>
-              <a:spcAft>
-                <a:spcPts val="0"/>
-              </a:spcAft>
             </a:pPr>
             <a:r>
               <a:rPr sz="880">
                 <a:solidFill>
-                  <a:srgbClr val="4D4D4D">
-                    <a:alpha val="100000"/>
-                  </a:srgbClr>
+                  <a:srgbClr val="FF0000"/>
                 </a:solidFill>
                 <a:latin typeface="Arial"/>
                 <a:cs typeface="Arial"/>
@@ -31154,8 +31702,8 @@
         </p:nvSpPr>
         <p:spPr>
           <a:xfrm>
-            <a:off x="2590274" y="2263804"/>
-            <a:ext cx="74490" cy="138316"/>
+            <a:off x="1094851" y="1884392"/>
+            <a:ext cx="74489" cy="138316"/>
           </a:xfrm>
           <a:prstGeom prst="rect">
             <a:avLst/>
@@ -31166,23 +31714,15 @@
           <a:bodyPr wrap="none" lIns="0" tIns="0" rIns="0" bIns="0" anchor="ctr" anchorCtr="1"/>
           <a:lstStyle/>
           <a:p>
-            <a:pPr marL="0" marR="0" indent="0" algn="l">
+            <a:pPr>
               <a:lnSpc>
                 <a:spcPts val="880"/>
               </a:lnSpc>
-              <a:spcBef>
-                <a:spcPts val="0"/>
-              </a:spcBef>
-              <a:spcAft>
-                <a:spcPts val="0"/>
-              </a:spcAft>
             </a:pPr>
             <a:r>
               <a:rPr sz="880">
                 <a:solidFill>
-                  <a:srgbClr val="4D4D4D">
-                    <a:alpha val="100000"/>
-                  </a:srgbClr>
+                  <a:srgbClr val="FF0000"/>
                 </a:solidFill>
                 <a:latin typeface="Symbol"/>
                 <a:cs typeface="Symbol"/>
@@ -31206,7 +31746,7 @@
         </p:nvSpPr>
         <p:spPr>
           <a:xfrm>
-            <a:off x="2227997" y="1657062"/>
+            <a:off x="732572" y="1277651"/>
             <a:ext cx="219756" cy="141388"/>
           </a:xfrm>
           <a:prstGeom prst="rect">
@@ -31218,23 +31758,15 @@
           <a:bodyPr wrap="none" lIns="0" tIns="0" rIns="0" bIns="0" anchor="ctr" anchorCtr="1"/>
           <a:lstStyle/>
           <a:p>
-            <a:pPr marL="0" marR="0" indent="0" algn="l">
+            <a:pPr>
               <a:lnSpc>
                 <a:spcPts val="880"/>
               </a:lnSpc>
-              <a:spcBef>
-                <a:spcPts val="0"/>
-              </a:spcBef>
-              <a:spcAft>
-                <a:spcPts val="0"/>
-              </a:spcAft>
             </a:pPr>
             <a:r>
               <a:rPr sz="880">
                 <a:solidFill>
-                  <a:srgbClr val="4D4D4D">
-                    <a:alpha val="100000"/>
-                  </a:srgbClr>
+                  <a:srgbClr val="FF0000"/>
                 </a:solidFill>
                 <a:latin typeface="Arial"/>
                 <a:cs typeface="Arial"/>
@@ -31258,8 +31790,8 @@
         </p:nvSpPr>
         <p:spPr>
           <a:xfrm>
-            <a:off x="2447755" y="1660131"/>
-            <a:ext cx="74490" cy="138316"/>
+            <a:off x="952333" y="1280720"/>
+            <a:ext cx="74489" cy="138316"/>
           </a:xfrm>
           <a:prstGeom prst="rect">
             <a:avLst/>
@@ -31270,23 +31802,15 @@
           <a:bodyPr wrap="none" lIns="0" tIns="0" rIns="0" bIns="0" anchor="ctr" anchorCtr="1"/>
           <a:lstStyle/>
           <a:p>
-            <a:pPr marL="0" marR="0" indent="0" algn="l">
+            <a:pPr>
               <a:lnSpc>
                 <a:spcPts val="880"/>
               </a:lnSpc>
-              <a:spcBef>
-                <a:spcPts val="0"/>
-              </a:spcBef>
-              <a:spcAft>
-                <a:spcPts val="0"/>
-              </a:spcAft>
             </a:pPr>
             <a:r>
               <a:rPr sz="880">
                 <a:solidFill>
-                  <a:srgbClr val="4D4D4D">
-                    <a:alpha val="100000"/>
-                  </a:srgbClr>
+                  <a:srgbClr val="FF0000"/>
                 </a:solidFill>
                 <a:latin typeface="Symbol"/>
                 <a:cs typeface="Symbol"/>
@@ -31310,7 +31834,7 @@
         </p:nvSpPr>
         <p:spPr>
           <a:xfrm>
-            <a:off x="2522247" y="1657062"/>
+            <a:off x="1026825" y="1277651"/>
             <a:ext cx="142519" cy="141388"/>
           </a:xfrm>
           <a:prstGeom prst="rect">
@@ -31322,23 +31846,15 @@
           <a:bodyPr wrap="none" lIns="0" tIns="0" rIns="0" bIns="0" anchor="ctr" anchorCtr="1"/>
           <a:lstStyle/>
           <a:p>
-            <a:pPr marL="0" marR="0" indent="0" algn="l">
+            <a:pPr>
               <a:lnSpc>
                 <a:spcPts val="880"/>
               </a:lnSpc>
-              <a:spcBef>
-                <a:spcPts val="0"/>
-              </a:spcBef>
-              <a:spcAft>
-                <a:spcPts val="0"/>
-              </a:spcAft>
             </a:pPr>
             <a:r>
               <a:rPr sz="880">
                 <a:solidFill>
-                  <a:srgbClr val="4D4D4D">
-                    <a:alpha val="100000"/>
-                  </a:srgbClr>
+                  <a:srgbClr val="FF0000"/>
                 </a:solidFill>
                 <a:latin typeface="Arial"/>
                 <a:cs typeface="Arial"/>
@@ -31362,7 +31878,7 @@
         </p:nvSpPr>
         <p:spPr>
           <a:xfrm>
-            <a:off x="2227997" y="1053877"/>
+            <a:off x="732572" y="674465"/>
             <a:ext cx="219756" cy="141388"/>
           </a:xfrm>
           <a:prstGeom prst="rect">
@@ -31374,23 +31890,15 @@
           <a:bodyPr wrap="none" lIns="0" tIns="0" rIns="0" bIns="0" anchor="ctr" anchorCtr="1"/>
           <a:lstStyle/>
           <a:p>
-            <a:pPr marL="0" marR="0" indent="0" algn="l">
+            <a:pPr>
               <a:lnSpc>
                 <a:spcPts val="880"/>
               </a:lnSpc>
-              <a:spcBef>
-                <a:spcPts val="0"/>
-              </a:spcBef>
-              <a:spcAft>
-                <a:spcPts val="0"/>
-              </a:spcAft>
             </a:pPr>
             <a:r>
               <a:rPr sz="880">
                 <a:solidFill>
-                  <a:srgbClr val="4D4D4D">
-                    <a:alpha val="100000"/>
-                  </a:srgbClr>
+                  <a:srgbClr val="FF0000"/>
                 </a:solidFill>
                 <a:latin typeface="Arial"/>
                 <a:cs typeface="Arial"/>
@@ -31414,8 +31922,8 @@
         </p:nvSpPr>
         <p:spPr>
           <a:xfrm>
-            <a:off x="2447755" y="1056948"/>
-            <a:ext cx="74490" cy="138316"/>
+            <a:off x="952333" y="677537"/>
+            <a:ext cx="74489" cy="138316"/>
           </a:xfrm>
           <a:prstGeom prst="rect">
             <a:avLst/>
@@ -31426,23 +31934,15 @@
           <a:bodyPr wrap="none" lIns="0" tIns="0" rIns="0" bIns="0" anchor="ctr" anchorCtr="1"/>
           <a:lstStyle/>
           <a:p>
-            <a:pPr marL="0" marR="0" indent="0" algn="l">
+            <a:pPr>
               <a:lnSpc>
                 <a:spcPts val="880"/>
               </a:lnSpc>
-              <a:spcBef>
-                <a:spcPts val="0"/>
-              </a:spcBef>
-              <a:spcAft>
-                <a:spcPts val="0"/>
-              </a:spcAft>
             </a:pPr>
             <a:r>
               <a:rPr sz="880">
                 <a:solidFill>
-                  <a:srgbClr val="4D4D4D">
-                    <a:alpha val="100000"/>
-                  </a:srgbClr>
+                  <a:srgbClr val="FF0000"/>
                 </a:solidFill>
                 <a:latin typeface="Symbol"/>
                 <a:cs typeface="Symbol"/>
@@ -31466,7 +31966,7 @@
         </p:nvSpPr>
         <p:spPr>
           <a:xfrm>
-            <a:off x="2522247" y="1053877"/>
+            <a:off x="1026825" y="674465"/>
             <a:ext cx="142519" cy="141388"/>
           </a:xfrm>
           <a:prstGeom prst="rect">
@@ -31478,23 +31978,15 @@
           <a:bodyPr wrap="none" lIns="0" tIns="0" rIns="0" bIns="0" anchor="ctr" anchorCtr="1"/>
           <a:lstStyle/>
           <a:p>
-            <a:pPr marL="0" marR="0" indent="0" algn="l">
+            <a:pPr>
               <a:lnSpc>
                 <a:spcPts val="880"/>
               </a:lnSpc>
-              <a:spcBef>
-                <a:spcPts val="0"/>
-              </a:spcBef>
-              <a:spcAft>
-                <a:spcPts val="0"/>
-              </a:spcAft>
             </a:pPr>
             <a:r>
               <a:rPr sz="880">
                 <a:solidFill>
-                  <a:srgbClr val="4D4D4D">
-                    <a:alpha val="100000"/>
-                  </a:srgbClr>
+                  <a:srgbClr val="FF0000"/>
                 </a:solidFill>
                 <a:latin typeface="Arial"/>
                 <a:cs typeface="Arial"/>
@@ -31518,7 +32010,7 @@
         </p:nvSpPr>
         <p:spPr>
           <a:xfrm>
-            <a:off x="2658154" y="4071602"/>
+            <a:off x="1162729" y="3692191"/>
             <a:ext cx="219756" cy="141388"/>
           </a:xfrm>
           <a:prstGeom prst="rect">
@@ -31530,23 +32022,15 @@
           <a:bodyPr wrap="none" lIns="0" tIns="0" rIns="0" bIns="0" anchor="ctr" anchorCtr="1"/>
           <a:lstStyle/>
           <a:p>
-            <a:pPr marL="0" marR="0" indent="0" algn="l">
+            <a:pPr>
               <a:lnSpc>
                 <a:spcPts val="880"/>
               </a:lnSpc>
-              <a:spcBef>
-                <a:spcPts val="0"/>
-              </a:spcBef>
-              <a:spcAft>
-                <a:spcPts val="0"/>
-              </a:spcAft>
             </a:pPr>
             <a:r>
               <a:rPr sz="880">
                 <a:solidFill>
-                  <a:srgbClr val="4D4D4D">
-                    <a:alpha val="100000"/>
-                  </a:srgbClr>
+                  <a:srgbClr val="FF0000"/>
                 </a:solidFill>
                 <a:latin typeface="Arial"/>
                 <a:cs typeface="Arial"/>
@@ -31570,8 +32054,8 @@
         </p:nvSpPr>
         <p:spPr>
           <a:xfrm>
-            <a:off x="2877912" y="4074673"/>
-            <a:ext cx="74490" cy="138316"/>
+            <a:off x="1382489" y="3695262"/>
+            <a:ext cx="74489" cy="138316"/>
           </a:xfrm>
           <a:prstGeom prst="rect">
             <a:avLst/>
@@ -31582,23 +32066,15 @@
           <a:bodyPr wrap="none" lIns="0" tIns="0" rIns="0" bIns="0" anchor="ctr" anchorCtr="1"/>
           <a:lstStyle/>
           <a:p>
-            <a:pPr marL="0" marR="0" indent="0" algn="l">
+            <a:pPr>
               <a:lnSpc>
                 <a:spcPts val="880"/>
               </a:lnSpc>
-              <a:spcBef>
-                <a:spcPts val="0"/>
-              </a:spcBef>
-              <a:spcAft>
-                <a:spcPts val="0"/>
-              </a:spcAft>
             </a:pPr>
             <a:r>
               <a:rPr sz="880">
                 <a:solidFill>
-                  <a:srgbClr val="4D4D4D">
-                    <a:alpha val="100000"/>
-                  </a:srgbClr>
+                  <a:srgbClr val="FF0000"/>
                 </a:solidFill>
                 <a:latin typeface="Symbol"/>
                 <a:cs typeface="Symbol"/>
@@ -31622,7 +32098,7 @@
         </p:nvSpPr>
         <p:spPr>
           <a:xfrm>
-            <a:off x="2952403" y="4071602"/>
+            <a:off x="1456978" y="3692191"/>
             <a:ext cx="186308" cy="141388"/>
           </a:xfrm>
           <a:prstGeom prst="rect">
@@ -31634,23 +32110,15 @@
           <a:bodyPr wrap="none" lIns="0" tIns="0" rIns="0" bIns="0" anchor="ctr" anchorCtr="1"/>
           <a:lstStyle/>
           <a:p>
-            <a:pPr marL="0" marR="0" indent="0" algn="l">
+            <a:pPr>
               <a:lnSpc>
                 <a:spcPts val="880"/>
               </a:lnSpc>
-              <a:spcBef>
-                <a:spcPts val="0"/>
-              </a:spcBef>
-              <a:spcAft>
-                <a:spcPts val="0"/>
-              </a:spcAft>
             </a:pPr>
             <a:r>
               <a:rPr sz="880">
                 <a:solidFill>
-                  <a:srgbClr val="4D4D4D">
-                    <a:alpha val="100000"/>
-                  </a:srgbClr>
+                  <a:srgbClr val="FF0000"/>
                 </a:solidFill>
                 <a:latin typeface="Arial"/>
                 <a:cs typeface="Arial"/>
@@ -31674,7 +32142,7 @@
         </p:nvSpPr>
         <p:spPr>
           <a:xfrm>
-            <a:off x="3226589" y="4071602"/>
+            <a:off x="1731164" y="3692191"/>
             <a:ext cx="164816" cy="141388"/>
           </a:xfrm>
           <a:prstGeom prst="rect">
@@ -31686,23 +32154,15 @@
           <a:bodyPr wrap="none" lIns="0" tIns="0" rIns="0" bIns="0" anchor="ctr" anchorCtr="1"/>
           <a:lstStyle/>
           <a:p>
-            <a:pPr marL="0" marR="0" indent="0" algn="l">
+            <a:pPr>
               <a:lnSpc>
                 <a:spcPts val="880"/>
               </a:lnSpc>
-              <a:spcBef>
-                <a:spcPts val="0"/>
-              </a:spcBef>
-              <a:spcAft>
-                <a:spcPts val="0"/>
-              </a:spcAft>
             </a:pPr>
             <a:r>
               <a:rPr sz="880">
                 <a:solidFill>
-                  <a:srgbClr val="4D4D4D">
-                    <a:alpha val="100000"/>
-                  </a:srgbClr>
+                  <a:srgbClr val="FF0000"/>
                 </a:solidFill>
                 <a:latin typeface="Arial"/>
                 <a:cs typeface="Arial"/>
@@ -31726,8 +32186,8 @@
         </p:nvSpPr>
         <p:spPr>
           <a:xfrm>
-            <a:off x="3391407" y="4074673"/>
-            <a:ext cx="74490" cy="138316"/>
+            <a:off x="1895984" y="3695262"/>
+            <a:ext cx="74489" cy="138316"/>
           </a:xfrm>
           <a:prstGeom prst="rect">
             <a:avLst/>
@@ -31738,23 +32198,15 @@
           <a:bodyPr wrap="none" lIns="0" tIns="0" rIns="0" bIns="0" anchor="ctr" anchorCtr="1"/>
           <a:lstStyle/>
           <a:p>
-            <a:pPr marL="0" marR="0" indent="0" algn="l">
+            <a:pPr>
               <a:lnSpc>
                 <a:spcPts val="880"/>
               </a:lnSpc>
-              <a:spcBef>
-                <a:spcPts val="0"/>
-              </a:spcBef>
-              <a:spcAft>
-                <a:spcPts val="0"/>
-              </a:spcAft>
             </a:pPr>
             <a:r>
               <a:rPr sz="880">
                 <a:solidFill>
-                  <a:srgbClr val="4D4D4D">
-                    <a:alpha val="100000"/>
-                  </a:srgbClr>
+                  <a:srgbClr val="FF0000"/>
                 </a:solidFill>
                 <a:latin typeface="Symbol"/>
                 <a:cs typeface="Symbol"/>
@@ -31778,7 +32230,7 @@
         </p:nvSpPr>
         <p:spPr>
           <a:xfrm>
-            <a:off x="3581083" y="4071602"/>
+            <a:off x="2085658" y="3692191"/>
             <a:ext cx="219756" cy="141388"/>
           </a:xfrm>
           <a:prstGeom prst="rect">
@@ -31790,23 +32242,15 @@
           <a:bodyPr wrap="none" lIns="0" tIns="0" rIns="0" bIns="0" anchor="ctr" anchorCtr="1"/>
           <a:lstStyle/>
           <a:p>
-            <a:pPr marL="0" marR="0" indent="0" algn="l">
+            <a:pPr>
               <a:lnSpc>
                 <a:spcPts val="880"/>
               </a:lnSpc>
-              <a:spcBef>
-                <a:spcPts val="0"/>
-              </a:spcBef>
-              <a:spcAft>
-                <a:spcPts val="0"/>
-              </a:spcAft>
             </a:pPr>
             <a:r>
               <a:rPr sz="880">
                 <a:solidFill>
-                  <a:srgbClr val="4D4D4D">
-                    <a:alpha val="100000"/>
-                  </a:srgbClr>
+                  <a:srgbClr val="FF0000"/>
                 </a:solidFill>
                 <a:latin typeface="Arial"/>
                 <a:cs typeface="Arial"/>
@@ -31830,8 +32274,8 @@
         </p:nvSpPr>
         <p:spPr>
           <a:xfrm>
-            <a:off x="3800839" y="4074673"/>
-            <a:ext cx="74490" cy="138316"/>
+            <a:off x="2305416" y="3695262"/>
+            <a:ext cx="74489" cy="138316"/>
           </a:xfrm>
           <a:prstGeom prst="rect">
             <a:avLst/>
@@ -31842,23 +32286,15 @@
           <a:bodyPr wrap="none" lIns="0" tIns="0" rIns="0" bIns="0" anchor="ctr" anchorCtr="1"/>
           <a:lstStyle/>
           <a:p>
-            <a:pPr marL="0" marR="0" indent="0" algn="l">
+            <a:pPr>
               <a:lnSpc>
                 <a:spcPts val="880"/>
               </a:lnSpc>
-              <a:spcBef>
-                <a:spcPts val="0"/>
-              </a:spcBef>
-              <a:spcAft>
-                <a:spcPts val="0"/>
-              </a:spcAft>
             </a:pPr>
             <a:r>
               <a:rPr sz="880">
                 <a:solidFill>
-                  <a:srgbClr val="4D4D4D">
-                    <a:alpha val="100000"/>
-                  </a:srgbClr>
+                  <a:srgbClr val="FF0000"/>
                 </a:solidFill>
                 <a:latin typeface="Symbol"/>
                 <a:cs typeface="Symbol"/>
@@ -31882,7 +32318,7 @@
         </p:nvSpPr>
         <p:spPr>
           <a:xfrm>
-            <a:off x="3875330" y="4071602"/>
+            <a:off x="2379908" y="3692191"/>
             <a:ext cx="131691" cy="141388"/>
           </a:xfrm>
           <a:prstGeom prst="rect">
@@ -31894,23 +32330,15 @@
           <a:bodyPr wrap="none" lIns="0" tIns="0" rIns="0" bIns="0" anchor="ctr" anchorCtr="1"/>
           <a:lstStyle/>
           <a:p>
-            <a:pPr marL="0" marR="0" indent="0" algn="l">
+            <a:pPr>
               <a:lnSpc>
                 <a:spcPts val="880"/>
               </a:lnSpc>
-              <a:spcBef>
-                <a:spcPts val="0"/>
-              </a:spcBef>
-              <a:spcAft>
-                <a:spcPts val="0"/>
-              </a:spcAft>
             </a:pPr>
             <a:r>
               <a:rPr sz="880">
                 <a:solidFill>
-                  <a:srgbClr val="4D4D4D">
-                    <a:alpha val="100000"/>
-                  </a:srgbClr>
+                  <a:srgbClr val="FF0000"/>
                 </a:solidFill>
                 <a:latin typeface="Arial"/>
                 <a:cs typeface="Arial"/>
@@ -31934,7 +32362,7 @@
         </p:nvSpPr>
         <p:spPr>
           <a:xfrm>
-            <a:off x="4028891" y="4071602"/>
+            <a:off x="2533466" y="3692191"/>
             <a:ext cx="219756" cy="141388"/>
           </a:xfrm>
           <a:prstGeom prst="rect">
@@ -31946,23 +32374,15 @@
           <a:bodyPr wrap="none" lIns="0" tIns="0" rIns="0" bIns="0" anchor="ctr" anchorCtr="1"/>
           <a:lstStyle/>
           <a:p>
-            <a:pPr marL="0" marR="0" indent="0" algn="l">
+            <a:pPr>
               <a:lnSpc>
                 <a:spcPts val="880"/>
               </a:lnSpc>
-              <a:spcBef>
-                <a:spcPts val="0"/>
-              </a:spcBef>
-              <a:spcAft>
-                <a:spcPts val="0"/>
-              </a:spcAft>
             </a:pPr>
             <a:r>
               <a:rPr sz="880">
                 <a:solidFill>
-                  <a:srgbClr val="4D4D4D">
-                    <a:alpha val="100000"/>
-                  </a:srgbClr>
+                  <a:srgbClr val="FF0000"/>
                 </a:solidFill>
                 <a:latin typeface="Arial"/>
                 <a:cs typeface="Arial"/>
@@ -31986,8 +32406,8 @@
         </p:nvSpPr>
         <p:spPr>
           <a:xfrm>
-            <a:off x="4248649" y="4074673"/>
-            <a:ext cx="74490" cy="138316"/>
+            <a:off x="2753226" y="3695262"/>
+            <a:ext cx="74489" cy="138316"/>
           </a:xfrm>
           <a:prstGeom prst="rect">
             <a:avLst/>
@@ -31998,23 +32418,15 @@
           <a:bodyPr wrap="none" lIns="0" tIns="0" rIns="0" bIns="0" anchor="ctr" anchorCtr="1"/>
           <a:lstStyle/>
           <a:p>
-            <a:pPr marL="0" marR="0" indent="0" algn="l">
+            <a:pPr>
               <a:lnSpc>
                 <a:spcPts val="880"/>
               </a:lnSpc>
-              <a:spcBef>
-                <a:spcPts val="0"/>
-              </a:spcBef>
-              <a:spcAft>
-                <a:spcPts val="0"/>
-              </a:spcAft>
             </a:pPr>
             <a:r>
               <a:rPr sz="880">
                 <a:solidFill>
-                  <a:srgbClr val="4D4D4D">
-                    <a:alpha val="100000"/>
-                  </a:srgbClr>
+                  <a:srgbClr val="FF0000"/>
                 </a:solidFill>
                 <a:latin typeface="Symbol"/>
                 <a:cs typeface="Symbol"/>
@@ -32038,7 +32450,7 @@
         </p:nvSpPr>
         <p:spPr>
           <a:xfrm>
-            <a:off x="4323139" y="4071602"/>
+            <a:off x="2827717" y="3692191"/>
             <a:ext cx="131691" cy="141388"/>
           </a:xfrm>
           <a:prstGeom prst="rect">
@@ -32050,23 +32462,15 @@
           <a:bodyPr wrap="none" lIns="0" tIns="0" rIns="0" bIns="0" anchor="ctr" anchorCtr="1"/>
           <a:lstStyle/>
           <a:p>
-            <a:pPr marL="0" marR="0" indent="0" algn="l">
+            <a:pPr>
               <a:lnSpc>
                 <a:spcPts val="880"/>
               </a:lnSpc>
-              <a:spcBef>
-                <a:spcPts val="0"/>
-              </a:spcBef>
-              <a:spcAft>
-                <a:spcPts val="0"/>
-              </a:spcAft>
             </a:pPr>
             <a:r>
               <a:rPr sz="880">
                 <a:solidFill>
-                  <a:srgbClr val="4D4D4D">
-                    <a:alpha val="100000"/>
-                  </a:srgbClr>
+                  <a:srgbClr val="FF0000"/>
                 </a:solidFill>
                 <a:latin typeface="Arial"/>
                 <a:cs typeface="Arial"/>
@@ -32090,7 +32494,7 @@
         </p:nvSpPr>
         <p:spPr>
           <a:xfrm>
-            <a:off x="4476702" y="4071602"/>
+            <a:off x="2981277" y="3692191"/>
             <a:ext cx="219756" cy="141388"/>
           </a:xfrm>
           <a:prstGeom prst="rect">
@@ -32102,23 +32506,15 @@
           <a:bodyPr wrap="none" lIns="0" tIns="0" rIns="0" bIns="0" anchor="ctr" anchorCtr="1"/>
           <a:lstStyle/>
           <a:p>
-            <a:pPr marL="0" marR="0" indent="0" algn="l">
+            <a:pPr>
               <a:lnSpc>
                 <a:spcPts val="880"/>
               </a:lnSpc>
-              <a:spcBef>
-                <a:spcPts val="0"/>
-              </a:spcBef>
-              <a:spcAft>
-                <a:spcPts val="0"/>
-              </a:spcAft>
             </a:pPr>
             <a:r>
               <a:rPr sz="880">
                 <a:solidFill>
-                  <a:srgbClr val="4D4D4D">
-                    <a:alpha val="100000"/>
-                  </a:srgbClr>
+                  <a:srgbClr val="FF0000"/>
                 </a:solidFill>
                 <a:latin typeface="Arial"/>
                 <a:cs typeface="Arial"/>
@@ -32142,8 +32538,8 @@
         </p:nvSpPr>
         <p:spPr>
           <a:xfrm>
-            <a:off x="4696458" y="4074673"/>
-            <a:ext cx="74490" cy="138316"/>
+            <a:off x="3201035" y="3695262"/>
+            <a:ext cx="74489" cy="138316"/>
           </a:xfrm>
           <a:prstGeom prst="rect">
             <a:avLst/>
@@ -32154,23 +32550,15 @@
           <a:bodyPr wrap="none" lIns="0" tIns="0" rIns="0" bIns="0" anchor="ctr" anchorCtr="1"/>
           <a:lstStyle/>
           <a:p>
-            <a:pPr marL="0" marR="0" indent="0" algn="l">
+            <a:pPr>
               <a:lnSpc>
                 <a:spcPts val="880"/>
               </a:lnSpc>
-              <a:spcBef>
-                <a:spcPts val="0"/>
-              </a:spcBef>
-              <a:spcAft>
-                <a:spcPts val="0"/>
-              </a:spcAft>
             </a:pPr>
             <a:r>
               <a:rPr sz="880">
                 <a:solidFill>
-                  <a:srgbClr val="4D4D4D">
-                    <a:alpha val="100000"/>
-                  </a:srgbClr>
+                  <a:srgbClr val="FF0000"/>
                 </a:solidFill>
                 <a:latin typeface="Symbol"/>
                 <a:cs typeface="Symbol"/>
@@ -32194,7 +32582,7 @@
         </p:nvSpPr>
         <p:spPr>
           <a:xfrm>
-            <a:off x="4770949" y="4071602"/>
+            <a:off x="3275527" y="3692191"/>
             <a:ext cx="131691" cy="141388"/>
           </a:xfrm>
           <a:prstGeom prst="rect">
@@ -32206,23 +32594,15 @@
           <a:bodyPr wrap="none" lIns="0" tIns="0" rIns="0" bIns="0" anchor="ctr" anchorCtr="1"/>
           <a:lstStyle/>
           <a:p>
-            <a:pPr marL="0" marR="0" indent="0" algn="l">
+            <a:pPr>
               <a:lnSpc>
                 <a:spcPts val="880"/>
               </a:lnSpc>
-              <a:spcBef>
-                <a:spcPts val="0"/>
-              </a:spcBef>
-              <a:spcAft>
-                <a:spcPts val="0"/>
-              </a:spcAft>
             </a:pPr>
             <a:r>
               <a:rPr sz="880">
                 <a:solidFill>
-                  <a:srgbClr val="4D4D4D">
-                    <a:alpha val="100000"/>
-                  </a:srgbClr>
+                  <a:srgbClr val="FF0000"/>
                 </a:solidFill>
                 <a:latin typeface="Arial"/>
                 <a:cs typeface="Arial"/>
@@ -32246,7 +32626,7 @@
         </p:nvGrpSpPr>
         <p:grpSpPr>
           <a:xfrm>
-            <a:off x="3702185" y="3593876"/>
+            <a:off x="2206761" y="3214467"/>
             <a:ext cx="428010" cy="384175"/>
             <a:chOff x="3766427" y="2999111"/>
             <a:chExt cx="428010" cy="384175"/>
@@ -32740,7 +33120,7 @@
         </p:nvGrpSpPr>
         <p:grpSpPr>
           <a:xfrm>
-            <a:off x="3260484" y="1381276"/>
+            <a:off x="1765062" y="1001864"/>
             <a:ext cx="1356571" cy="2004354"/>
             <a:chOff x="3412315" y="1531332"/>
             <a:chExt cx="1356571" cy="2004354"/>
@@ -35377,6 +35757,433 @@
           </p:txBody>
         </p:sp>
       </p:grpSp>
+      <p:sp>
+        <p:nvSpPr>
+          <p:cNvPr id="117" name="ZoneTexte 116">
+            <a:extLst>
+              <a:ext uri="{FF2B5EF4-FFF2-40B4-BE49-F238E27FC236}">
+                <a16:creationId xmlns:a16="http://schemas.microsoft.com/office/drawing/2014/main" id="{F14BC5B9-001E-4B1C-DB64-3431E63F9DD4}"/>
+              </a:ext>
+            </a:extLst>
+          </p:cNvPr>
+          <p:cNvSpPr txBox="1"/>
+          <p:nvPr/>
+        </p:nvSpPr>
+        <p:spPr>
+          <a:xfrm>
+            <a:off x="3904878" y="1016042"/>
+            <a:ext cx="914400" cy="236347"/>
+          </a:xfrm>
+          <a:prstGeom prst="rect">
+            <a:avLst/>
+          </a:prstGeom>
+          <a:noFill/>
+        </p:spPr>
+        <p:txBody>
+          <a:bodyPr wrap="square" rtlCol="0">
+            <a:spAutoFit/>
+          </a:bodyPr>
+          <a:lstStyle/>
+          <a:p>
+            <a:r>
+              <a:rPr lang="en-US" dirty="0"/>
+              <a:t>Egypt</a:t>
+            </a:r>
+          </a:p>
+        </p:txBody>
+      </p:sp>
+      <p:sp>
+        <p:nvSpPr>
+          <p:cNvPr id="120" name="ZoneTexte 119">
+            <a:extLst>
+              <a:ext uri="{FF2B5EF4-FFF2-40B4-BE49-F238E27FC236}">
+                <a16:creationId xmlns:a16="http://schemas.microsoft.com/office/drawing/2014/main" id="{B33B5A10-9C1D-0A2B-AF92-B1F582A77D70}"/>
+              </a:ext>
+            </a:extLst>
+          </p:cNvPr>
+          <p:cNvSpPr txBox="1"/>
+          <p:nvPr/>
+        </p:nvSpPr>
+        <p:spPr>
+          <a:xfrm>
+            <a:off x="468969" y="1889632"/>
+            <a:ext cx="914400" cy="524374"/>
+          </a:xfrm>
+          <a:prstGeom prst="rect">
+            <a:avLst/>
+          </a:prstGeom>
+          <a:noFill/>
+        </p:spPr>
+        <p:txBody>
+          <a:bodyPr wrap="square" rtlCol="0">
+            <a:spAutoFit/>
+          </a:bodyPr>
+          <a:lstStyle/>
+          <a:p>
+            <a:r>
+              <a:rPr lang="en-US" dirty="0"/>
+              <a:t>Democratic</a:t>
+            </a:r>
+            <a:br>
+              <a:rPr lang="en-US" dirty="0"/>
+            </a:br>
+            <a:r>
+              <a:rPr lang="en-US" dirty="0"/>
+              <a:t>Republic of Congo</a:t>
+            </a:r>
+          </a:p>
+        </p:txBody>
+      </p:sp>
+      <p:sp>
+        <p:nvSpPr>
+          <p:cNvPr id="121" name="ZoneTexte 120">
+            <a:extLst>
+              <a:ext uri="{FF2B5EF4-FFF2-40B4-BE49-F238E27FC236}">
+                <a16:creationId xmlns:a16="http://schemas.microsoft.com/office/drawing/2014/main" id="{99EE1128-E8BE-35DD-9B5B-9AA40EDA2DED}"/>
+              </a:ext>
+            </a:extLst>
+          </p:cNvPr>
+          <p:cNvSpPr txBox="1"/>
+          <p:nvPr/>
+        </p:nvSpPr>
+        <p:spPr>
+          <a:xfrm>
+            <a:off x="3733176" y="2714336"/>
+            <a:ext cx="914400" cy="236347"/>
+          </a:xfrm>
+          <a:prstGeom prst="rect">
+            <a:avLst/>
+          </a:prstGeom>
+          <a:noFill/>
+        </p:spPr>
+        <p:txBody>
+          <a:bodyPr wrap="square" rtlCol="0">
+            <a:spAutoFit/>
+          </a:bodyPr>
+          <a:lstStyle/>
+          <a:p>
+            <a:r>
+              <a:rPr lang="en-US" dirty="0"/>
+              <a:t>Malawi</a:t>
+            </a:r>
+          </a:p>
+        </p:txBody>
+      </p:sp>
+      <p:sp>
+        <p:nvSpPr>
+          <p:cNvPr id="122" name="ZoneTexte 121">
+            <a:extLst>
+              <a:ext uri="{FF2B5EF4-FFF2-40B4-BE49-F238E27FC236}">
+                <a16:creationId xmlns:a16="http://schemas.microsoft.com/office/drawing/2014/main" id="{7970B14E-6E66-61C1-9FED-139FD366DFCC}"/>
+              </a:ext>
+            </a:extLst>
+          </p:cNvPr>
+          <p:cNvSpPr txBox="1"/>
+          <p:nvPr/>
+        </p:nvSpPr>
+        <p:spPr>
+          <a:xfrm>
+            <a:off x="4053914" y="1470757"/>
+            <a:ext cx="914400" cy="236347"/>
+          </a:xfrm>
+          <a:prstGeom prst="rect">
+            <a:avLst/>
+          </a:prstGeom>
+          <a:noFill/>
+        </p:spPr>
+        <p:txBody>
+          <a:bodyPr wrap="square" rtlCol="0">
+            <a:spAutoFit/>
+          </a:bodyPr>
+          <a:lstStyle/>
+          <a:p>
+            <a:r>
+              <a:rPr lang="en-US" dirty="0"/>
+              <a:t>Ethiopia</a:t>
+            </a:r>
+          </a:p>
+        </p:txBody>
+      </p:sp>
+      <p:sp>
+        <p:nvSpPr>
+          <p:cNvPr id="123" name="ZoneTexte 122">
+            <a:extLst>
+              <a:ext uri="{FF2B5EF4-FFF2-40B4-BE49-F238E27FC236}">
+                <a16:creationId xmlns:a16="http://schemas.microsoft.com/office/drawing/2014/main" id="{BA6AD47D-B516-28FB-A897-FCD4E6D74FC6}"/>
+              </a:ext>
+            </a:extLst>
+          </p:cNvPr>
+          <p:cNvSpPr txBox="1"/>
+          <p:nvPr/>
+        </p:nvSpPr>
+        <p:spPr>
+          <a:xfrm>
+            <a:off x="578209" y="1490086"/>
+            <a:ext cx="914400" cy="236347"/>
+          </a:xfrm>
+          <a:prstGeom prst="rect">
+            <a:avLst/>
+          </a:prstGeom>
+          <a:noFill/>
+        </p:spPr>
+        <p:txBody>
+          <a:bodyPr wrap="square" rtlCol="0">
+            <a:spAutoFit/>
+          </a:bodyPr>
+          <a:lstStyle/>
+          <a:p>
+            <a:r>
+              <a:rPr lang="en-US" dirty="0"/>
+              <a:t>Nigeria</a:t>
+            </a:r>
+          </a:p>
+        </p:txBody>
+      </p:sp>
+      <p:sp>
+        <p:nvSpPr>
+          <p:cNvPr id="124" name="ZoneTexte 123">
+            <a:extLst>
+              <a:ext uri="{FF2B5EF4-FFF2-40B4-BE49-F238E27FC236}">
+                <a16:creationId xmlns:a16="http://schemas.microsoft.com/office/drawing/2014/main" id="{5084582F-6C7B-B8A1-A8F2-C67A2CF9414D}"/>
+              </a:ext>
+            </a:extLst>
+          </p:cNvPr>
+          <p:cNvSpPr txBox="1"/>
+          <p:nvPr/>
+        </p:nvSpPr>
+        <p:spPr>
+          <a:xfrm>
+            <a:off x="157047" y="1217541"/>
+            <a:ext cx="914400" cy="236347"/>
+          </a:xfrm>
+          <a:prstGeom prst="rect">
+            <a:avLst/>
+          </a:prstGeom>
+          <a:noFill/>
+        </p:spPr>
+        <p:txBody>
+          <a:bodyPr wrap="square" rtlCol="0">
+            <a:spAutoFit/>
+          </a:bodyPr>
+          <a:lstStyle/>
+          <a:p>
+            <a:r>
+              <a:rPr lang="en-US" dirty="0"/>
+              <a:t>Ghana</a:t>
+            </a:r>
+          </a:p>
+        </p:txBody>
+      </p:sp>
+      <p:sp>
+        <p:nvSpPr>
+          <p:cNvPr id="125" name="ZoneTexte 124">
+            <a:extLst>
+              <a:ext uri="{FF2B5EF4-FFF2-40B4-BE49-F238E27FC236}">
+                <a16:creationId xmlns:a16="http://schemas.microsoft.com/office/drawing/2014/main" id="{B400A5B1-787A-A4E0-B056-6C9C909A8081}"/>
+              </a:ext>
+            </a:extLst>
+          </p:cNvPr>
+          <p:cNvSpPr txBox="1"/>
+          <p:nvPr/>
+        </p:nvSpPr>
+        <p:spPr>
+          <a:xfrm>
+            <a:off x="2711149" y="3463069"/>
+            <a:ext cx="914400" cy="236347"/>
+          </a:xfrm>
+          <a:prstGeom prst="rect">
+            <a:avLst/>
+          </a:prstGeom>
+          <a:noFill/>
+        </p:spPr>
+        <p:txBody>
+          <a:bodyPr wrap="square" rtlCol="0">
+            <a:spAutoFit/>
+          </a:bodyPr>
+          <a:lstStyle/>
+          <a:p>
+            <a:r>
+              <a:rPr lang="en-US" dirty="0"/>
+              <a:t>South Africa</a:t>
+            </a:r>
+          </a:p>
+        </p:txBody>
+      </p:sp>
+      <p:sp>
+        <p:nvSpPr>
+          <p:cNvPr id="126" name="ZoneTexte 125">
+            <a:extLst>
+              <a:ext uri="{FF2B5EF4-FFF2-40B4-BE49-F238E27FC236}">
+                <a16:creationId xmlns:a16="http://schemas.microsoft.com/office/drawing/2014/main" id="{84ACE411-F272-E4D9-33A0-1488FD9F44D3}"/>
+              </a:ext>
+            </a:extLst>
+          </p:cNvPr>
+          <p:cNvSpPr txBox="1"/>
+          <p:nvPr/>
+        </p:nvSpPr>
+        <p:spPr>
+          <a:xfrm>
+            <a:off x="4245753" y="1876062"/>
+            <a:ext cx="914400" cy="236347"/>
+          </a:xfrm>
+          <a:prstGeom prst="rect">
+            <a:avLst/>
+          </a:prstGeom>
+          <a:noFill/>
+        </p:spPr>
+        <p:txBody>
+          <a:bodyPr wrap="square" rtlCol="0">
+            <a:spAutoFit/>
+          </a:bodyPr>
+          <a:lstStyle/>
+          <a:p>
+            <a:r>
+              <a:rPr lang="en-US" dirty="0"/>
+              <a:t>Kenya</a:t>
+            </a:r>
+          </a:p>
+        </p:txBody>
+      </p:sp>
+      <p:sp>
+        <p:nvSpPr>
+          <p:cNvPr id="127" name="ZoneTexte 126">
+            <a:extLst>
+              <a:ext uri="{FF2B5EF4-FFF2-40B4-BE49-F238E27FC236}">
+                <a16:creationId xmlns:a16="http://schemas.microsoft.com/office/drawing/2014/main" id="{00AB23FB-21A3-B497-186E-F0795DD2255F}"/>
+              </a:ext>
+            </a:extLst>
+          </p:cNvPr>
+          <p:cNvSpPr txBox="1"/>
+          <p:nvPr/>
+        </p:nvSpPr>
+        <p:spPr>
+          <a:xfrm>
+            <a:off x="3303716" y="1883883"/>
+            <a:ext cx="914400" cy="236347"/>
+          </a:xfrm>
+          <a:prstGeom prst="rect">
+            <a:avLst/>
+          </a:prstGeom>
+          <a:noFill/>
+        </p:spPr>
+        <p:txBody>
+          <a:bodyPr wrap="square" rtlCol="0">
+            <a:spAutoFit/>
+          </a:bodyPr>
+          <a:lstStyle/>
+          <a:p>
+            <a:r>
+              <a:rPr lang="en-US" dirty="0"/>
+              <a:t>Uganda</a:t>
+            </a:r>
+          </a:p>
+        </p:txBody>
+      </p:sp>
+      <p:sp>
+        <p:nvSpPr>
+          <p:cNvPr id="128" name="ZoneTexte 127">
+            <a:extLst>
+              <a:ext uri="{FF2B5EF4-FFF2-40B4-BE49-F238E27FC236}">
+                <a16:creationId xmlns:a16="http://schemas.microsoft.com/office/drawing/2014/main" id="{00635B37-395A-7665-65CF-E41A57291981}"/>
+              </a:ext>
+            </a:extLst>
+          </p:cNvPr>
+          <p:cNvSpPr txBox="1"/>
+          <p:nvPr/>
+        </p:nvSpPr>
+        <p:spPr>
+          <a:xfrm>
+            <a:off x="3945250" y="2444978"/>
+            <a:ext cx="914400" cy="236347"/>
+          </a:xfrm>
+          <a:prstGeom prst="rect">
+            <a:avLst/>
+          </a:prstGeom>
+          <a:noFill/>
+        </p:spPr>
+        <p:txBody>
+          <a:bodyPr wrap="square" rtlCol="0">
+            <a:spAutoFit/>
+          </a:bodyPr>
+          <a:lstStyle/>
+          <a:p>
+            <a:r>
+              <a:rPr lang="en-US" dirty="0"/>
+              <a:t>Tanzania</a:t>
+            </a:r>
+          </a:p>
+        </p:txBody>
+      </p:sp>
+      <p:sp>
+        <p:nvSpPr>
+          <p:cNvPr id="129" name="ZoneTexte 128">
+            <a:extLst>
+              <a:ext uri="{FF2B5EF4-FFF2-40B4-BE49-F238E27FC236}">
+                <a16:creationId xmlns:a16="http://schemas.microsoft.com/office/drawing/2014/main" id="{F7EAC0F7-2448-72C1-9E69-9711D3A546ED}"/>
+              </a:ext>
+            </a:extLst>
+          </p:cNvPr>
+          <p:cNvSpPr txBox="1"/>
+          <p:nvPr/>
+        </p:nvSpPr>
+        <p:spPr>
+          <a:xfrm>
+            <a:off x="3003688" y="2911528"/>
+            <a:ext cx="914400" cy="236347"/>
+          </a:xfrm>
+          <a:prstGeom prst="rect">
+            <a:avLst/>
+          </a:prstGeom>
+          <a:noFill/>
+        </p:spPr>
+        <p:txBody>
+          <a:bodyPr wrap="square" rtlCol="0">
+            <a:spAutoFit/>
+          </a:bodyPr>
+          <a:lstStyle/>
+          <a:p>
+            <a:r>
+              <a:rPr lang="en-US" dirty="0"/>
+              <a:t>Zambia</a:t>
+            </a:r>
+          </a:p>
+        </p:txBody>
+      </p:sp>
+      <p:sp>
+        <p:nvSpPr>
+          <p:cNvPr id="131" name="ZoneTexte 130">
+            <a:extLst>
+              <a:ext uri="{FF2B5EF4-FFF2-40B4-BE49-F238E27FC236}">
+                <a16:creationId xmlns:a16="http://schemas.microsoft.com/office/drawing/2014/main" id="{4E852EBC-E7D7-B977-8B14-9274203D837A}"/>
+              </a:ext>
+            </a:extLst>
+          </p:cNvPr>
+          <p:cNvSpPr txBox="1"/>
+          <p:nvPr/>
+        </p:nvSpPr>
+        <p:spPr>
+          <a:xfrm>
+            <a:off x="3056305" y="3202680"/>
+            <a:ext cx="914400" cy="236347"/>
+          </a:xfrm>
+          <a:prstGeom prst="rect">
+            <a:avLst/>
+          </a:prstGeom>
+          <a:noFill/>
+        </p:spPr>
+        <p:txBody>
+          <a:bodyPr wrap="square" rtlCol="0">
+            <a:spAutoFit/>
+          </a:bodyPr>
+          <a:lstStyle/>
+          <a:p>
+            <a:r>
+              <a:rPr lang="en-US" dirty="0"/>
+              <a:t>Zimbabwe</a:t>
+            </a:r>
+          </a:p>
+        </p:txBody>
+      </p:sp>
     </p:spTree>
     <p:extLst>
       <p:ext uri="{BB962C8B-B14F-4D97-AF65-F5344CB8AC3E}">
